--- a/docs/ppt/医院数据管理平台-项目汇报.pptx
+++ b/docs/ppt/医院数据管理平台-项目汇报.pptx
@@ -3117,12 +3117,10 @@
             <a:avLst/>
           </a:prstGeom>
           <a:solidFill>
-            <a:srgbClr val="0B1F2A"/>
+            <a:srgbClr val="02091A"/>
           </a:solidFill>
-          <a:ln w="9525">
-            <a:solidFill>
-              <a:srgbClr val="0B1F2A"/>
-            </a:solidFill>
+          <a:ln>
+            <a:noFill/>
           </a:ln>
           <a:effectLst/>
         </p:spPr>
@@ -3163,12 +3161,10 @@
             <a:avLst/>
           </a:prstGeom>
           <a:solidFill>
-            <a:srgbClr val="02B08A"/>
+            <a:srgbClr val="7FE3FF"/>
           </a:solidFill>
-          <a:ln w="9525">
-            <a:solidFill>
-              <a:srgbClr val="02B08A"/>
-            </a:solidFill>
+          <a:ln>
+            <a:noFill/>
           </a:ln>
           <a:effectLst/>
         </p:spPr>
@@ -3268,7 +3264,7 @@
             <a:r>
               <a:rPr sz="1250" b="1">
                 <a:solidFill>
-                  <a:srgbClr val="02B08A"/>
+                  <a:srgbClr val="5CC8FF"/>
                 </a:solidFill>
                 <a:latin typeface="微软雅黑"/>
                 <a:ea typeface="微软雅黑"/>
@@ -3323,7 +3319,7 @@
             <a:r>
               <a:rPr sz="4000" b="1">
                 <a:solidFill>
-                  <a:srgbClr val="02B08A"/>
+                  <a:srgbClr val="7FE3FF"/>
                 </a:solidFill>
                 <a:latin typeface="微软雅黑"/>
                 <a:ea typeface="微软雅黑"/>
@@ -3364,7 +3360,7 @@
             <a:r>
               <a:rPr sz="1350" b="0">
                 <a:solidFill>
-                  <a:srgbClr val="C7D8DE"/>
+                  <a:srgbClr val="C7DCF2"/>
                 </a:solidFill>
                 <a:latin typeface="微软雅黑"/>
                 <a:ea typeface="微软雅黑"/>
@@ -3378,7 +3374,7 @@
             <a:r>
               <a:rPr sz="1350" b="0">
                 <a:solidFill>
-                  <a:srgbClr val="C7D8DE"/>
+                  <a:srgbClr val="C7DCF2"/>
                 </a:solidFill>
                 <a:latin typeface="微软雅黑"/>
                 <a:ea typeface="微软雅黑"/>
@@ -3415,7 +3411,7 @@
             <a:r>
               <a:rPr sz="1050" b="0">
                 <a:solidFill>
-                  <a:srgbClr val="7E97A1"/>
+                  <a:srgbClr val="7F9DC4"/>
                 </a:solidFill>
                 <a:latin typeface="微软雅黑"/>
                 <a:ea typeface="微软雅黑"/>
@@ -3489,7 +3485,7 @@
             <a:r>
               <a:rPr sz="1050" b="0">
                 <a:solidFill>
-                  <a:srgbClr val="7E97A1"/>
+                  <a:srgbClr val="7F9DC4"/>
                 </a:solidFill>
                 <a:latin typeface="微软雅黑"/>
                 <a:ea typeface="微软雅黑"/>
@@ -3563,7 +3559,7 @@
             <a:r>
               <a:rPr sz="1050" b="0">
                 <a:solidFill>
-                  <a:srgbClr val="7E97A1"/>
+                  <a:srgbClr val="7F9DC4"/>
                 </a:solidFill>
                 <a:latin typeface="微软雅黑"/>
                 <a:ea typeface="微软雅黑"/>
@@ -3637,7 +3633,7 @@
             <a:r>
               <a:rPr sz="1250" b="1">
                 <a:solidFill>
-                  <a:srgbClr val="02B08A"/>
+                  <a:srgbClr val="7FFFE0"/>
                 </a:solidFill>
                 <a:latin typeface="微软雅黑"/>
                 <a:ea typeface="微软雅黑"/>
@@ -3674,7 +3670,7 @@
             <a:r>
               <a:rPr sz="950" b="0">
                 <a:solidFill>
-                  <a:srgbClr val="6B7C85"/>
+                  <a:srgbClr val="7E9EC4"/>
                 </a:solidFill>
                 <a:latin typeface="微软雅黑"/>
                 <a:ea typeface="微软雅黑"/>
@@ -3711,7 +3707,7 @@
             <a:r>
               <a:rPr sz="950" b="0">
                 <a:solidFill>
-                  <a:srgbClr val="6B7C85"/>
+                  <a:srgbClr val="7E9EC4"/>
                 </a:solidFill>
                 <a:latin typeface="微软雅黑"/>
                 <a:ea typeface="微软雅黑"/>
@@ -3749,18 +3745,16 @@
         <p:spPr>
           <a:xfrm>
             <a:off x="0" y="0"/>
-            <a:ext cx="146304" cy="6858000"/>
+            <a:ext cx="12191695" cy="6858000"/>
           </a:xfrm>
           <a:prstGeom prst="rect">
             <a:avLst/>
           </a:prstGeom>
           <a:solidFill>
-            <a:srgbClr val="027C8C"/>
+            <a:srgbClr val="04122B"/>
           </a:solidFill>
-          <a:ln w="9525">
-            <a:solidFill>
-              <a:srgbClr val="027C8C"/>
-            </a:solidFill>
+          <a:ln>
+            <a:noFill/>
           </a:ln>
           <a:effectLst/>
         </p:spPr>
@@ -3788,7 +3782,51 @@
       </p:sp>
       <p:sp>
         <p:nvSpPr>
-          <p:cNvPr id="3" name="TextBox 2"/>
+          <p:cNvPr id="3" name="Rectangle 2"/>
+          <p:cNvSpPr/>
+          <p:nvPr/>
+        </p:nvSpPr>
+        <p:spPr>
+          <a:xfrm>
+            <a:off x="0" y="0"/>
+            <a:ext cx="146304" cy="6858000"/>
+          </a:xfrm>
+          <a:prstGeom prst="rect">
+            <a:avLst/>
+          </a:prstGeom>
+          <a:solidFill>
+            <a:srgbClr val="7FE3FF"/>
+          </a:solidFill>
+          <a:ln>
+            <a:noFill/>
+          </a:ln>
+          <a:effectLst/>
+        </p:spPr>
+        <p:style>
+          <a:lnRef idx="1">
+            <a:schemeClr val="accent1"/>
+          </a:lnRef>
+          <a:fillRef idx="3">
+            <a:schemeClr val="accent1"/>
+          </a:fillRef>
+          <a:effectRef idx="2">
+            <a:schemeClr val="accent1"/>
+          </a:effectRef>
+          <a:fontRef idx="minor">
+            <a:schemeClr val="lt1"/>
+          </a:fontRef>
+        </p:style>
+        <p:txBody>
+          <a:bodyPr rtlCol="0" anchor="ctr"/>
+          <a:lstStyle/>
+          <a:p>
+            <a:pPr algn="ctr"/>
+          </a:p>
+        </p:txBody>
+      </p:sp>
+      <p:sp>
+        <p:nvSpPr>
+          <p:cNvPr id="4" name="TextBox 3"/>
           <p:cNvSpPr txBox="1"/>
           <p:nvPr/>
         </p:nvSpPr>
@@ -3812,7 +3850,7 @@
             <a:r>
               <a:rPr sz="1150" b="1">
                 <a:solidFill>
-                  <a:srgbClr val="027C8C"/>
+                  <a:srgbClr val="5CC8FF"/>
                 </a:solidFill>
                 <a:latin typeface="微软雅黑"/>
                 <a:ea typeface="微软雅黑"/>
@@ -3825,7 +3863,7 @@
       </p:sp>
       <p:sp>
         <p:nvSpPr>
-          <p:cNvPr id="4" name="TextBox 3"/>
+          <p:cNvPr id="5" name="TextBox 4"/>
           <p:cNvSpPr txBox="1"/>
           <p:nvPr/>
         </p:nvSpPr>
@@ -3849,7 +3887,7 @@
             <a:r>
               <a:rPr sz="2700" b="1">
                 <a:solidFill>
-                  <a:srgbClr val="0B1F2A"/>
+                  <a:srgbClr val="ECF7FF"/>
                 </a:solidFill>
                 <a:latin typeface="微软雅黑"/>
                 <a:ea typeface="微软雅黑"/>
@@ -3862,7 +3900,7 @@
       </p:sp>
       <p:sp>
         <p:nvSpPr>
-          <p:cNvPr id="5" name="TextBox 4"/>
+          <p:cNvPr id="6" name="TextBox 5"/>
           <p:cNvSpPr txBox="1"/>
           <p:nvPr/>
         </p:nvSpPr>
@@ -3890,7 +3928,7 @@
             <a:r>
               <a:rPr sz="1250" b="0">
                 <a:solidFill>
-                  <a:srgbClr val="3D4C55"/>
+                  <a:srgbClr val="BBD4EC"/>
                 </a:solidFill>
                 <a:latin typeface="微软雅黑"/>
                 <a:ea typeface="微软雅黑"/>
@@ -3903,7 +3941,7 @@
       </p:sp>
       <p:sp>
         <p:nvSpPr>
-          <p:cNvPr id="6" name="TextBox 5"/>
+          <p:cNvPr id="7" name="TextBox 6"/>
           <p:cNvSpPr txBox="1"/>
           <p:nvPr/>
         </p:nvSpPr>
@@ -3927,7 +3965,7 @@
             <a:r>
               <a:rPr sz="950" b="0">
                 <a:solidFill>
-                  <a:srgbClr val="6B7C85"/>
+                  <a:srgbClr val="7E9EC4"/>
                 </a:solidFill>
                 <a:latin typeface="微软雅黑"/>
                 <a:ea typeface="微软雅黑"/>
@@ -3940,7 +3978,7 @@
       </p:sp>
       <p:sp>
         <p:nvSpPr>
-          <p:cNvPr id="7" name="TextBox 6"/>
+          <p:cNvPr id="8" name="TextBox 7"/>
           <p:cNvSpPr txBox="1"/>
           <p:nvPr/>
         </p:nvSpPr>
@@ -3964,7 +4002,7 @@
             <a:r>
               <a:rPr sz="950" b="0">
                 <a:solidFill>
-                  <a:srgbClr val="6B7C85"/>
+                  <a:srgbClr val="7E9EC4"/>
                 </a:solidFill>
                 <a:latin typeface="微软雅黑"/>
                 <a:ea typeface="微软雅黑"/>
@@ -3977,7 +4015,7 @@
       </p:sp>
       <p:sp>
         <p:nvSpPr>
-          <p:cNvPr id="8" name="Rounded Rectangle 7"/>
+          <p:cNvPr id="9" name="Rounded Rectangle 8"/>
           <p:cNvSpPr/>
           <p:nvPr/>
         </p:nvSpPr>
@@ -3992,11 +4030,11 @@
             </a:avLst>
           </a:prstGeom>
           <a:solidFill>
-            <a:srgbClr val="E8F1F3"/>
+            <a:srgbClr val="08224A"/>
           </a:solidFill>
           <a:ln w="9525">
             <a:solidFill>
-              <a:srgbClr val="E8F1F3"/>
+              <a:srgbClr val="1A4272"/>
             </a:solidFill>
           </a:ln>
           <a:effectLst/>
@@ -4025,7 +4063,7 @@
       </p:sp>
       <p:sp>
         <p:nvSpPr>
-          <p:cNvPr id="9" name="TextBox 8"/>
+          <p:cNvPr id="10" name="TextBox 9"/>
           <p:cNvSpPr txBox="1"/>
           <p:nvPr/>
         </p:nvSpPr>
@@ -4053,7 +4091,7 @@
             <a:r>
               <a:rPr sz="1200" b="1">
                 <a:solidFill>
-                  <a:srgbClr val="027C8C"/>
+                  <a:srgbClr val="5CC8FF"/>
                 </a:solidFill>
                 <a:latin typeface="微软雅黑"/>
                 <a:ea typeface="微软雅黑"/>
@@ -4071,7 +4109,7 @@
             <a:r>
               <a:rPr sz="2400" b="1">
                 <a:solidFill>
-                  <a:srgbClr val="0B1F2A"/>
+                  <a:srgbClr val="7FE3FF"/>
                 </a:solidFill>
                 <a:latin typeface="微软雅黑"/>
                 <a:ea typeface="微软雅黑"/>
@@ -4085,7 +4123,7 @@
             <a:r>
               <a:rPr sz="1100" b="0">
                 <a:solidFill>
-                  <a:srgbClr val="3D4C55"/>
+                  <a:srgbClr val="BBD4EC"/>
                 </a:solidFill>
                 <a:latin typeface="微软雅黑"/>
                 <a:ea typeface="微软雅黑"/>
@@ -4098,7 +4136,7 @@
       </p:sp>
       <p:sp>
         <p:nvSpPr>
-          <p:cNvPr id="10" name="TextBox 9"/>
+          <p:cNvPr id="11" name="TextBox 10"/>
           <p:cNvSpPr txBox="1"/>
           <p:nvPr/>
         </p:nvSpPr>
@@ -4126,7 +4164,7 @@
             <a:r>
               <a:rPr sz="1200" b="1">
                 <a:solidFill>
-                  <a:srgbClr val="D98B2B"/>
+                  <a:srgbClr val="FFC24D"/>
                 </a:solidFill>
                 <a:latin typeface="微软雅黑"/>
                 <a:ea typeface="微软雅黑"/>
@@ -4144,7 +4182,7 @@
             <a:r>
               <a:rPr sz="2400" b="1">
                 <a:solidFill>
-                  <a:srgbClr val="0B1F2A"/>
+                  <a:srgbClr val="FFC24D"/>
                 </a:solidFill>
                 <a:latin typeface="微软雅黑"/>
                 <a:ea typeface="微软雅黑"/>
@@ -4158,7 +4196,7 @@
             <a:r>
               <a:rPr sz="1100" b="0">
                 <a:solidFill>
-                  <a:srgbClr val="3D4C55"/>
+                  <a:srgbClr val="BBD4EC"/>
                 </a:solidFill>
                 <a:latin typeface="微软雅黑"/>
                 <a:ea typeface="微软雅黑"/>
@@ -4171,7 +4209,7 @@
       </p:sp>
       <p:sp>
         <p:nvSpPr>
-          <p:cNvPr id="11" name="Rounded Rectangle 10"/>
+          <p:cNvPr id="12" name="Rounded Rectangle 11"/>
           <p:cNvSpPr/>
           <p:nvPr/>
         </p:nvSpPr>
@@ -4186,11 +4224,11 @@
             </a:avLst>
           </a:prstGeom>
           <a:solidFill>
-            <a:srgbClr val="F2F6F8"/>
+            <a:srgbClr val="061A38"/>
           </a:solidFill>
           <a:ln w="9525">
             <a:solidFill>
-              <a:srgbClr val="F2F6F8"/>
+              <a:srgbClr val="1A4272"/>
             </a:solidFill>
           </a:ln>
           <a:effectLst/>
@@ -4219,7 +4257,7 @@
       </p:sp>
       <p:sp>
         <p:nvSpPr>
-          <p:cNvPr id="12" name="Rounded Rectangle 11"/>
+          <p:cNvPr id="13" name="Rounded Rectangle 12"/>
           <p:cNvSpPr/>
           <p:nvPr/>
         </p:nvSpPr>
@@ -4234,12 +4272,10 @@
             </a:avLst>
           </a:prstGeom>
           <a:solidFill>
-            <a:srgbClr val="027C8C"/>
+            <a:srgbClr val="5CC8FF"/>
           </a:solidFill>
-          <a:ln w="9525">
-            <a:solidFill>
-              <a:srgbClr val="027C8C"/>
-            </a:solidFill>
+          <a:ln>
+            <a:noFill/>
           </a:ln>
           <a:effectLst/>
         </p:spPr>
@@ -4267,7 +4303,7 @@
       </p:sp>
       <p:sp>
         <p:nvSpPr>
-          <p:cNvPr id="13" name="TextBox 12"/>
+          <p:cNvPr id="14" name="TextBox 13"/>
           <p:cNvSpPr txBox="1"/>
           <p:nvPr/>
         </p:nvSpPr>
@@ -4291,7 +4327,7 @@
             <a:r>
               <a:rPr sz="1600" b="1">
                 <a:solidFill>
-                  <a:srgbClr val="0B1F2A"/>
+                  <a:srgbClr val="ECF7FF"/>
                 </a:solidFill>
                 <a:latin typeface="微软雅黑"/>
                 <a:ea typeface="微软雅黑"/>
@@ -4304,7 +4340,7 @@
       </p:sp>
       <p:sp>
         <p:nvSpPr>
-          <p:cNvPr id="14" name="TextBox 13"/>
+          <p:cNvPr id="15" name="TextBox 14"/>
           <p:cNvSpPr txBox="1"/>
           <p:nvPr/>
         </p:nvSpPr>
@@ -4335,7 +4371,7 @@
             <a:r>
               <a:rPr sz="1150" b="0">
                 <a:solidFill>
-                  <a:srgbClr val="3D4C55"/>
+                  <a:srgbClr val="BBD4EC"/>
                 </a:solidFill>
                 <a:latin typeface="微软雅黑"/>
                 <a:ea typeface="微软雅黑"/>
@@ -4356,7 +4392,7 @@
             <a:r>
               <a:rPr sz="1150" b="0">
                 <a:solidFill>
-                  <a:srgbClr val="3D4C55"/>
+                  <a:srgbClr val="BBD4EC"/>
                 </a:solidFill>
                 <a:latin typeface="微软雅黑"/>
                 <a:ea typeface="微软雅黑"/>
@@ -4377,7 +4413,7 @@
             <a:r>
               <a:rPr sz="1150" b="0">
                 <a:solidFill>
-                  <a:srgbClr val="3D4C55"/>
+                  <a:srgbClr val="BBD4EC"/>
                 </a:solidFill>
                 <a:latin typeface="微软雅黑"/>
                 <a:ea typeface="微软雅黑"/>
@@ -4398,7 +4434,7 @@
             <a:r>
               <a:rPr sz="1150" b="0">
                 <a:solidFill>
-                  <a:srgbClr val="3D4C55"/>
+                  <a:srgbClr val="BBD4EC"/>
                 </a:solidFill>
                 <a:latin typeface="微软雅黑"/>
                 <a:ea typeface="微软雅黑"/>
@@ -4411,7 +4447,7 @@
       </p:sp>
       <p:sp>
         <p:nvSpPr>
-          <p:cNvPr id="15" name="Rounded Rectangle 14"/>
+          <p:cNvPr id="16" name="Rounded Rectangle 15"/>
           <p:cNvSpPr/>
           <p:nvPr/>
         </p:nvSpPr>
@@ -4426,11 +4462,11 @@
             </a:avLst>
           </a:prstGeom>
           <a:solidFill>
-            <a:srgbClr val="F2F6F8"/>
+            <a:srgbClr val="061A38"/>
           </a:solidFill>
           <a:ln w="9525">
             <a:solidFill>
-              <a:srgbClr val="F2F6F8"/>
+              <a:srgbClr val="1A4272"/>
             </a:solidFill>
           </a:ln>
           <a:effectLst/>
@@ -4459,7 +4495,7 @@
       </p:sp>
       <p:sp>
         <p:nvSpPr>
-          <p:cNvPr id="16" name="Rounded Rectangle 15"/>
+          <p:cNvPr id="17" name="Rounded Rectangle 16"/>
           <p:cNvSpPr/>
           <p:nvPr/>
         </p:nvSpPr>
@@ -4474,12 +4510,10 @@
             </a:avLst>
           </a:prstGeom>
           <a:solidFill>
-            <a:srgbClr val="D98B2B"/>
+            <a:srgbClr val="FFC24D"/>
           </a:solidFill>
-          <a:ln w="9525">
-            <a:solidFill>
-              <a:srgbClr val="D98B2B"/>
-            </a:solidFill>
+          <a:ln>
+            <a:noFill/>
           </a:ln>
           <a:effectLst/>
         </p:spPr>
@@ -4507,7 +4541,7 @@
       </p:sp>
       <p:sp>
         <p:nvSpPr>
-          <p:cNvPr id="17" name="TextBox 16"/>
+          <p:cNvPr id="18" name="TextBox 17"/>
           <p:cNvSpPr txBox="1"/>
           <p:nvPr/>
         </p:nvSpPr>
@@ -4531,7 +4565,7 @@
             <a:r>
               <a:rPr sz="1600" b="1">
                 <a:solidFill>
-                  <a:srgbClr val="0B1F2A"/>
+                  <a:srgbClr val="ECF7FF"/>
                 </a:solidFill>
                 <a:latin typeface="微软雅黑"/>
                 <a:ea typeface="微软雅黑"/>
@@ -4544,7 +4578,7 @@
       </p:sp>
       <p:sp>
         <p:nvSpPr>
-          <p:cNvPr id="18" name="TextBox 17"/>
+          <p:cNvPr id="19" name="TextBox 18"/>
           <p:cNvSpPr txBox="1"/>
           <p:nvPr/>
         </p:nvSpPr>
@@ -4575,7 +4609,7 @@
             <a:r>
               <a:rPr sz="1150" b="0">
                 <a:solidFill>
-                  <a:srgbClr val="3D4C55"/>
+                  <a:srgbClr val="BBD4EC"/>
                 </a:solidFill>
                 <a:latin typeface="微软雅黑"/>
                 <a:ea typeface="微软雅黑"/>
@@ -4596,7 +4630,7 @@
             <a:r>
               <a:rPr sz="1150" b="0">
                 <a:solidFill>
-                  <a:srgbClr val="3D4C55"/>
+                  <a:srgbClr val="BBD4EC"/>
                 </a:solidFill>
                 <a:latin typeface="微软雅黑"/>
                 <a:ea typeface="微软雅黑"/>
@@ -4617,7 +4651,7 @@
             <a:r>
               <a:rPr sz="1150" b="0">
                 <a:solidFill>
-                  <a:srgbClr val="3D4C55"/>
+                  <a:srgbClr val="BBD4EC"/>
                 </a:solidFill>
                 <a:latin typeface="微软雅黑"/>
                 <a:ea typeface="微软雅黑"/>
@@ -4638,7 +4672,7 @@
             <a:r>
               <a:rPr sz="1150" b="0">
                 <a:solidFill>
-                  <a:srgbClr val="3D4C55"/>
+                  <a:srgbClr val="BBD4EC"/>
                 </a:solidFill>
                 <a:latin typeface="微软雅黑"/>
                 <a:ea typeface="微软雅黑"/>
@@ -4676,18 +4710,16 @@
         <p:spPr>
           <a:xfrm>
             <a:off x="0" y="0"/>
-            <a:ext cx="146304" cy="6858000"/>
+            <a:ext cx="12191695" cy="6858000"/>
           </a:xfrm>
           <a:prstGeom prst="rect">
             <a:avLst/>
           </a:prstGeom>
           <a:solidFill>
-            <a:srgbClr val="027C8C"/>
+            <a:srgbClr val="04122B"/>
           </a:solidFill>
-          <a:ln w="9525">
-            <a:solidFill>
-              <a:srgbClr val="027C8C"/>
-            </a:solidFill>
+          <a:ln>
+            <a:noFill/>
           </a:ln>
           <a:effectLst/>
         </p:spPr>
@@ -4715,7 +4747,51 @@
       </p:sp>
       <p:sp>
         <p:nvSpPr>
-          <p:cNvPr id="3" name="TextBox 2"/>
+          <p:cNvPr id="3" name="Rectangle 2"/>
+          <p:cNvSpPr/>
+          <p:nvPr/>
+        </p:nvSpPr>
+        <p:spPr>
+          <a:xfrm>
+            <a:off x="0" y="0"/>
+            <a:ext cx="146304" cy="6858000"/>
+          </a:xfrm>
+          <a:prstGeom prst="rect">
+            <a:avLst/>
+          </a:prstGeom>
+          <a:solidFill>
+            <a:srgbClr val="7FE3FF"/>
+          </a:solidFill>
+          <a:ln>
+            <a:noFill/>
+          </a:ln>
+          <a:effectLst/>
+        </p:spPr>
+        <p:style>
+          <a:lnRef idx="1">
+            <a:schemeClr val="accent1"/>
+          </a:lnRef>
+          <a:fillRef idx="3">
+            <a:schemeClr val="accent1"/>
+          </a:fillRef>
+          <a:effectRef idx="2">
+            <a:schemeClr val="accent1"/>
+          </a:effectRef>
+          <a:fontRef idx="minor">
+            <a:schemeClr val="lt1"/>
+          </a:fontRef>
+        </p:style>
+        <p:txBody>
+          <a:bodyPr rtlCol="0" anchor="ctr"/>
+          <a:lstStyle/>
+          <a:p>
+            <a:pPr algn="ctr"/>
+          </a:p>
+        </p:txBody>
+      </p:sp>
+      <p:sp>
+        <p:nvSpPr>
+          <p:cNvPr id="4" name="TextBox 3"/>
           <p:cNvSpPr txBox="1"/>
           <p:nvPr/>
         </p:nvSpPr>
@@ -4739,7 +4815,7 @@
             <a:r>
               <a:rPr sz="1150" b="1">
                 <a:solidFill>
-                  <a:srgbClr val="027C8C"/>
+                  <a:srgbClr val="5CC8FF"/>
                 </a:solidFill>
                 <a:latin typeface="微软雅黑"/>
                 <a:ea typeface="微软雅黑"/>
@@ -4752,7 +4828,7 @@
       </p:sp>
       <p:sp>
         <p:nvSpPr>
-          <p:cNvPr id="4" name="TextBox 3"/>
+          <p:cNvPr id="5" name="TextBox 4"/>
           <p:cNvSpPr txBox="1"/>
           <p:nvPr/>
         </p:nvSpPr>
@@ -4776,7 +4852,7 @@
             <a:r>
               <a:rPr sz="2700" b="1">
                 <a:solidFill>
-                  <a:srgbClr val="0B1F2A"/>
+                  <a:srgbClr val="ECF7FF"/>
                 </a:solidFill>
                 <a:latin typeface="微软雅黑"/>
                 <a:ea typeface="微软雅黑"/>
@@ -4789,7 +4865,7 @@
       </p:sp>
       <p:sp>
         <p:nvSpPr>
-          <p:cNvPr id="5" name="TextBox 4"/>
+          <p:cNvPr id="6" name="TextBox 5"/>
           <p:cNvSpPr txBox="1"/>
           <p:nvPr/>
         </p:nvSpPr>
@@ -4817,7 +4893,7 @@
             <a:r>
               <a:rPr sz="1250" b="0">
                 <a:solidFill>
-                  <a:srgbClr val="3D4C55"/>
+                  <a:srgbClr val="BBD4EC"/>
                 </a:solidFill>
                 <a:latin typeface="微软雅黑"/>
                 <a:ea typeface="微软雅黑"/>
@@ -4830,7 +4906,7 @@
       </p:sp>
       <p:sp>
         <p:nvSpPr>
-          <p:cNvPr id="6" name="TextBox 5"/>
+          <p:cNvPr id="7" name="TextBox 6"/>
           <p:cNvSpPr txBox="1"/>
           <p:nvPr/>
         </p:nvSpPr>
@@ -4854,7 +4930,7 @@
             <a:r>
               <a:rPr sz="950" b="0">
                 <a:solidFill>
-                  <a:srgbClr val="6B7C85"/>
+                  <a:srgbClr val="7E9EC4"/>
                 </a:solidFill>
                 <a:latin typeface="微软雅黑"/>
                 <a:ea typeface="微软雅黑"/>
@@ -4867,7 +4943,7 @@
       </p:sp>
       <p:sp>
         <p:nvSpPr>
-          <p:cNvPr id="7" name="TextBox 6"/>
+          <p:cNvPr id="8" name="TextBox 7"/>
           <p:cNvSpPr txBox="1"/>
           <p:nvPr/>
         </p:nvSpPr>
@@ -4891,7 +4967,7 @@
             <a:r>
               <a:rPr sz="950" b="0">
                 <a:solidFill>
-                  <a:srgbClr val="6B7C85"/>
+                  <a:srgbClr val="7E9EC4"/>
                 </a:solidFill>
                 <a:latin typeface="微软雅黑"/>
                 <a:ea typeface="微软雅黑"/>
@@ -4904,7 +4980,7 @@
       </p:sp>
       <p:graphicFrame>
         <p:nvGraphicFramePr>
-          <p:cNvPr id="8" name="Table 7"/>
+          <p:cNvPr id="9" name="Table 8"/>
           <p:cNvGraphicFramePr>
             <a:graphicFrameLocks noGrp="1"/>
           </p:cNvGraphicFramePr>
@@ -4940,7 +5016,7 @@
                       <a:r>
                         <a:rPr sz="1100" b="1">
                           <a:solidFill>
-                            <a:srgbClr val="FFFFFF"/>
+                            <a:srgbClr val="7FE3FF"/>
                           </a:solidFill>
                           <a:latin typeface="微软雅黑"/>
                           <a:ea typeface="微软雅黑"/>
@@ -4952,7 +5028,7 @@
                   </a:txBody>
                   <a:tcPr marL="109728" marR="109728" marT="45720" marB="45720" anchor="ctr">
                     <a:solidFill>
-                      <a:srgbClr val="027C8C"/>
+                      <a:srgbClr val="0C2C54"/>
                     </a:solidFill>
                   </a:tcPr>
                 </a:tc>
@@ -4969,7 +5045,7 @@
                       <a:r>
                         <a:rPr sz="1100" b="1">
                           <a:solidFill>
-                            <a:srgbClr val="FFFFFF"/>
+                            <a:srgbClr val="7FE3FF"/>
                           </a:solidFill>
                           <a:latin typeface="微软雅黑"/>
                           <a:ea typeface="微软雅黑"/>
@@ -4981,7 +5057,7 @@
                   </a:txBody>
                   <a:tcPr marL="109728" marR="109728" marT="45720" marB="45720" anchor="ctr">
                     <a:solidFill>
-                      <a:srgbClr val="027C8C"/>
+                      <a:srgbClr val="0C2C54"/>
                     </a:solidFill>
                   </a:tcPr>
                 </a:tc>
@@ -4998,7 +5074,7 @@
                       <a:r>
                         <a:rPr sz="1100" b="1">
                           <a:solidFill>
-                            <a:srgbClr val="FFFFFF"/>
+                            <a:srgbClr val="7FE3FF"/>
                           </a:solidFill>
                           <a:latin typeface="微软雅黑"/>
                           <a:ea typeface="微软雅黑"/>
@@ -5010,7 +5086,7 @@
                   </a:txBody>
                   <a:tcPr marL="109728" marR="109728" marT="45720" marB="45720" anchor="ctr">
                     <a:solidFill>
-                      <a:srgbClr val="027C8C"/>
+                      <a:srgbClr val="0C2C54"/>
                     </a:solidFill>
                   </a:tcPr>
                 </a:tc>
@@ -5027,7 +5103,7 @@
                       <a:r>
                         <a:rPr sz="1100" b="1">
                           <a:solidFill>
-                            <a:srgbClr val="FFFFFF"/>
+                            <a:srgbClr val="7FE3FF"/>
                           </a:solidFill>
                           <a:latin typeface="微软雅黑"/>
                           <a:ea typeface="微软雅黑"/>
@@ -5039,7 +5115,7 @@
                   </a:txBody>
                   <a:tcPr marL="109728" marR="109728" marT="45720" marB="45720" anchor="ctr">
                     <a:solidFill>
-                      <a:srgbClr val="027C8C"/>
+                      <a:srgbClr val="0C2C54"/>
                     </a:solidFill>
                   </a:tcPr>
                 </a:tc>
@@ -5058,7 +5134,7 @@
                       <a:r>
                         <a:rPr sz="1050" b="0">
                           <a:solidFill>
-                            <a:srgbClr val="3D4C55"/>
+                            <a:srgbClr val="BBD4EC"/>
                           </a:solidFill>
                           <a:latin typeface="微软雅黑"/>
                           <a:ea typeface="微软雅黑"/>
@@ -5070,7 +5146,7 @@
                   </a:txBody>
                   <a:tcPr marL="109728" marR="109728" marT="45720" marB="45720" anchor="ctr">
                     <a:solidFill>
-                      <a:srgbClr val="FFFFFF"/>
+                      <a:srgbClr val="061834"/>
                     </a:solidFill>
                   </a:tcPr>
                 </a:tc>
@@ -5087,7 +5163,7 @@
                       <a:r>
                         <a:rPr sz="1050" b="0">
                           <a:solidFill>
-                            <a:srgbClr val="3D4C55"/>
+                            <a:srgbClr val="BBD4EC"/>
                           </a:solidFill>
                           <a:latin typeface="微软雅黑"/>
                           <a:ea typeface="微软雅黑"/>
@@ -5099,7 +5175,7 @@
                   </a:txBody>
                   <a:tcPr marL="109728" marR="109728" marT="45720" marB="45720" anchor="ctr">
                     <a:solidFill>
-                      <a:srgbClr val="FFFFFF"/>
+                      <a:srgbClr val="061834"/>
                     </a:solidFill>
                   </a:tcPr>
                 </a:tc>
@@ -5116,7 +5192,7 @@
                       <a:r>
                         <a:rPr sz="1050" b="0">
                           <a:solidFill>
-                            <a:srgbClr val="3D4C55"/>
+                            <a:srgbClr val="BBD4EC"/>
                           </a:solidFill>
                           <a:latin typeface="微软雅黑"/>
                           <a:ea typeface="微软雅黑"/>
@@ -5128,7 +5204,7 @@
                   </a:txBody>
                   <a:tcPr marL="109728" marR="109728" marT="45720" marB="45720" anchor="ctr">
                     <a:solidFill>
-                      <a:srgbClr val="FFFFFF"/>
+                      <a:srgbClr val="061834"/>
                     </a:solidFill>
                   </a:tcPr>
                 </a:tc>
@@ -5145,7 +5221,7 @@
                       <a:r>
                         <a:rPr sz="1050" b="0">
                           <a:solidFill>
-                            <a:srgbClr val="3D4C55"/>
+                            <a:srgbClr val="BBD4EC"/>
                           </a:solidFill>
                           <a:latin typeface="微软雅黑"/>
                           <a:ea typeface="微软雅黑"/>
@@ -5157,7 +5233,7 @@
                   </a:txBody>
                   <a:tcPr marL="109728" marR="109728" marT="45720" marB="45720" anchor="ctr">
                     <a:solidFill>
-                      <a:srgbClr val="FFFFFF"/>
+                      <a:srgbClr val="061834"/>
                     </a:solidFill>
                   </a:tcPr>
                 </a:tc>
@@ -5176,7 +5252,7 @@
                       <a:r>
                         <a:rPr sz="1050" b="0">
                           <a:solidFill>
-                            <a:srgbClr val="3D4C55"/>
+                            <a:srgbClr val="BBD4EC"/>
                           </a:solidFill>
                           <a:latin typeface="微软雅黑"/>
                           <a:ea typeface="微软雅黑"/>
@@ -5188,7 +5264,7 @@
                   </a:txBody>
                   <a:tcPr marL="109728" marR="109728" marT="45720" marB="45720" anchor="ctr">
                     <a:solidFill>
-                      <a:srgbClr val="F2F6F8"/>
+                      <a:srgbClr val="092244"/>
                     </a:solidFill>
                   </a:tcPr>
                 </a:tc>
@@ -5205,7 +5281,7 @@
                       <a:r>
                         <a:rPr sz="1050" b="0">
                           <a:solidFill>
-                            <a:srgbClr val="3D4C55"/>
+                            <a:srgbClr val="BBD4EC"/>
                           </a:solidFill>
                           <a:latin typeface="微软雅黑"/>
                           <a:ea typeface="微软雅黑"/>
@@ -5217,7 +5293,7 @@
                   </a:txBody>
                   <a:tcPr marL="109728" marR="109728" marT="45720" marB="45720" anchor="ctr">
                     <a:solidFill>
-                      <a:srgbClr val="F2F6F8"/>
+                      <a:srgbClr val="092244"/>
                     </a:solidFill>
                   </a:tcPr>
                 </a:tc>
@@ -5234,7 +5310,7 @@
                       <a:r>
                         <a:rPr sz="1050" b="0">
                           <a:solidFill>
-                            <a:srgbClr val="3D4C55"/>
+                            <a:srgbClr val="BBD4EC"/>
                           </a:solidFill>
                           <a:latin typeface="微软雅黑"/>
                           <a:ea typeface="微软雅黑"/>
@@ -5246,7 +5322,7 @@
                   </a:txBody>
                   <a:tcPr marL="109728" marR="109728" marT="45720" marB="45720" anchor="ctr">
                     <a:solidFill>
-                      <a:srgbClr val="F2F6F8"/>
+                      <a:srgbClr val="092244"/>
                     </a:solidFill>
                   </a:tcPr>
                 </a:tc>
@@ -5263,7 +5339,7 @@
                       <a:r>
                         <a:rPr sz="1050" b="0">
                           <a:solidFill>
-                            <a:srgbClr val="3D4C55"/>
+                            <a:srgbClr val="BBD4EC"/>
                           </a:solidFill>
                           <a:latin typeface="微软雅黑"/>
                           <a:ea typeface="微软雅黑"/>
@@ -5275,7 +5351,7 @@
                   </a:txBody>
                   <a:tcPr marL="109728" marR="109728" marT="45720" marB="45720" anchor="ctr">
                     <a:solidFill>
-                      <a:srgbClr val="F2F6F8"/>
+                      <a:srgbClr val="092244"/>
                     </a:solidFill>
                   </a:tcPr>
                 </a:tc>
@@ -5294,7 +5370,7 @@
                       <a:r>
                         <a:rPr sz="1050" b="0">
                           <a:solidFill>
-                            <a:srgbClr val="3D4C55"/>
+                            <a:srgbClr val="BBD4EC"/>
                           </a:solidFill>
                           <a:latin typeface="微软雅黑"/>
                           <a:ea typeface="微软雅黑"/>
@@ -5306,7 +5382,7 @@
                   </a:txBody>
                   <a:tcPr marL="109728" marR="109728" marT="45720" marB="45720" anchor="ctr">
                     <a:solidFill>
-                      <a:srgbClr val="FFFFFF"/>
+                      <a:srgbClr val="061834"/>
                     </a:solidFill>
                   </a:tcPr>
                 </a:tc>
@@ -5323,7 +5399,7 @@
                       <a:r>
                         <a:rPr sz="1050" b="0">
                           <a:solidFill>
-                            <a:srgbClr val="3D4C55"/>
+                            <a:srgbClr val="BBD4EC"/>
                           </a:solidFill>
                           <a:latin typeface="微软雅黑"/>
                           <a:ea typeface="微软雅黑"/>
@@ -5335,7 +5411,7 @@
                   </a:txBody>
                   <a:tcPr marL="109728" marR="109728" marT="45720" marB="45720" anchor="ctr">
                     <a:solidFill>
-                      <a:srgbClr val="FFFFFF"/>
+                      <a:srgbClr val="061834"/>
                     </a:solidFill>
                   </a:tcPr>
                 </a:tc>
@@ -5352,7 +5428,7 @@
                       <a:r>
                         <a:rPr sz="1050" b="0">
                           <a:solidFill>
-                            <a:srgbClr val="3D4C55"/>
+                            <a:srgbClr val="BBD4EC"/>
                           </a:solidFill>
                           <a:latin typeface="微软雅黑"/>
                           <a:ea typeface="微软雅黑"/>
@@ -5364,7 +5440,7 @@
                   </a:txBody>
                   <a:tcPr marL="109728" marR="109728" marT="45720" marB="45720" anchor="ctr">
                     <a:solidFill>
-                      <a:srgbClr val="FFFFFF"/>
+                      <a:srgbClr val="061834"/>
                     </a:solidFill>
                   </a:tcPr>
                 </a:tc>
@@ -5381,7 +5457,7 @@
                       <a:r>
                         <a:rPr sz="1050" b="0">
                           <a:solidFill>
-                            <a:srgbClr val="3D4C55"/>
+                            <a:srgbClr val="BBD4EC"/>
                           </a:solidFill>
                           <a:latin typeface="微软雅黑"/>
                           <a:ea typeface="微软雅黑"/>
@@ -5393,7 +5469,7 @@
                   </a:txBody>
                   <a:tcPr marL="109728" marR="109728" marT="45720" marB="45720" anchor="ctr">
                     <a:solidFill>
-                      <a:srgbClr val="FFFFFF"/>
+                      <a:srgbClr val="061834"/>
                     </a:solidFill>
                   </a:tcPr>
                 </a:tc>
@@ -5412,7 +5488,7 @@
                       <a:r>
                         <a:rPr sz="1050" b="0">
                           <a:solidFill>
-                            <a:srgbClr val="3D4C55"/>
+                            <a:srgbClr val="BBD4EC"/>
                           </a:solidFill>
                           <a:latin typeface="微软雅黑"/>
                           <a:ea typeface="微软雅黑"/>
@@ -5424,7 +5500,7 @@
                   </a:txBody>
                   <a:tcPr marL="109728" marR="109728" marT="45720" marB="45720" anchor="ctr">
                     <a:solidFill>
-                      <a:srgbClr val="F2F6F8"/>
+                      <a:srgbClr val="092244"/>
                     </a:solidFill>
                   </a:tcPr>
                 </a:tc>
@@ -5441,7 +5517,7 @@
                       <a:r>
                         <a:rPr sz="1050" b="0">
                           <a:solidFill>
-                            <a:srgbClr val="3D4C55"/>
+                            <a:srgbClr val="BBD4EC"/>
                           </a:solidFill>
                           <a:latin typeface="微软雅黑"/>
                           <a:ea typeface="微软雅黑"/>
@@ -5453,7 +5529,7 @@
                   </a:txBody>
                   <a:tcPr marL="109728" marR="109728" marT="45720" marB="45720" anchor="ctr">
                     <a:solidFill>
-                      <a:srgbClr val="F2F6F8"/>
+                      <a:srgbClr val="092244"/>
                     </a:solidFill>
                   </a:tcPr>
                 </a:tc>
@@ -5470,7 +5546,7 @@
                       <a:r>
                         <a:rPr sz="1050" b="0">
                           <a:solidFill>
-                            <a:srgbClr val="3D4C55"/>
+                            <a:srgbClr val="BBD4EC"/>
                           </a:solidFill>
                           <a:latin typeface="微软雅黑"/>
                           <a:ea typeface="微软雅黑"/>
@@ -5482,7 +5558,7 @@
                   </a:txBody>
                   <a:tcPr marL="109728" marR="109728" marT="45720" marB="45720" anchor="ctr">
                     <a:solidFill>
-                      <a:srgbClr val="F2F6F8"/>
+                      <a:srgbClr val="092244"/>
                     </a:solidFill>
                   </a:tcPr>
                 </a:tc>
@@ -5499,7 +5575,7 @@
                       <a:r>
                         <a:rPr sz="1050" b="0">
                           <a:solidFill>
-                            <a:srgbClr val="3D4C55"/>
+                            <a:srgbClr val="BBD4EC"/>
                           </a:solidFill>
                           <a:latin typeface="微软雅黑"/>
                           <a:ea typeface="微软雅黑"/>
@@ -5511,7 +5587,7 @@
                   </a:txBody>
                   <a:tcPr marL="109728" marR="109728" marT="45720" marB="45720" anchor="ctr">
                     <a:solidFill>
-                      <a:srgbClr val="F2F6F8"/>
+                      <a:srgbClr val="092244"/>
                     </a:solidFill>
                   </a:tcPr>
                 </a:tc>
@@ -5530,7 +5606,7 @@
                       <a:r>
                         <a:rPr sz="1050" b="0">
                           <a:solidFill>
-                            <a:srgbClr val="3D4C55"/>
+                            <a:srgbClr val="BBD4EC"/>
                           </a:solidFill>
                           <a:latin typeface="微软雅黑"/>
                           <a:ea typeface="微软雅黑"/>
@@ -5542,7 +5618,7 @@
                   </a:txBody>
                   <a:tcPr marL="109728" marR="109728" marT="45720" marB="45720" anchor="ctr">
                     <a:solidFill>
-                      <a:srgbClr val="FFFFFF"/>
+                      <a:srgbClr val="061834"/>
                     </a:solidFill>
                   </a:tcPr>
                 </a:tc>
@@ -5559,7 +5635,7 @@
                       <a:r>
                         <a:rPr sz="1050" b="0">
                           <a:solidFill>
-                            <a:srgbClr val="3D4C55"/>
+                            <a:srgbClr val="BBD4EC"/>
                           </a:solidFill>
                           <a:latin typeface="微软雅黑"/>
                           <a:ea typeface="微软雅黑"/>
@@ -5571,7 +5647,7 @@
                   </a:txBody>
                   <a:tcPr marL="109728" marR="109728" marT="45720" marB="45720" anchor="ctr">
                     <a:solidFill>
-                      <a:srgbClr val="FFFFFF"/>
+                      <a:srgbClr val="061834"/>
                     </a:solidFill>
                   </a:tcPr>
                 </a:tc>
@@ -5588,7 +5664,7 @@
                       <a:r>
                         <a:rPr sz="1050" b="0">
                           <a:solidFill>
-                            <a:srgbClr val="3D4C55"/>
+                            <a:srgbClr val="BBD4EC"/>
                           </a:solidFill>
                           <a:latin typeface="微软雅黑"/>
                           <a:ea typeface="微软雅黑"/>
@@ -5600,7 +5676,7 @@
                   </a:txBody>
                   <a:tcPr marL="109728" marR="109728" marT="45720" marB="45720" anchor="ctr">
                     <a:solidFill>
-                      <a:srgbClr val="FFFFFF"/>
+                      <a:srgbClr val="061834"/>
                     </a:solidFill>
                   </a:tcPr>
                 </a:tc>
@@ -5617,7 +5693,7 @@
                       <a:r>
                         <a:rPr sz="1050" b="0">
                           <a:solidFill>
-                            <a:srgbClr val="3D4C55"/>
+                            <a:srgbClr val="BBD4EC"/>
                           </a:solidFill>
                           <a:latin typeface="微软雅黑"/>
                           <a:ea typeface="微软雅黑"/>
@@ -5629,7 +5705,7 @@
                   </a:txBody>
                   <a:tcPr marL="109728" marR="109728" marT="45720" marB="45720" anchor="ctr">
                     <a:solidFill>
-                      <a:srgbClr val="FFFFFF"/>
+                      <a:srgbClr val="061834"/>
                     </a:solidFill>
                   </a:tcPr>
                 </a:tc>
@@ -5648,7 +5724,7 @@
                       <a:r>
                         <a:rPr sz="1050" b="0">
                           <a:solidFill>
-                            <a:srgbClr val="3D4C55"/>
+                            <a:srgbClr val="BBD4EC"/>
                           </a:solidFill>
                           <a:latin typeface="微软雅黑"/>
                           <a:ea typeface="微软雅黑"/>
@@ -5660,7 +5736,7 @@
                   </a:txBody>
                   <a:tcPr marL="109728" marR="109728" marT="45720" marB="45720" anchor="ctr">
                     <a:solidFill>
-                      <a:srgbClr val="F2F6F8"/>
+                      <a:srgbClr val="092244"/>
                     </a:solidFill>
                   </a:tcPr>
                 </a:tc>
@@ -5677,7 +5753,7 @@
                       <a:r>
                         <a:rPr sz="1050" b="0">
                           <a:solidFill>
-                            <a:srgbClr val="3D4C55"/>
+                            <a:srgbClr val="BBD4EC"/>
                           </a:solidFill>
                           <a:latin typeface="微软雅黑"/>
                           <a:ea typeface="微软雅黑"/>
@@ -5689,7 +5765,7 @@
                   </a:txBody>
                   <a:tcPr marL="109728" marR="109728" marT="45720" marB="45720" anchor="ctr">
                     <a:solidFill>
-                      <a:srgbClr val="F2F6F8"/>
+                      <a:srgbClr val="092244"/>
                     </a:solidFill>
                   </a:tcPr>
                 </a:tc>
@@ -5706,7 +5782,7 @@
                       <a:r>
                         <a:rPr sz="1050" b="0">
                           <a:solidFill>
-                            <a:srgbClr val="3D4C55"/>
+                            <a:srgbClr val="BBD4EC"/>
                           </a:solidFill>
                           <a:latin typeface="微软雅黑"/>
                           <a:ea typeface="微软雅黑"/>
@@ -5718,7 +5794,7 @@
                   </a:txBody>
                   <a:tcPr marL="109728" marR="109728" marT="45720" marB="45720" anchor="ctr">
                     <a:solidFill>
-                      <a:srgbClr val="F2F6F8"/>
+                      <a:srgbClr val="092244"/>
                     </a:solidFill>
                   </a:tcPr>
                 </a:tc>
@@ -5735,7 +5811,7 @@
                       <a:r>
                         <a:rPr sz="1050" b="0">
                           <a:solidFill>
-                            <a:srgbClr val="3D4C55"/>
+                            <a:srgbClr val="BBD4EC"/>
                           </a:solidFill>
                           <a:latin typeface="微软雅黑"/>
                           <a:ea typeface="微软雅黑"/>
@@ -5747,7 +5823,7 @@
                   </a:txBody>
                   <a:tcPr marL="109728" marR="109728" marT="45720" marB="45720" anchor="ctr">
                     <a:solidFill>
-                      <a:srgbClr val="F2F6F8"/>
+                      <a:srgbClr val="092244"/>
                     </a:solidFill>
                   </a:tcPr>
                 </a:tc>
@@ -5783,18 +5859,16 @@
         <p:spPr>
           <a:xfrm>
             <a:off x="0" y="0"/>
-            <a:ext cx="146304" cy="6858000"/>
+            <a:ext cx="12191695" cy="6858000"/>
           </a:xfrm>
           <a:prstGeom prst="rect">
             <a:avLst/>
           </a:prstGeom>
           <a:solidFill>
-            <a:srgbClr val="027C8C"/>
+            <a:srgbClr val="04122B"/>
           </a:solidFill>
-          <a:ln w="9525">
-            <a:solidFill>
-              <a:srgbClr val="027C8C"/>
-            </a:solidFill>
+          <a:ln>
+            <a:noFill/>
           </a:ln>
           <a:effectLst/>
         </p:spPr>
@@ -5822,7 +5896,51 @@
       </p:sp>
       <p:sp>
         <p:nvSpPr>
-          <p:cNvPr id="3" name="TextBox 2"/>
+          <p:cNvPr id="3" name="Rectangle 2"/>
+          <p:cNvSpPr/>
+          <p:nvPr/>
+        </p:nvSpPr>
+        <p:spPr>
+          <a:xfrm>
+            <a:off x="0" y="0"/>
+            <a:ext cx="146304" cy="6858000"/>
+          </a:xfrm>
+          <a:prstGeom prst="rect">
+            <a:avLst/>
+          </a:prstGeom>
+          <a:solidFill>
+            <a:srgbClr val="7FE3FF"/>
+          </a:solidFill>
+          <a:ln>
+            <a:noFill/>
+          </a:ln>
+          <a:effectLst/>
+        </p:spPr>
+        <p:style>
+          <a:lnRef idx="1">
+            <a:schemeClr val="accent1"/>
+          </a:lnRef>
+          <a:fillRef idx="3">
+            <a:schemeClr val="accent1"/>
+          </a:fillRef>
+          <a:effectRef idx="2">
+            <a:schemeClr val="accent1"/>
+          </a:effectRef>
+          <a:fontRef idx="minor">
+            <a:schemeClr val="lt1"/>
+          </a:fontRef>
+        </p:style>
+        <p:txBody>
+          <a:bodyPr rtlCol="0" anchor="ctr"/>
+          <a:lstStyle/>
+          <a:p>
+            <a:pPr algn="ctr"/>
+          </a:p>
+        </p:txBody>
+      </p:sp>
+      <p:sp>
+        <p:nvSpPr>
+          <p:cNvPr id="4" name="TextBox 3"/>
           <p:cNvSpPr txBox="1"/>
           <p:nvPr/>
         </p:nvSpPr>
@@ -5846,7 +5964,7 @@
             <a:r>
               <a:rPr sz="1150" b="1">
                 <a:solidFill>
-                  <a:srgbClr val="027C8C"/>
+                  <a:srgbClr val="5CC8FF"/>
                 </a:solidFill>
                 <a:latin typeface="微软雅黑"/>
                 <a:ea typeface="微软雅黑"/>
@@ -5859,7 +5977,7 @@
       </p:sp>
       <p:sp>
         <p:nvSpPr>
-          <p:cNvPr id="4" name="TextBox 3"/>
+          <p:cNvPr id="5" name="TextBox 4"/>
           <p:cNvSpPr txBox="1"/>
           <p:nvPr/>
         </p:nvSpPr>
@@ -5883,7 +6001,7 @@
             <a:r>
               <a:rPr sz="2700" b="1">
                 <a:solidFill>
-                  <a:srgbClr val="0B1F2A"/>
+                  <a:srgbClr val="ECF7FF"/>
                 </a:solidFill>
                 <a:latin typeface="微软雅黑"/>
                 <a:ea typeface="微软雅黑"/>
@@ -5896,7 +6014,7 @@
       </p:sp>
       <p:sp>
         <p:nvSpPr>
-          <p:cNvPr id="5" name="TextBox 4"/>
+          <p:cNvPr id="6" name="TextBox 5"/>
           <p:cNvSpPr txBox="1"/>
           <p:nvPr/>
         </p:nvSpPr>
@@ -5924,7 +6042,7 @@
             <a:r>
               <a:rPr sz="1250" b="0">
                 <a:solidFill>
-                  <a:srgbClr val="3D4C55"/>
+                  <a:srgbClr val="BBD4EC"/>
                 </a:solidFill>
                 <a:latin typeface="微软雅黑"/>
                 <a:ea typeface="微软雅黑"/>
@@ -5937,7 +6055,7 @@
       </p:sp>
       <p:sp>
         <p:nvSpPr>
-          <p:cNvPr id="6" name="TextBox 5"/>
+          <p:cNvPr id="7" name="TextBox 6"/>
           <p:cNvSpPr txBox="1"/>
           <p:nvPr/>
         </p:nvSpPr>
@@ -5961,7 +6079,7 @@
             <a:r>
               <a:rPr sz="950" b="0">
                 <a:solidFill>
-                  <a:srgbClr val="6B7C85"/>
+                  <a:srgbClr val="7E9EC4"/>
                 </a:solidFill>
                 <a:latin typeface="微软雅黑"/>
                 <a:ea typeface="微软雅黑"/>
@@ -5974,7 +6092,7 @@
       </p:sp>
       <p:sp>
         <p:nvSpPr>
-          <p:cNvPr id="7" name="TextBox 6"/>
+          <p:cNvPr id="8" name="TextBox 7"/>
           <p:cNvSpPr txBox="1"/>
           <p:nvPr/>
         </p:nvSpPr>
@@ -5998,7 +6116,7 @@
             <a:r>
               <a:rPr sz="950" b="0">
                 <a:solidFill>
-                  <a:srgbClr val="6B7C85"/>
+                  <a:srgbClr val="7E9EC4"/>
                 </a:solidFill>
                 <a:latin typeface="微软雅黑"/>
                 <a:ea typeface="微软雅黑"/>
@@ -6011,7 +6129,7 @@
       </p:sp>
       <p:graphicFrame>
         <p:nvGraphicFramePr>
-          <p:cNvPr id="8" name="Table 7"/>
+          <p:cNvPr id="9" name="Table 8"/>
           <p:cNvGraphicFramePr>
             <a:graphicFrameLocks noGrp="1"/>
           </p:cNvGraphicFramePr>
@@ -6046,7 +6164,7 @@
                       <a:r>
                         <a:rPr sz="1100" b="1">
                           <a:solidFill>
-                            <a:srgbClr val="FFFFFF"/>
+                            <a:srgbClr val="7FE3FF"/>
                           </a:solidFill>
                           <a:latin typeface="微软雅黑"/>
                           <a:ea typeface="微软雅黑"/>
@@ -6058,7 +6176,7 @@
                   </a:txBody>
                   <a:tcPr marL="109728" marR="109728" marT="45720" marB="45720" anchor="ctr">
                     <a:solidFill>
-                      <a:srgbClr val="027C8C"/>
+                      <a:srgbClr val="0C2C54"/>
                     </a:solidFill>
                   </a:tcPr>
                 </a:tc>
@@ -6075,7 +6193,7 @@
                       <a:r>
                         <a:rPr sz="1100" b="1">
                           <a:solidFill>
-                            <a:srgbClr val="FFFFFF"/>
+                            <a:srgbClr val="7FE3FF"/>
                           </a:solidFill>
                           <a:latin typeface="微软雅黑"/>
                           <a:ea typeface="微软雅黑"/>
@@ -6087,7 +6205,7 @@
                   </a:txBody>
                   <a:tcPr marL="109728" marR="109728" marT="45720" marB="45720" anchor="ctr">
                     <a:solidFill>
-                      <a:srgbClr val="027C8C"/>
+                      <a:srgbClr val="0C2C54"/>
                     </a:solidFill>
                   </a:tcPr>
                 </a:tc>
@@ -6104,7 +6222,7 @@
                       <a:r>
                         <a:rPr sz="1100" b="1">
                           <a:solidFill>
-                            <a:srgbClr val="FFFFFF"/>
+                            <a:srgbClr val="7FE3FF"/>
                           </a:solidFill>
                           <a:latin typeface="微软雅黑"/>
                           <a:ea typeface="微软雅黑"/>
@@ -6116,7 +6234,7 @@
                   </a:txBody>
                   <a:tcPr marL="109728" marR="109728" marT="45720" marB="45720" anchor="ctr">
                     <a:solidFill>
-                      <a:srgbClr val="027C8C"/>
+                      <a:srgbClr val="0C2C54"/>
                     </a:solidFill>
                   </a:tcPr>
                 </a:tc>
@@ -6135,7 +6253,7 @@
                       <a:r>
                         <a:rPr sz="1100" b="0">
                           <a:solidFill>
-                            <a:srgbClr val="3D4C55"/>
+                            <a:srgbClr val="BBD4EC"/>
                           </a:solidFill>
                           <a:latin typeface="微软雅黑"/>
                           <a:ea typeface="微软雅黑"/>
@@ -6147,7 +6265,7 @@
                   </a:txBody>
                   <a:tcPr marL="109728" marR="109728" marT="45720" marB="45720" anchor="ctr">
                     <a:solidFill>
-                      <a:srgbClr val="FFFFFF"/>
+                      <a:srgbClr val="061834"/>
                     </a:solidFill>
                   </a:tcPr>
                 </a:tc>
@@ -6164,7 +6282,7 @@
                       <a:r>
                         <a:rPr sz="1100" b="0">
                           <a:solidFill>
-                            <a:srgbClr val="3D4C55"/>
+                            <a:srgbClr val="BBD4EC"/>
                           </a:solidFill>
                           <a:latin typeface="微软雅黑"/>
                           <a:ea typeface="微软雅黑"/>
@@ -6176,7 +6294,7 @@
                   </a:txBody>
                   <a:tcPr marL="109728" marR="109728" marT="45720" marB="45720" anchor="ctr">
                     <a:solidFill>
-                      <a:srgbClr val="FFFFFF"/>
+                      <a:srgbClr val="061834"/>
                     </a:solidFill>
                   </a:tcPr>
                 </a:tc>
@@ -6193,7 +6311,7 @@
                       <a:r>
                         <a:rPr sz="1100" b="0">
                           <a:solidFill>
-                            <a:srgbClr val="3D4C55"/>
+                            <a:srgbClr val="BBD4EC"/>
                           </a:solidFill>
                           <a:latin typeface="微软雅黑"/>
                           <a:ea typeface="微软雅黑"/>
@@ -6205,7 +6323,7 @@
                   </a:txBody>
                   <a:tcPr marL="109728" marR="109728" marT="45720" marB="45720" anchor="ctr">
                     <a:solidFill>
-                      <a:srgbClr val="FFFFFF"/>
+                      <a:srgbClr val="061834"/>
                     </a:solidFill>
                   </a:tcPr>
                 </a:tc>
@@ -6224,7 +6342,7 @@
                       <a:r>
                         <a:rPr sz="1100" b="0">
                           <a:solidFill>
-                            <a:srgbClr val="3D4C55"/>
+                            <a:srgbClr val="BBD4EC"/>
                           </a:solidFill>
                           <a:latin typeface="微软雅黑"/>
                           <a:ea typeface="微软雅黑"/>
@@ -6236,7 +6354,7 @@
                   </a:txBody>
                   <a:tcPr marL="109728" marR="109728" marT="45720" marB="45720" anchor="ctr">
                     <a:solidFill>
-                      <a:srgbClr val="F2F6F8"/>
+                      <a:srgbClr val="092244"/>
                     </a:solidFill>
                   </a:tcPr>
                 </a:tc>
@@ -6253,7 +6371,7 @@
                       <a:r>
                         <a:rPr sz="1100" b="0">
                           <a:solidFill>
-                            <a:srgbClr val="3D4C55"/>
+                            <a:srgbClr val="BBD4EC"/>
                           </a:solidFill>
                           <a:latin typeface="微软雅黑"/>
                           <a:ea typeface="微软雅黑"/>
@@ -6265,7 +6383,7 @@
                   </a:txBody>
                   <a:tcPr marL="109728" marR="109728" marT="45720" marB="45720" anchor="ctr">
                     <a:solidFill>
-                      <a:srgbClr val="F2F6F8"/>
+                      <a:srgbClr val="092244"/>
                     </a:solidFill>
                   </a:tcPr>
                 </a:tc>
@@ -6282,7 +6400,7 @@
                       <a:r>
                         <a:rPr sz="1100" b="0">
                           <a:solidFill>
-                            <a:srgbClr val="3D4C55"/>
+                            <a:srgbClr val="BBD4EC"/>
                           </a:solidFill>
                           <a:latin typeface="微软雅黑"/>
                           <a:ea typeface="微软雅黑"/>
@@ -6294,7 +6412,7 @@
                   </a:txBody>
                   <a:tcPr marL="109728" marR="109728" marT="45720" marB="45720" anchor="ctr">
                     <a:solidFill>
-                      <a:srgbClr val="F2F6F8"/>
+                      <a:srgbClr val="092244"/>
                     </a:solidFill>
                   </a:tcPr>
                 </a:tc>
@@ -6313,7 +6431,7 @@
                       <a:r>
                         <a:rPr sz="1100" b="0">
                           <a:solidFill>
-                            <a:srgbClr val="3D4C55"/>
+                            <a:srgbClr val="BBD4EC"/>
                           </a:solidFill>
                           <a:latin typeface="微软雅黑"/>
                           <a:ea typeface="微软雅黑"/>
@@ -6325,7 +6443,7 @@
                   </a:txBody>
                   <a:tcPr marL="109728" marR="109728" marT="45720" marB="45720" anchor="ctr">
                     <a:solidFill>
-                      <a:srgbClr val="FFFFFF"/>
+                      <a:srgbClr val="061834"/>
                     </a:solidFill>
                   </a:tcPr>
                 </a:tc>
@@ -6342,7 +6460,7 @@
                       <a:r>
                         <a:rPr sz="1100" b="0">
                           <a:solidFill>
-                            <a:srgbClr val="3D4C55"/>
+                            <a:srgbClr val="BBD4EC"/>
                           </a:solidFill>
                           <a:latin typeface="微软雅黑"/>
                           <a:ea typeface="微软雅黑"/>
@@ -6354,7 +6472,7 @@
                   </a:txBody>
                   <a:tcPr marL="109728" marR="109728" marT="45720" marB="45720" anchor="ctr">
                     <a:solidFill>
-                      <a:srgbClr val="FFFFFF"/>
+                      <a:srgbClr val="061834"/>
                     </a:solidFill>
                   </a:tcPr>
                 </a:tc>
@@ -6371,7 +6489,7 @@
                       <a:r>
                         <a:rPr sz="1100" b="0">
                           <a:solidFill>
-                            <a:srgbClr val="3D4C55"/>
+                            <a:srgbClr val="BBD4EC"/>
                           </a:solidFill>
                           <a:latin typeface="微软雅黑"/>
                           <a:ea typeface="微软雅黑"/>
@@ -6383,7 +6501,7 @@
                   </a:txBody>
                   <a:tcPr marL="109728" marR="109728" marT="45720" marB="45720" anchor="ctr">
                     <a:solidFill>
-                      <a:srgbClr val="FFFFFF"/>
+                      <a:srgbClr val="061834"/>
                     </a:solidFill>
                   </a:tcPr>
                 </a:tc>
@@ -6402,7 +6520,7 @@
                       <a:r>
                         <a:rPr sz="1100" b="0">
                           <a:solidFill>
-                            <a:srgbClr val="3D4C55"/>
+                            <a:srgbClr val="BBD4EC"/>
                           </a:solidFill>
                           <a:latin typeface="微软雅黑"/>
                           <a:ea typeface="微软雅黑"/>
@@ -6414,7 +6532,7 @@
                   </a:txBody>
                   <a:tcPr marL="109728" marR="109728" marT="45720" marB="45720" anchor="ctr">
                     <a:solidFill>
-                      <a:srgbClr val="F2F6F8"/>
+                      <a:srgbClr val="092244"/>
                     </a:solidFill>
                   </a:tcPr>
                 </a:tc>
@@ -6431,7 +6549,7 @@
                       <a:r>
                         <a:rPr sz="1100" b="0">
                           <a:solidFill>
-                            <a:srgbClr val="3D4C55"/>
+                            <a:srgbClr val="BBD4EC"/>
                           </a:solidFill>
                           <a:latin typeface="微软雅黑"/>
                           <a:ea typeface="微软雅黑"/>
@@ -6443,7 +6561,7 @@
                   </a:txBody>
                   <a:tcPr marL="109728" marR="109728" marT="45720" marB="45720" anchor="ctr">
                     <a:solidFill>
-                      <a:srgbClr val="F2F6F8"/>
+                      <a:srgbClr val="092244"/>
                     </a:solidFill>
                   </a:tcPr>
                 </a:tc>
@@ -6460,7 +6578,7 @@
                       <a:r>
                         <a:rPr sz="1100" b="0">
                           <a:solidFill>
-                            <a:srgbClr val="3D4C55"/>
+                            <a:srgbClr val="BBD4EC"/>
                           </a:solidFill>
                           <a:latin typeface="微软雅黑"/>
                           <a:ea typeface="微软雅黑"/>
@@ -6472,7 +6590,7 @@
                   </a:txBody>
                   <a:tcPr marL="109728" marR="109728" marT="45720" marB="45720" anchor="ctr">
                     <a:solidFill>
-                      <a:srgbClr val="F2F6F8"/>
+                      <a:srgbClr val="092244"/>
                     </a:solidFill>
                   </a:tcPr>
                 </a:tc>
@@ -6491,7 +6609,7 @@
                       <a:r>
                         <a:rPr sz="1100" b="0">
                           <a:solidFill>
-                            <a:srgbClr val="3D4C55"/>
+                            <a:srgbClr val="BBD4EC"/>
                           </a:solidFill>
                           <a:latin typeface="微软雅黑"/>
                           <a:ea typeface="微软雅黑"/>
@@ -6503,7 +6621,7 @@
                   </a:txBody>
                   <a:tcPr marL="109728" marR="109728" marT="45720" marB="45720" anchor="ctr">
                     <a:solidFill>
-                      <a:srgbClr val="FFFFFF"/>
+                      <a:srgbClr val="061834"/>
                     </a:solidFill>
                   </a:tcPr>
                 </a:tc>
@@ -6520,7 +6638,7 @@
                       <a:r>
                         <a:rPr sz="1100" b="0">
                           <a:solidFill>
-                            <a:srgbClr val="3D4C55"/>
+                            <a:srgbClr val="BBD4EC"/>
                           </a:solidFill>
                           <a:latin typeface="微软雅黑"/>
                           <a:ea typeface="微软雅黑"/>
@@ -6532,7 +6650,7 @@
                   </a:txBody>
                   <a:tcPr marL="109728" marR="109728" marT="45720" marB="45720" anchor="ctr">
                     <a:solidFill>
-                      <a:srgbClr val="FFFFFF"/>
+                      <a:srgbClr val="061834"/>
                     </a:solidFill>
                   </a:tcPr>
                 </a:tc>
@@ -6549,7 +6667,7 @@
                       <a:r>
                         <a:rPr sz="1100" b="0">
                           <a:solidFill>
-                            <a:srgbClr val="3D4C55"/>
+                            <a:srgbClr val="BBD4EC"/>
                           </a:solidFill>
                           <a:latin typeface="微软雅黑"/>
                           <a:ea typeface="微软雅黑"/>
@@ -6561,7 +6679,7 @@
                   </a:txBody>
                   <a:tcPr marL="109728" marR="109728" marT="45720" marB="45720" anchor="ctr">
                     <a:solidFill>
-                      <a:srgbClr val="FFFFFF"/>
+                      <a:srgbClr val="061834"/>
                     </a:solidFill>
                   </a:tcPr>
                 </a:tc>
@@ -6572,14 +6690,14 @@
       </p:graphicFrame>
       <p:sp>
         <p:nvSpPr>
-          <p:cNvPr id="9" name="TextBox 8"/>
+          <p:cNvPr id="10" name="TextBox 9"/>
           <p:cNvSpPr txBox="1"/>
           <p:nvPr/>
         </p:nvSpPr>
         <p:spPr>
           <a:xfrm>
             <a:off x="566928" y="5614416"/>
-            <a:ext cx="11057839" cy="365760"/>
+            <a:ext cx="11057839" cy="310896"/>
           </a:xfrm>
           <a:prstGeom prst="rect">
             <a:avLst/>
@@ -6596,35 +6714,13 @@
             <a:r>
               <a:rPr sz="1200" b="0">
                 <a:solidFill>
-                  <a:srgbClr val="3D4C55"/>
-                </a:solidFill>
-                <a:latin typeface="微软雅黑"/>
-                <a:ea typeface="微软雅黑"/>
-                <a:cs typeface="微软雅黑"/>
-              </a:rPr>
-              <a:t>全部只依赖系统自带的 Node 与 Chrome，</a:t>
-            </a:r>
-            <a:r>
-              <a:rPr sz="1200" b="1">
-                <a:solidFill>
-                  <a:srgbClr val="0B1F2A"/>
-                </a:solidFill>
-                <a:latin typeface="微软雅黑"/>
-                <a:ea typeface="微软雅黑"/>
-                <a:cs typeface="微软雅黑"/>
-              </a:rPr>
-              <a:t>不需要安装任何测试框架</a:t>
-            </a:r>
-            <a:r>
-              <a:rPr sz="1200" b="0">
-                <a:solidFill>
-                  <a:srgbClr val="3D4C55"/>
-                </a:solidFill>
-                <a:latin typeface="微软雅黑"/>
-                <a:ea typeface="微软雅黑"/>
-                <a:cs typeface="微软雅黑"/>
-              </a:rPr>
-              <a:t>，因此在任何一台电脑上都能跑起来。</a:t>
+                  <a:srgbClr val="BBD4EC"/>
+                </a:solidFill>
+                <a:latin typeface="微软雅黑"/>
+                <a:ea typeface="微软雅黑"/>
+                <a:cs typeface="微软雅黑"/>
+              </a:rPr>
+              <a:t>全部只依赖系统自带的 Node 与 Chrome，不需要安装任何测试框架，因此在任何一台电脑上都能跑起来。</a:t>
             </a:r>
           </a:p>
         </p:txBody>
@@ -6656,18 +6752,16 @@
         <p:spPr>
           <a:xfrm>
             <a:off x="0" y="0"/>
-            <a:ext cx="146304" cy="6858000"/>
+            <a:ext cx="12191695" cy="6858000"/>
           </a:xfrm>
           <a:prstGeom prst="rect">
             <a:avLst/>
           </a:prstGeom>
           <a:solidFill>
-            <a:srgbClr val="027C8C"/>
+            <a:srgbClr val="04122B"/>
           </a:solidFill>
-          <a:ln w="9525">
-            <a:solidFill>
-              <a:srgbClr val="027C8C"/>
-            </a:solidFill>
+          <a:ln>
+            <a:noFill/>
           </a:ln>
           <a:effectLst/>
         </p:spPr>
@@ -6695,7 +6789,51 @@
       </p:sp>
       <p:sp>
         <p:nvSpPr>
-          <p:cNvPr id="3" name="TextBox 2"/>
+          <p:cNvPr id="3" name="Rectangle 2"/>
+          <p:cNvSpPr/>
+          <p:nvPr/>
+        </p:nvSpPr>
+        <p:spPr>
+          <a:xfrm>
+            <a:off x="0" y="0"/>
+            <a:ext cx="146304" cy="6858000"/>
+          </a:xfrm>
+          <a:prstGeom prst="rect">
+            <a:avLst/>
+          </a:prstGeom>
+          <a:solidFill>
+            <a:srgbClr val="7FE3FF"/>
+          </a:solidFill>
+          <a:ln>
+            <a:noFill/>
+          </a:ln>
+          <a:effectLst/>
+        </p:spPr>
+        <p:style>
+          <a:lnRef idx="1">
+            <a:schemeClr val="accent1"/>
+          </a:lnRef>
+          <a:fillRef idx="3">
+            <a:schemeClr val="accent1"/>
+          </a:fillRef>
+          <a:effectRef idx="2">
+            <a:schemeClr val="accent1"/>
+          </a:effectRef>
+          <a:fontRef idx="minor">
+            <a:schemeClr val="lt1"/>
+          </a:fontRef>
+        </p:style>
+        <p:txBody>
+          <a:bodyPr rtlCol="0" anchor="ctr"/>
+          <a:lstStyle/>
+          <a:p>
+            <a:pPr algn="ctr"/>
+          </a:p>
+        </p:txBody>
+      </p:sp>
+      <p:sp>
+        <p:nvSpPr>
+          <p:cNvPr id="4" name="TextBox 3"/>
           <p:cNvSpPr txBox="1"/>
           <p:nvPr/>
         </p:nvSpPr>
@@ -6719,7 +6857,7 @@
             <a:r>
               <a:rPr sz="1150" b="1">
                 <a:solidFill>
-                  <a:srgbClr val="027C8C"/>
+                  <a:srgbClr val="5CC8FF"/>
                 </a:solidFill>
                 <a:latin typeface="微软雅黑"/>
                 <a:ea typeface="微软雅黑"/>
@@ -6732,7 +6870,7 @@
       </p:sp>
       <p:sp>
         <p:nvSpPr>
-          <p:cNvPr id="4" name="TextBox 3"/>
+          <p:cNvPr id="5" name="TextBox 4"/>
           <p:cNvSpPr txBox="1"/>
           <p:nvPr/>
         </p:nvSpPr>
@@ -6756,7 +6894,7 @@
             <a:r>
               <a:rPr sz="2700" b="1">
                 <a:solidFill>
-                  <a:srgbClr val="0B1F2A"/>
+                  <a:srgbClr val="ECF7FF"/>
                 </a:solidFill>
                 <a:latin typeface="微软雅黑"/>
                 <a:ea typeface="微软雅黑"/>
@@ -6769,7 +6907,7 @@
       </p:sp>
       <p:sp>
         <p:nvSpPr>
-          <p:cNvPr id="5" name="TextBox 4"/>
+          <p:cNvPr id="6" name="TextBox 5"/>
           <p:cNvSpPr txBox="1"/>
           <p:nvPr/>
         </p:nvSpPr>
@@ -6797,7 +6935,7 @@
             <a:r>
               <a:rPr sz="1250" b="0">
                 <a:solidFill>
-                  <a:srgbClr val="3D4C55"/>
+                  <a:srgbClr val="BBD4EC"/>
                 </a:solidFill>
                 <a:latin typeface="微软雅黑"/>
                 <a:ea typeface="微软雅黑"/>
@@ -6810,7 +6948,7 @@
       </p:sp>
       <p:sp>
         <p:nvSpPr>
-          <p:cNvPr id="6" name="TextBox 5"/>
+          <p:cNvPr id="7" name="TextBox 6"/>
           <p:cNvSpPr txBox="1"/>
           <p:nvPr/>
         </p:nvSpPr>
@@ -6834,7 +6972,7 @@
             <a:r>
               <a:rPr sz="950" b="0">
                 <a:solidFill>
-                  <a:srgbClr val="6B7C85"/>
+                  <a:srgbClr val="7E9EC4"/>
                 </a:solidFill>
                 <a:latin typeface="微软雅黑"/>
                 <a:ea typeface="微软雅黑"/>
@@ -6847,7 +6985,7 @@
       </p:sp>
       <p:sp>
         <p:nvSpPr>
-          <p:cNvPr id="7" name="TextBox 6"/>
+          <p:cNvPr id="8" name="TextBox 7"/>
           <p:cNvSpPr txBox="1"/>
           <p:nvPr/>
         </p:nvSpPr>
@@ -6871,7 +7009,7 @@
             <a:r>
               <a:rPr sz="950" b="0">
                 <a:solidFill>
-                  <a:srgbClr val="6B7C85"/>
+                  <a:srgbClr val="7E9EC4"/>
                 </a:solidFill>
                 <a:latin typeface="微软雅黑"/>
                 <a:ea typeface="微软雅黑"/>
@@ -6884,7 +7022,7 @@
       </p:sp>
       <p:sp>
         <p:nvSpPr>
-          <p:cNvPr id="8" name="Rounded Rectangle 7"/>
+          <p:cNvPr id="9" name="Rounded Rectangle 8"/>
           <p:cNvSpPr/>
           <p:nvPr/>
         </p:nvSpPr>
@@ -6899,11 +7037,11 @@
             </a:avLst>
           </a:prstGeom>
           <a:solidFill>
-            <a:srgbClr val="F2F6F8"/>
+            <a:srgbClr val="061A38"/>
           </a:solidFill>
           <a:ln w="9525">
             <a:solidFill>
-              <a:srgbClr val="F2F6F8"/>
+              <a:srgbClr val="1A4272"/>
             </a:solidFill>
           </a:ln>
           <a:effectLst/>
@@ -6932,7 +7070,7 @@
       </p:sp>
       <p:sp>
         <p:nvSpPr>
-          <p:cNvPr id="9" name="Rounded Rectangle 8"/>
+          <p:cNvPr id="10" name="Rounded Rectangle 9"/>
           <p:cNvSpPr/>
           <p:nvPr/>
         </p:nvSpPr>
@@ -6947,12 +7085,10 @@
             </a:avLst>
           </a:prstGeom>
           <a:solidFill>
-            <a:srgbClr val="027C8C"/>
+            <a:srgbClr val="5CC8FF"/>
           </a:solidFill>
-          <a:ln w="9525">
-            <a:solidFill>
-              <a:srgbClr val="027C8C"/>
-            </a:solidFill>
+          <a:ln>
+            <a:noFill/>
           </a:ln>
           <a:effectLst/>
         </p:spPr>
@@ -6980,7 +7116,7 @@
       </p:sp>
       <p:sp>
         <p:nvSpPr>
-          <p:cNvPr id="10" name="Oval 9"/>
+          <p:cNvPr id="11" name="Oval 10"/>
           <p:cNvSpPr/>
           <p:nvPr/>
         </p:nvSpPr>
@@ -6993,7 +7129,7 @@
             <a:avLst/>
           </a:prstGeom>
           <a:solidFill>
-            <a:srgbClr val="E8F1F3"/>
+            <a:srgbClr val="0C2C54"/>
           </a:solidFill>
           <a:ln>
             <a:noFill/>
@@ -7022,7 +7158,7 @@
             <a:r>
               <a:rPr sz="1200" b="1">
                 <a:solidFill>
-                  <a:srgbClr val="0B1F2A"/>
+                  <a:srgbClr val="5CC8FF"/>
                 </a:solidFill>
                 <a:latin typeface="微软雅黑"/>
                 <a:ea typeface="微软雅黑"/>
@@ -7035,7 +7171,7 @@
       </p:sp>
       <p:sp>
         <p:nvSpPr>
-          <p:cNvPr id="11" name="TextBox 10"/>
+          <p:cNvPr id="12" name="TextBox 11"/>
           <p:cNvSpPr txBox="1"/>
           <p:nvPr/>
         </p:nvSpPr>
@@ -7059,7 +7195,7 @@
             <a:r>
               <a:rPr sz="1700" b="1">
                 <a:solidFill>
-                  <a:srgbClr val="0B1F2A"/>
+                  <a:srgbClr val="ECF7FF"/>
                 </a:solidFill>
                 <a:latin typeface="微软雅黑"/>
                 <a:ea typeface="微软雅黑"/>
@@ -7072,7 +7208,7 @@
       </p:sp>
       <p:sp>
         <p:nvSpPr>
-          <p:cNvPr id="12" name="TextBox 11"/>
+          <p:cNvPr id="13" name="TextBox 12"/>
           <p:cNvSpPr txBox="1"/>
           <p:nvPr/>
         </p:nvSpPr>
@@ -7103,7 +7239,7 @@
             <a:r>
               <a:rPr sz="1100" b="0">
                 <a:solidFill>
-                  <a:srgbClr val="3D4C55"/>
+                  <a:srgbClr val="BBD4EC"/>
                 </a:solidFill>
                 <a:latin typeface="微软雅黑"/>
                 <a:ea typeface="微软雅黑"/>
@@ -7124,7 +7260,7 @@
             <a:r>
               <a:rPr sz="1100" b="0">
                 <a:solidFill>
-                  <a:srgbClr val="3D4C55"/>
+                  <a:srgbClr val="BBD4EC"/>
                 </a:solidFill>
                 <a:latin typeface="微软雅黑"/>
                 <a:ea typeface="微软雅黑"/>
@@ -7145,7 +7281,7 @@
             <a:r>
               <a:rPr sz="1100" b="0">
                 <a:solidFill>
-                  <a:srgbClr val="3D4C55"/>
+                  <a:srgbClr val="BBD4EC"/>
                 </a:solidFill>
                 <a:latin typeface="微软雅黑"/>
                 <a:ea typeface="微软雅黑"/>
@@ -7158,7 +7294,7 @@
       </p:sp>
       <p:sp>
         <p:nvSpPr>
-          <p:cNvPr id="13" name="Rounded Rectangle 12"/>
+          <p:cNvPr id="14" name="Rounded Rectangle 13"/>
           <p:cNvSpPr/>
           <p:nvPr/>
         </p:nvSpPr>
@@ -7173,11 +7309,11 @@
             </a:avLst>
           </a:prstGeom>
           <a:solidFill>
-            <a:srgbClr val="F2F6F8"/>
+            <a:srgbClr val="061A38"/>
           </a:solidFill>
           <a:ln w="9525">
             <a:solidFill>
-              <a:srgbClr val="F2F6F8"/>
+              <a:srgbClr val="1A4272"/>
             </a:solidFill>
           </a:ln>
           <a:effectLst/>
@@ -7206,7 +7342,7 @@
       </p:sp>
       <p:sp>
         <p:nvSpPr>
-          <p:cNvPr id="14" name="Rounded Rectangle 13"/>
+          <p:cNvPr id="15" name="Rounded Rectangle 14"/>
           <p:cNvSpPr/>
           <p:nvPr/>
         </p:nvSpPr>
@@ -7221,12 +7357,10 @@
             </a:avLst>
           </a:prstGeom>
           <a:solidFill>
-            <a:srgbClr val="02B08A"/>
+            <a:srgbClr val="7FE3FF"/>
           </a:solidFill>
-          <a:ln w="9525">
-            <a:solidFill>
-              <a:srgbClr val="02B08A"/>
-            </a:solidFill>
+          <a:ln>
+            <a:noFill/>
           </a:ln>
           <a:effectLst/>
         </p:spPr>
@@ -7254,7 +7388,7 @@
       </p:sp>
       <p:sp>
         <p:nvSpPr>
-          <p:cNvPr id="15" name="Oval 14"/>
+          <p:cNvPr id="16" name="Oval 15"/>
           <p:cNvSpPr/>
           <p:nvPr/>
         </p:nvSpPr>
@@ -7267,7 +7401,7 @@
             <a:avLst/>
           </a:prstGeom>
           <a:solidFill>
-            <a:srgbClr val="E8F1F3"/>
+            <a:srgbClr val="0C2C54"/>
           </a:solidFill>
           <a:ln>
             <a:noFill/>
@@ -7296,7 +7430,7 @@
             <a:r>
               <a:rPr sz="1200" b="1">
                 <a:solidFill>
-                  <a:srgbClr val="0B1F2A"/>
+                  <a:srgbClr val="5CC8FF"/>
                 </a:solidFill>
                 <a:latin typeface="微软雅黑"/>
                 <a:ea typeface="微软雅黑"/>
@@ -7309,7 +7443,7 @@
       </p:sp>
       <p:sp>
         <p:nvSpPr>
-          <p:cNvPr id="16" name="TextBox 15"/>
+          <p:cNvPr id="17" name="TextBox 16"/>
           <p:cNvSpPr txBox="1"/>
           <p:nvPr/>
         </p:nvSpPr>
@@ -7333,7 +7467,7 @@
             <a:r>
               <a:rPr sz="1700" b="1">
                 <a:solidFill>
-                  <a:srgbClr val="0B1F2A"/>
+                  <a:srgbClr val="ECF7FF"/>
                 </a:solidFill>
                 <a:latin typeface="微软雅黑"/>
                 <a:ea typeface="微软雅黑"/>
@@ -7346,7 +7480,7 @@
       </p:sp>
       <p:sp>
         <p:nvSpPr>
-          <p:cNvPr id="17" name="TextBox 16"/>
+          <p:cNvPr id="18" name="TextBox 17"/>
           <p:cNvSpPr txBox="1"/>
           <p:nvPr/>
         </p:nvSpPr>
@@ -7377,7 +7511,7 @@
             <a:r>
               <a:rPr sz="1100" b="0">
                 <a:solidFill>
-                  <a:srgbClr val="3D4C55"/>
+                  <a:srgbClr val="BBD4EC"/>
                 </a:solidFill>
                 <a:latin typeface="微软雅黑"/>
                 <a:ea typeface="微软雅黑"/>
@@ -7398,7 +7532,7 @@
             <a:r>
               <a:rPr sz="1100" b="0">
                 <a:solidFill>
-                  <a:srgbClr val="3D4C55"/>
+                  <a:srgbClr val="BBD4EC"/>
                 </a:solidFill>
                 <a:latin typeface="微软雅黑"/>
                 <a:ea typeface="微软雅黑"/>
@@ -7419,7 +7553,7 @@
             <a:r>
               <a:rPr sz="1100" b="0">
                 <a:solidFill>
-                  <a:srgbClr val="3D4C55"/>
+                  <a:srgbClr val="BBD4EC"/>
                 </a:solidFill>
                 <a:latin typeface="微软雅黑"/>
                 <a:ea typeface="微软雅黑"/>
@@ -7432,7 +7566,7 @@
       </p:sp>
       <p:sp>
         <p:nvSpPr>
-          <p:cNvPr id="18" name="Rounded Rectangle 17"/>
+          <p:cNvPr id="19" name="Rounded Rectangle 18"/>
           <p:cNvSpPr/>
           <p:nvPr/>
         </p:nvSpPr>
@@ -7447,11 +7581,11 @@
             </a:avLst>
           </a:prstGeom>
           <a:solidFill>
-            <a:srgbClr val="F2F6F8"/>
+            <a:srgbClr val="061A38"/>
           </a:solidFill>
           <a:ln w="9525">
             <a:solidFill>
-              <a:srgbClr val="F2F6F8"/>
+              <a:srgbClr val="1A4272"/>
             </a:solidFill>
           </a:ln>
           <a:effectLst/>
@@ -7480,7 +7614,7 @@
       </p:sp>
       <p:sp>
         <p:nvSpPr>
-          <p:cNvPr id="19" name="Rounded Rectangle 18"/>
+          <p:cNvPr id="20" name="Rounded Rectangle 19"/>
           <p:cNvSpPr/>
           <p:nvPr/>
         </p:nvSpPr>
@@ -7495,12 +7629,10 @@
             </a:avLst>
           </a:prstGeom>
           <a:solidFill>
-            <a:srgbClr val="D98B2B"/>
+            <a:srgbClr val="7FFFE0"/>
           </a:solidFill>
-          <a:ln w="9525">
-            <a:solidFill>
-              <a:srgbClr val="D98B2B"/>
-            </a:solidFill>
+          <a:ln>
+            <a:noFill/>
           </a:ln>
           <a:effectLst/>
         </p:spPr>
@@ -7528,7 +7660,7 @@
       </p:sp>
       <p:sp>
         <p:nvSpPr>
-          <p:cNvPr id="20" name="Oval 19"/>
+          <p:cNvPr id="21" name="Oval 20"/>
           <p:cNvSpPr/>
           <p:nvPr/>
         </p:nvSpPr>
@@ -7541,7 +7673,7 @@
             <a:avLst/>
           </a:prstGeom>
           <a:solidFill>
-            <a:srgbClr val="E8F1F3"/>
+            <a:srgbClr val="0C2C54"/>
           </a:solidFill>
           <a:ln>
             <a:noFill/>
@@ -7570,7 +7702,7 @@
             <a:r>
               <a:rPr sz="1200" b="1">
                 <a:solidFill>
-                  <a:srgbClr val="0B1F2A"/>
+                  <a:srgbClr val="5CC8FF"/>
                 </a:solidFill>
                 <a:latin typeface="微软雅黑"/>
                 <a:ea typeface="微软雅黑"/>
@@ -7583,7 +7715,7 @@
       </p:sp>
       <p:sp>
         <p:nvSpPr>
-          <p:cNvPr id="21" name="TextBox 20"/>
+          <p:cNvPr id="22" name="TextBox 21"/>
           <p:cNvSpPr txBox="1"/>
           <p:nvPr/>
         </p:nvSpPr>
@@ -7607,7 +7739,7 @@
             <a:r>
               <a:rPr sz="1700" b="1">
                 <a:solidFill>
-                  <a:srgbClr val="0B1F2A"/>
+                  <a:srgbClr val="ECF7FF"/>
                 </a:solidFill>
                 <a:latin typeface="微软雅黑"/>
                 <a:ea typeface="微软雅黑"/>
@@ -7620,7 +7752,7 @@
       </p:sp>
       <p:sp>
         <p:nvSpPr>
-          <p:cNvPr id="22" name="TextBox 21"/>
+          <p:cNvPr id="23" name="TextBox 22"/>
           <p:cNvSpPr txBox="1"/>
           <p:nvPr/>
         </p:nvSpPr>
@@ -7651,7 +7783,7 @@
             <a:r>
               <a:rPr sz="1100" b="0">
                 <a:solidFill>
-                  <a:srgbClr val="3D4C55"/>
+                  <a:srgbClr val="BBD4EC"/>
                 </a:solidFill>
                 <a:latin typeface="微软雅黑"/>
                 <a:ea typeface="微软雅黑"/>
@@ -7672,7 +7804,7 @@
             <a:r>
               <a:rPr sz="1100" b="0">
                 <a:solidFill>
-                  <a:srgbClr val="3D4C55"/>
+                  <a:srgbClr val="BBD4EC"/>
                 </a:solidFill>
                 <a:latin typeface="微软雅黑"/>
                 <a:ea typeface="微软雅黑"/>
@@ -7693,7 +7825,7 @@
             <a:r>
               <a:rPr sz="1100" b="0">
                 <a:solidFill>
-                  <a:srgbClr val="3D4C55"/>
+                  <a:srgbClr val="BBD4EC"/>
                 </a:solidFill>
                 <a:latin typeface="微软雅黑"/>
                 <a:ea typeface="微软雅黑"/>
@@ -7706,7 +7838,7 @@
       </p:sp>
       <p:sp>
         <p:nvSpPr>
-          <p:cNvPr id="23" name="Rounded Rectangle 22"/>
+          <p:cNvPr id="24" name="Rounded Rectangle 23"/>
           <p:cNvSpPr/>
           <p:nvPr/>
         </p:nvSpPr>
@@ -7717,15 +7849,15 @@
           </a:xfrm>
           <a:prstGeom prst="roundRect">
             <a:avLst>
-              <a:gd name="adj" fmla="val 12000"/>
+              <a:gd name="adj" fmla="val 10000"/>
             </a:avLst>
           </a:prstGeom>
           <a:solidFill>
-            <a:srgbClr val="E8F1F3"/>
+            <a:srgbClr val="061A38"/>
           </a:solidFill>
           <a:ln w="9525">
             <a:solidFill>
-              <a:srgbClr val="E8F1F3"/>
+              <a:srgbClr val="1A4272"/>
             </a:solidFill>
           </a:ln>
           <a:effectLst/>
@@ -7754,13 +7886,13 @@
       </p:sp>
       <p:sp>
         <p:nvSpPr>
-          <p:cNvPr id="24" name="TextBox 23"/>
+          <p:cNvPr id="25" name="TextBox 24"/>
           <p:cNvSpPr txBox="1"/>
           <p:nvPr/>
         </p:nvSpPr>
         <p:spPr>
           <a:xfrm>
-            <a:off x="859536" y="5212080"/>
+            <a:off x="859536" y="5230368"/>
             <a:ext cx="10472623" cy="402336"/>
           </a:xfrm>
           <a:prstGeom prst="rect">
@@ -7774,11 +7906,15 @@
           </a:bodyPr>
           <a:lstStyle/>
           <a:p>
-            <a:pPr algn="l"/>
+            <a:pPr algn="l">
+              <a:lnSpc>
+                <a:spcPct val="130000"/>
+              </a:lnSpc>
+            </a:pPr>
             <a:r>
               <a:rPr sz="1250" b="1">
                 <a:solidFill>
-                  <a:srgbClr val="027C8C"/>
+                  <a:srgbClr val="5CC8FF"/>
                 </a:solidFill>
                 <a:latin typeface="微软雅黑"/>
                 <a:ea typeface="微软雅黑"/>
@@ -7789,7 +7925,7 @@
             <a:r>
               <a:rPr sz="1250" b="0">
                 <a:solidFill>
-                  <a:srgbClr val="3D4C55"/>
+                  <a:srgbClr val="BBD4EC"/>
                 </a:solidFill>
                 <a:latin typeface="微软雅黑"/>
                 <a:ea typeface="微软雅黑"/>
@@ -7800,7 +7936,7 @@
             <a:r>
               <a:rPr sz="1250" b="1">
                 <a:solidFill>
-                  <a:srgbClr val="0B1F2A"/>
+                  <a:srgbClr val="7FFFE0"/>
                 </a:solidFill>
                 <a:latin typeface="微软雅黑"/>
                 <a:ea typeface="微软雅黑"/>
@@ -7811,7 +7947,7 @@
             <a:r>
               <a:rPr sz="1250" b="0">
                 <a:solidFill>
-                  <a:srgbClr val="3D4C55"/>
+                  <a:srgbClr val="BBD4EC"/>
                 </a:solidFill>
                 <a:latin typeface="微软雅黑"/>
                 <a:ea typeface="微软雅黑"/>
@@ -7849,18 +7985,16 @@
         <p:spPr>
           <a:xfrm>
             <a:off x="0" y="0"/>
-            <a:ext cx="146304" cy="6858000"/>
+            <a:ext cx="12191695" cy="6858000"/>
           </a:xfrm>
           <a:prstGeom prst="rect">
             <a:avLst/>
           </a:prstGeom>
           <a:solidFill>
-            <a:srgbClr val="027C8C"/>
+            <a:srgbClr val="04122B"/>
           </a:solidFill>
-          <a:ln w="9525">
-            <a:solidFill>
-              <a:srgbClr val="027C8C"/>
-            </a:solidFill>
+          <a:ln>
+            <a:noFill/>
           </a:ln>
           <a:effectLst/>
         </p:spPr>
@@ -7888,7 +8022,51 @@
       </p:sp>
       <p:sp>
         <p:nvSpPr>
-          <p:cNvPr id="3" name="TextBox 2"/>
+          <p:cNvPr id="3" name="Rectangle 2"/>
+          <p:cNvSpPr/>
+          <p:nvPr/>
+        </p:nvSpPr>
+        <p:spPr>
+          <a:xfrm>
+            <a:off x="0" y="0"/>
+            <a:ext cx="146304" cy="6858000"/>
+          </a:xfrm>
+          <a:prstGeom prst="rect">
+            <a:avLst/>
+          </a:prstGeom>
+          <a:solidFill>
+            <a:srgbClr val="7FE3FF"/>
+          </a:solidFill>
+          <a:ln>
+            <a:noFill/>
+          </a:ln>
+          <a:effectLst/>
+        </p:spPr>
+        <p:style>
+          <a:lnRef idx="1">
+            <a:schemeClr val="accent1"/>
+          </a:lnRef>
+          <a:fillRef idx="3">
+            <a:schemeClr val="accent1"/>
+          </a:fillRef>
+          <a:effectRef idx="2">
+            <a:schemeClr val="accent1"/>
+          </a:effectRef>
+          <a:fontRef idx="minor">
+            <a:schemeClr val="lt1"/>
+          </a:fontRef>
+        </p:style>
+        <p:txBody>
+          <a:bodyPr rtlCol="0" anchor="ctr"/>
+          <a:lstStyle/>
+          <a:p>
+            <a:pPr algn="ctr"/>
+          </a:p>
+        </p:txBody>
+      </p:sp>
+      <p:sp>
+        <p:nvSpPr>
+          <p:cNvPr id="4" name="TextBox 3"/>
           <p:cNvSpPr txBox="1"/>
           <p:nvPr/>
         </p:nvSpPr>
@@ -7912,7 +8090,7 @@
             <a:r>
               <a:rPr sz="1150" b="1">
                 <a:solidFill>
-                  <a:srgbClr val="027C8C"/>
+                  <a:srgbClr val="5CC8FF"/>
                 </a:solidFill>
                 <a:latin typeface="微软雅黑"/>
                 <a:ea typeface="微软雅黑"/>
@@ -7925,7 +8103,7 @@
       </p:sp>
       <p:sp>
         <p:nvSpPr>
-          <p:cNvPr id="4" name="TextBox 3"/>
+          <p:cNvPr id="5" name="TextBox 4"/>
           <p:cNvSpPr txBox="1"/>
           <p:nvPr/>
         </p:nvSpPr>
@@ -7949,7 +8127,7 @@
             <a:r>
               <a:rPr sz="2700" b="1">
                 <a:solidFill>
-                  <a:srgbClr val="0B1F2A"/>
+                  <a:srgbClr val="ECF7FF"/>
                 </a:solidFill>
                 <a:latin typeface="微软雅黑"/>
                 <a:ea typeface="微软雅黑"/>
@@ -7962,7 +8140,7 @@
       </p:sp>
       <p:sp>
         <p:nvSpPr>
-          <p:cNvPr id="5" name="TextBox 4"/>
+          <p:cNvPr id="6" name="TextBox 5"/>
           <p:cNvSpPr txBox="1"/>
           <p:nvPr/>
         </p:nvSpPr>
@@ -7990,7 +8168,7 @@
             <a:r>
               <a:rPr sz="1250" b="0">
                 <a:solidFill>
-                  <a:srgbClr val="3D4C55"/>
+                  <a:srgbClr val="BBD4EC"/>
                 </a:solidFill>
                 <a:latin typeface="微软雅黑"/>
                 <a:ea typeface="微软雅黑"/>
@@ -8003,7 +8181,7 @@
       </p:sp>
       <p:sp>
         <p:nvSpPr>
-          <p:cNvPr id="6" name="TextBox 5"/>
+          <p:cNvPr id="7" name="TextBox 6"/>
           <p:cNvSpPr txBox="1"/>
           <p:nvPr/>
         </p:nvSpPr>
@@ -8027,7 +8205,7 @@
             <a:r>
               <a:rPr sz="950" b="0">
                 <a:solidFill>
-                  <a:srgbClr val="6B7C85"/>
+                  <a:srgbClr val="7E9EC4"/>
                 </a:solidFill>
                 <a:latin typeface="微软雅黑"/>
                 <a:ea typeface="微软雅黑"/>
@@ -8040,7 +8218,7 @@
       </p:sp>
       <p:sp>
         <p:nvSpPr>
-          <p:cNvPr id="7" name="TextBox 6"/>
+          <p:cNvPr id="8" name="TextBox 7"/>
           <p:cNvSpPr txBox="1"/>
           <p:nvPr/>
         </p:nvSpPr>
@@ -8064,7 +8242,7 @@
             <a:r>
               <a:rPr sz="950" b="0">
                 <a:solidFill>
-                  <a:srgbClr val="6B7C85"/>
+                  <a:srgbClr val="7E9EC4"/>
                 </a:solidFill>
                 <a:latin typeface="微软雅黑"/>
                 <a:ea typeface="微软雅黑"/>
@@ -8077,7 +8255,7 @@
       </p:sp>
       <p:graphicFrame>
         <p:nvGraphicFramePr>
-          <p:cNvPr id="8" name="Table 7"/>
+          <p:cNvPr id="9" name="Table 8"/>
           <p:cNvGraphicFramePr>
             <a:graphicFrameLocks noGrp="1"/>
           </p:cNvGraphicFramePr>
@@ -8111,7 +8289,7 @@
                       <a:r>
                         <a:rPr sz="1100" b="1">
                           <a:solidFill>
-                            <a:srgbClr val="FFFFFF"/>
+                            <a:srgbClr val="7FE3FF"/>
                           </a:solidFill>
                           <a:latin typeface="微软雅黑"/>
                           <a:ea typeface="微软雅黑"/>
@@ -8123,7 +8301,7 @@
                   </a:txBody>
                   <a:tcPr marL="109728" marR="109728" marT="45720" marB="45720" anchor="ctr">
                     <a:solidFill>
-                      <a:srgbClr val="027C8C"/>
+                      <a:srgbClr val="0C2C54"/>
                     </a:solidFill>
                   </a:tcPr>
                 </a:tc>
@@ -8140,7 +8318,7 @@
                       <a:r>
                         <a:rPr sz="1100" b="1">
                           <a:solidFill>
-                            <a:srgbClr val="FFFFFF"/>
+                            <a:srgbClr val="7FE3FF"/>
                           </a:solidFill>
                           <a:latin typeface="微软雅黑"/>
                           <a:ea typeface="微软雅黑"/>
@@ -8152,7 +8330,7 @@
                   </a:txBody>
                   <a:tcPr marL="109728" marR="109728" marT="45720" marB="45720" anchor="ctr">
                     <a:solidFill>
-                      <a:srgbClr val="027C8C"/>
+                      <a:srgbClr val="0C2C54"/>
                     </a:solidFill>
                   </a:tcPr>
                 </a:tc>
@@ -8171,7 +8349,7 @@
                       <a:r>
                         <a:rPr sz="1100" b="0">
                           <a:solidFill>
-                            <a:srgbClr val="3D4C55"/>
+                            <a:srgbClr val="BBD4EC"/>
                           </a:solidFill>
                           <a:latin typeface="微软雅黑"/>
                           <a:ea typeface="微软雅黑"/>
@@ -8183,7 +8361,7 @@
                   </a:txBody>
                   <a:tcPr marL="109728" marR="109728" marT="45720" marB="45720" anchor="ctr">
                     <a:solidFill>
-                      <a:srgbClr val="FFFFFF"/>
+                      <a:srgbClr val="061834"/>
                     </a:solidFill>
                   </a:tcPr>
                 </a:tc>
@@ -8200,7 +8378,7 @@
                       <a:r>
                         <a:rPr sz="1100" b="0">
                           <a:solidFill>
-                            <a:srgbClr val="3D4C55"/>
+                            <a:srgbClr val="BBD4EC"/>
                           </a:solidFill>
                           <a:latin typeface="微软雅黑"/>
                           <a:ea typeface="微软雅黑"/>
@@ -8212,7 +8390,7 @@
                   </a:txBody>
                   <a:tcPr marL="109728" marR="109728" marT="45720" marB="45720" anchor="ctr">
                     <a:solidFill>
-                      <a:srgbClr val="FFFFFF"/>
+                      <a:srgbClr val="061834"/>
                     </a:solidFill>
                   </a:tcPr>
                 </a:tc>
@@ -8231,7 +8409,7 @@
                       <a:r>
                         <a:rPr sz="1100" b="0">
                           <a:solidFill>
-                            <a:srgbClr val="3D4C55"/>
+                            <a:srgbClr val="BBD4EC"/>
                           </a:solidFill>
                           <a:latin typeface="微软雅黑"/>
                           <a:ea typeface="微软雅黑"/>
@@ -8243,7 +8421,7 @@
                   </a:txBody>
                   <a:tcPr marL="109728" marR="109728" marT="45720" marB="45720" anchor="ctr">
                     <a:solidFill>
-                      <a:srgbClr val="F2F6F8"/>
+                      <a:srgbClr val="092244"/>
                     </a:solidFill>
                   </a:tcPr>
                 </a:tc>
@@ -8260,7 +8438,7 @@
                       <a:r>
                         <a:rPr sz="1100" b="0">
                           <a:solidFill>
-                            <a:srgbClr val="3D4C55"/>
+                            <a:srgbClr val="BBD4EC"/>
                           </a:solidFill>
                           <a:latin typeface="微软雅黑"/>
                           <a:ea typeface="微软雅黑"/>
@@ -8272,7 +8450,7 @@
                   </a:txBody>
                   <a:tcPr marL="109728" marR="109728" marT="45720" marB="45720" anchor="ctr">
                     <a:solidFill>
-                      <a:srgbClr val="F2F6F8"/>
+                      <a:srgbClr val="092244"/>
                     </a:solidFill>
                   </a:tcPr>
                 </a:tc>
@@ -8291,7 +8469,7 @@
                       <a:r>
                         <a:rPr sz="1100" b="0">
                           <a:solidFill>
-                            <a:srgbClr val="3D4C55"/>
+                            <a:srgbClr val="BBD4EC"/>
                           </a:solidFill>
                           <a:latin typeface="微软雅黑"/>
                           <a:ea typeface="微软雅黑"/>
@@ -8303,7 +8481,7 @@
                   </a:txBody>
                   <a:tcPr marL="109728" marR="109728" marT="45720" marB="45720" anchor="ctr">
                     <a:solidFill>
-                      <a:srgbClr val="FFFFFF"/>
+                      <a:srgbClr val="061834"/>
                     </a:solidFill>
                   </a:tcPr>
                 </a:tc>
@@ -8320,7 +8498,7 @@
                       <a:r>
                         <a:rPr sz="1100" b="0">
                           <a:solidFill>
-                            <a:srgbClr val="3D4C55"/>
+                            <a:srgbClr val="BBD4EC"/>
                           </a:solidFill>
                           <a:latin typeface="微软雅黑"/>
                           <a:ea typeface="微软雅黑"/>
@@ -8332,7 +8510,7 @@
                   </a:txBody>
                   <a:tcPr marL="109728" marR="109728" marT="45720" marB="45720" anchor="ctr">
                     <a:solidFill>
-                      <a:srgbClr val="FFFFFF"/>
+                      <a:srgbClr val="061834"/>
                     </a:solidFill>
                   </a:tcPr>
                 </a:tc>
@@ -8351,7 +8529,7 @@
                       <a:r>
                         <a:rPr sz="1100" b="0">
                           <a:solidFill>
-                            <a:srgbClr val="3D4C55"/>
+                            <a:srgbClr val="BBD4EC"/>
                           </a:solidFill>
                           <a:latin typeface="微软雅黑"/>
                           <a:ea typeface="微软雅黑"/>
@@ -8363,7 +8541,7 @@
                   </a:txBody>
                   <a:tcPr marL="109728" marR="109728" marT="45720" marB="45720" anchor="ctr">
                     <a:solidFill>
-                      <a:srgbClr val="F2F6F8"/>
+                      <a:srgbClr val="092244"/>
                     </a:solidFill>
                   </a:tcPr>
                 </a:tc>
@@ -8380,7 +8558,7 @@
                       <a:r>
                         <a:rPr sz="1100" b="0">
                           <a:solidFill>
-                            <a:srgbClr val="3D4C55"/>
+                            <a:srgbClr val="BBD4EC"/>
                           </a:solidFill>
                           <a:latin typeface="微软雅黑"/>
                           <a:ea typeface="微软雅黑"/>
@@ -8392,7 +8570,7 @@
                   </a:txBody>
                   <a:tcPr marL="109728" marR="109728" marT="45720" marB="45720" anchor="ctr">
                     <a:solidFill>
-                      <a:srgbClr val="F2F6F8"/>
+                      <a:srgbClr val="092244"/>
                     </a:solidFill>
                   </a:tcPr>
                 </a:tc>
@@ -8411,7 +8589,7 @@
                       <a:r>
                         <a:rPr sz="1100" b="0">
                           <a:solidFill>
-                            <a:srgbClr val="3D4C55"/>
+                            <a:srgbClr val="BBD4EC"/>
                           </a:solidFill>
                           <a:latin typeface="微软雅黑"/>
                           <a:ea typeface="微软雅黑"/>
@@ -8423,7 +8601,7 @@
                   </a:txBody>
                   <a:tcPr marL="109728" marR="109728" marT="45720" marB="45720" anchor="ctr">
                     <a:solidFill>
-                      <a:srgbClr val="FFFFFF"/>
+                      <a:srgbClr val="061834"/>
                     </a:solidFill>
                   </a:tcPr>
                 </a:tc>
@@ -8440,7 +8618,7 @@
                       <a:r>
                         <a:rPr sz="1100" b="0">
                           <a:solidFill>
-                            <a:srgbClr val="3D4C55"/>
+                            <a:srgbClr val="BBD4EC"/>
                           </a:solidFill>
                           <a:latin typeface="微软雅黑"/>
                           <a:ea typeface="微软雅黑"/>
@@ -8452,7 +8630,7 @@
                   </a:txBody>
                   <a:tcPr marL="109728" marR="109728" marT="45720" marB="45720" anchor="ctr">
                     <a:solidFill>
-                      <a:srgbClr val="FFFFFF"/>
+                      <a:srgbClr val="061834"/>
                     </a:solidFill>
                   </a:tcPr>
                 </a:tc>
@@ -8471,7 +8649,7 @@
                       <a:r>
                         <a:rPr sz="1100" b="0">
                           <a:solidFill>
-                            <a:srgbClr val="3D4C55"/>
+                            <a:srgbClr val="BBD4EC"/>
                           </a:solidFill>
                           <a:latin typeface="微软雅黑"/>
                           <a:ea typeface="微软雅黑"/>
@@ -8483,7 +8661,7 @@
                   </a:txBody>
                   <a:tcPr marL="109728" marR="109728" marT="45720" marB="45720" anchor="ctr">
                     <a:solidFill>
-                      <a:srgbClr val="F2F6F8"/>
+                      <a:srgbClr val="092244"/>
                     </a:solidFill>
                   </a:tcPr>
                 </a:tc>
@@ -8500,7 +8678,7 @@
                       <a:r>
                         <a:rPr sz="1100" b="0">
                           <a:solidFill>
-                            <a:srgbClr val="3D4C55"/>
+                            <a:srgbClr val="BBD4EC"/>
                           </a:solidFill>
                           <a:latin typeface="微软雅黑"/>
                           <a:ea typeface="微软雅黑"/>
@@ -8512,7 +8690,7 @@
                   </a:txBody>
                   <a:tcPr marL="109728" marR="109728" marT="45720" marB="45720" anchor="ctr">
                     <a:solidFill>
-                      <a:srgbClr val="F2F6F8"/>
+                      <a:srgbClr val="092244"/>
                     </a:solidFill>
                   </a:tcPr>
                 </a:tc>
@@ -8554,12 +8732,10 @@
             <a:avLst/>
           </a:prstGeom>
           <a:solidFill>
-            <a:srgbClr val="0B1F2A"/>
+            <a:srgbClr val="02091A"/>
           </a:solidFill>
-          <a:ln w="9525">
-            <a:solidFill>
-              <a:srgbClr val="0B1F2A"/>
-            </a:solidFill>
+          <a:ln>
+            <a:noFill/>
           </a:ln>
           <a:effectLst/>
         </p:spPr>
@@ -8600,12 +8776,10 @@
             <a:avLst/>
           </a:prstGeom>
           <a:solidFill>
-            <a:srgbClr val="02B08A"/>
+            <a:srgbClr val="7FE3FF"/>
           </a:solidFill>
-          <a:ln w="9525">
-            <a:solidFill>
-              <a:srgbClr val="02B08A"/>
-            </a:solidFill>
+          <a:ln>
+            <a:noFill/>
           </a:ln>
           <a:effectLst/>
         </p:spPr>
@@ -8657,7 +8831,7 @@
             <a:r>
               <a:rPr sz="1250" b="1">
                 <a:solidFill>
-                  <a:srgbClr val="02B08A"/>
+                  <a:srgbClr val="5CC8FF"/>
                 </a:solidFill>
                 <a:latin typeface="微软雅黑"/>
                 <a:ea typeface="微软雅黑"/>
@@ -8716,7 +8890,7 @@
             <a:r>
               <a:rPr sz="2600" b="1">
                 <a:solidFill>
-                  <a:srgbClr val="02B08A"/>
+                  <a:srgbClr val="7FFFE0"/>
                 </a:solidFill>
                 <a:latin typeface="微软雅黑"/>
                 <a:ea typeface="微软雅黑"/>
@@ -8758,11 +8932,11 @@
             </a:avLst>
           </a:prstGeom>
           <a:solidFill>
-            <a:srgbClr val="123342"/>
+            <a:srgbClr val="0A2448"/>
           </a:solidFill>
           <a:ln w="9525">
             <a:solidFill>
-              <a:srgbClr val="123342"/>
+              <a:srgbClr val="1A4272"/>
             </a:solidFill>
           </a:ln>
           <a:effectLst/>
@@ -8819,7 +8993,7 @@
             <a:r>
               <a:rPr sz="1350" b="1">
                 <a:solidFill>
-                  <a:srgbClr val="FFFFFF"/>
+                  <a:srgbClr val="7FE3FF"/>
                 </a:solidFill>
                 <a:latin typeface="微软雅黑"/>
                 <a:ea typeface="微软雅黑"/>
@@ -8837,7 +9011,7 @@
             <a:r>
               <a:rPr sz="1050" b="0">
                 <a:solidFill>
-                  <a:srgbClr val="C7D8DE"/>
+                  <a:srgbClr val="C7DCF2"/>
                 </a:solidFill>
                 <a:latin typeface="微软雅黑"/>
                 <a:ea typeface="微软雅黑"/>
@@ -8865,11 +9039,11 @@
             </a:avLst>
           </a:prstGeom>
           <a:solidFill>
-            <a:srgbClr val="123342"/>
+            <a:srgbClr val="0A2448"/>
           </a:solidFill>
           <a:ln w="9525">
             <a:solidFill>
-              <a:srgbClr val="123342"/>
+              <a:srgbClr val="1A4272"/>
             </a:solidFill>
           </a:ln>
           <a:effectLst/>
@@ -8926,7 +9100,7 @@
             <a:r>
               <a:rPr sz="1350" b="1">
                 <a:solidFill>
-                  <a:srgbClr val="FFFFFF"/>
+                  <a:srgbClr val="7FE3FF"/>
                 </a:solidFill>
                 <a:latin typeface="微软雅黑"/>
                 <a:ea typeface="微软雅黑"/>
@@ -8944,7 +9118,7 @@
             <a:r>
               <a:rPr sz="1050" b="0">
                 <a:solidFill>
-                  <a:srgbClr val="C7D8DE"/>
+                  <a:srgbClr val="C7DCF2"/>
                 </a:solidFill>
                 <a:latin typeface="微软雅黑"/>
                 <a:ea typeface="微软雅黑"/>
@@ -8972,11 +9146,11 @@
             </a:avLst>
           </a:prstGeom>
           <a:solidFill>
-            <a:srgbClr val="123342"/>
+            <a:srgbClr val="0A2448"/>
           </a:solidFill>
           <a:ln w="9525">
             <a:solidFill>
-              <a:srgbClr val="123342"/>
+              <a:srgbClr val="1A4272"/>
             </a:solidFill>
           </a:ln>
           <a:effectLst/>
@@ -9033,7 +9207,7 @@
             <a:r>
               <a:rPr sz="1350" b="1">
                 <a:solidFill>
-                  <a:srgbClr val="FFFFFF"/>
+                  <a:srgbClr val="7FE3FF"/>
                 </a:solidFill>
                 <a:latin typeface="微软雅黑"/>
                 <a:ea typeface="微软雅黑"/>
@@ -9051,7 +9225,7 @@
             <a:r>
               <a:rPr sz="1050" b="0">
                 <a:solidFill>
-                  <a:srgbClr val="C7D8DE"/>
+                  <a:srgbClr val="C7DCF2"/>
                 </a:solidFill>
                 <a:latin typeface="微软雅黑"/>
                 <a:ea typeface="微软雅黑"/>
@@ -9088,7 +9262,7 @@
             <a:r>
               <a:rPr sz="1100" b="0">
                 <a:solidFill>
-                  <a:srgbClr val="7E97A1"/>
+                  <a:srgbClr val="7F9DC4"/>
                 </a:solidFill>
                 <a:latin typeface="微软雅黑"/>
                 <a:ea typeface="微软雅黑"/>
@@ -9125,7 +9299,7 @@
             <a:r>
               <a:rPr sz="950" b="0">
                 <a:solidFill>
-                  <a:srgbClr val="6B7C85"/>
+                  <a:srgbClr val="7E9EC4"/>
                 </a:solidFill>
                 <a:latin typeface="微软雅黑"/>
                 <a:ea typeface="微软雅黑"/>
@@ -9162,7 +9336,7 @@
             <a:r>
               <a:rPr sz="950" b="0">
                 <a:solidFill>
-                  <a:srgbClr val="6B7C85"/>
+                  <a:srgbClr val="7E9EC4"/>
                 </a:solidFill>
                 <a:latin typeface="微软雅黑"/>
                 <a:ea typeface="微软雅黑"/>
@@ -9200,18 +9374,16 @@
         <p:spPr>
           <a:xfrm>
             <a:off x="0" y="0"/>
-            <a:ext cx="146304" cy="6858000"/>
+            <a:ext cx="12191695" cy="6858000"/>
           </a:xfrm>
           <a:prstGeom prst="rect">
             <a:avLst/>
           </a:prstGeom>
           <a:solidFill>
-            <a:srgbClr val="027C8C"/>
+            <a:srgbClr val="04122B"/>
           </a:solidFill>
-          <a:ln w="9525">
-            <a:solidFill>
-              <a:srgbClr val="027C8C"/>
-            </a:solidFill>
+          <a:ln>
+            <a:noFill/>
           </a:ln>
           <a:effectLst/>
         </p:spPr>
@@ -9239,7 +9411,51 @@
       </p:sp>
       <p:sp>
         <p:nvSpPr>
-          <p:cNvPr id="3" name="TextBox 2"/>
+          <p:cNvPr id="3" name="Rectangle 2"/>
+          <p:cNvSpPr/>
+          <p:nvPr/>
+        </p:nvSpPr>
+        <p:spPr>
+          <a:xfrm>
+            <a:off x="0" y="0"/>
+            <a:ext cx="146304" cy="6858000"/>
+          </a:xfrm>
+          <a:prstGeom prst="rect">
+            <a:avLst/>
+          </a:prstGeom>
+          <a:solidFill>
+            <a:srgbClr val="7FE3FF"/>
+          </a:solidFill>
+          <a:ln>
+            <a:noFill/>
+          </a:ln>
+          <a:effectLst/>
+        </p:spPr>
+        <p:style>
+          <a:lnRef idx="1">
+            <a:schemeClr val="accent1"/>
+          </a:lnRef>
+          <a:fillRef idx="3">
+            <a:schemeClr val="accent1"/>
+          </a:fillRef>
+          <a:effectRef idx="2">
+            <a:schemeClr val="accent1"/>
+          </a:effectRef>
+          <a:fontRef idx="minor">
+            <a:schemeClr val="lt1"/>
+          </a:fontRef>
+        </p:style>
+        <p:txBody>
+          <a:bodyPr rtlCol="0" anchor="ctr"/>
+          <a:lstStyle/>
+          <a:p>
+            <a:pPr algn="ctr"/>
+          </a:p>
+        </p:txBody>
+      </p:sp>
+      <p:sp>
+        <p:nvSpPr>
+          <p:cNvPr id="4" name="TextBox 3"/>
           <p:cNvSpPr txBox="1"/>
           <p:nvPr/>
         </p:nvSpPr>
@@ -9263,7 +9479,7 @@
             <a:r>
               <a:rPr sz="1150" b="1">
                 <a:solidFill>
-                  <a:srgbClr val="027C8C"/>
+                  <a:srgbClr val="5CC8FF"/>
                 </a:solidFill>
                 <a:latin typeface="微软雅黑"/>
                 <a:ea typeface="微软雅黑"/>
@@ -9276,7 +9492,7 @@
       </p:sp>
       <p:sp>
         <p:nvSpPr>
-          <p:cNvPr id="4" name="TextBox 3"/>
+          <p:cNvPr id="5" name="TextBox 4"/>
           <p:cNvSpPr txBox="1"/>
           <p:nvPr/>
         </p:nvSpPr>
@@ -9300,7 +9516,7 @@
             <a:r>
               <a:rPr sz="2700" b="1">
                 <a:solidFill>
-                  <a:srgbClr val="0B1F2A"/>
+                  <a:srgbClr val="ECF7FF"/>
                 </a:solidFill>
                 <a:latin typeface="微软雅黑"/>
                 <a:ea typeface="微软雅黑"/>
@@ -9313,7 +9529,7 @@
       </p:sp>
       <p:sp>
         <p:nvSpPr>
-          <p:cNvPr id="5" name="TextBox 4"/>
+          <p:cNvPr id="6" name="TextBox 5"/>
           <p:cNvSpPr txBox="1"/>
           <p:nvPr/>
         </p:nvSpPr>
@@ -9341,7 +9557,7 @@
             <a:r>
               <a:rPr sz="1250" b="0">
                 <a:solidFill>
-                  <a:srgbClr val="3D4C55"/>
+                  <a:srgbClr val="BBD4EC"/>
                 </a:solidFill>
                 <a:latin typeface="微软雅黑"/>
                 <a:ea typeface="微软雅黑"/>
@@ -9354,7 +9570,7 @@
       </p:sp>
       <p:sp>
         <p:nvSpPr>
-          <p:cNvPr id="6" name="TextBox 5"/>
+          <p:cNvPr id="7" name="TextBox 6"/>
           <p:cNvSpPr txBox="1"/>
           <p:nvPr/>
         </p:nvSpPr>
@@ -9378,7 +9594,7 @@
             <a:r>
               <a:rPr sz="950" b="0">
                 <a:solidFill>
-                  <a:srgbClr val="6B7C85"/>
+                  <a:srgbClr val="7E9EC4"/>
                 </a:solidFill>
                 <a:latin typeface="微软雅黑"/>
                 <a:ea typeface="微软雅黑"/>
@@ -9391,7 +9607,7 @@
       </p:sp>
       <p:sp>
         <p:nvSpPr>
-          <p:cNvPr id="7" name="TextBox 6"/>
+          <p:cNvPr id="8" name="TextBox 7"/>
           <p:cNvSpPr txBox="1"/>
           <p:nvPr/>
         </p:nvSpPr>
@@ -9415,7 +9631,7 @@
             <a:r>
               <a:rPr sz="950" b="0">
                 <a:solidFill>
-                  <a:srgbClr val="6B7C85"/>
+                  <a:srgbClr val="7E9EC4"/>
                 </a:solidFill>
                 <a:latin typeface="微软雅黑"/>
                 <a:ea typeface="微软雅黑"/>
@@ -9428,7 +9644,7 @@
       </p:sp>
       <p:sp>
         <p:nvSpPr>
-          <p:cNvPr id="8" name="Rounded Rectangle 7"/>
+          <p:cNvPr id="9" name="Rounded Rectangle 8"/>
           <p:cNvSpPr/>
           <p:nvPr/>
         </p:nvSpPr>
@@ -9443,11 +9659,11 @@
             </a:avLst>
           </a:prstGeom>
           <a:solidFill>
-            <a:srgbClr val="F2F6F8"/>
+            <a:srgbClr val="061A38"/>
           </a:solidFill>
           <a:ln w="9525">
             <a:solidFill>
-              <a:srgbClr val="F2F6F8"/>
+              <a:srgbClr val="1A4272"/>
             </a:solidFill>
           </a:ln>
           <a:effectLst/>
@@ -9476,7 +9692,7 @@
       </p:sp>
       <p:sp>
         <p:nvSpPr>
-          <p:cNvPr id="9" name="Oval 8"/>
+          <p:cNvPr id="10" name="Oval 9"/>
           <p:cNvSpPr/>
           <p:nvPr/>
         </p:nvSpPr>
@@ -9489,7 +9705,7 @@
             <a:avLst/>
           </a:prstGeom>
           <a:solidFill>
-            <a:srgbClr val="0B1F2A"/>
+            <a:srgbClr val="7FE3FF"/>
           </a:solidFill>
           <a:ln>
             <a:noFill/>
@@ -9518,7 +9734,7 @@
             <a:r>
               <a:rPr sz="1100" b="1">
                 <a:solidFill>
-                  <a:srgbClr val="FFFFFF"/>
+                  <a:srgbClr val="02091A"/>
                 </a:solidFill>
                 <a:latin typeface="微软雅黑"/>
                 <a:ea typeface="微软雅黑"/>
@@ -9531,7 +9747,7 @@
       </p:sp>
       <p:sp>
         <p:nvSpPr>
-          <p:cNvPr id="10" name="TextBox 9"/>
+          <p:cNvPr id="11" name="TextBox 10"/>
           <p:cNvSpPr txBox="1"/>
           <p:nvPr/>
         </p:nvSpPr>
@@ -9555,7 +9771,7 @@
             <a:r>
               <a:rPr sz="1000" b="1">
                 <a:solidFill>
-                  <a:srgbClr val="027C8C"/>
+                  <a:srgbClr val="5CC8FF"/>
                 </a:solidFill>
                 <a:latin typeface="微软雅黑"/>
                 <a:ea typeface="微软雅黑"/>
@@ -9568,7 +9784,7 @@
       </p:sp>
       <p:sp>
         <p:nvSpPr>
-          <p:cNvPr id="11" name="TextBox 10"/>
+          <p:cNvPr id="12" name="TextBox 11"/>
           <p:cNvSpPr txBox="1"/>
           <p:nvPr/>
         </p:nvSpPr>
@@ -9596,7 +9812,7 @@
             <a:r>
               <a:rPr sz="1450" b="1">
                 <a:solidFill>
-                  <a:srgbClr val="0B1F2A"/>
+                  <a:srgbClr val="ECF7FF"/>
                 </a:solidFill>
                 <a:latin typeface="微软雅黑"/>
                 <a:ea typeface="微软雅黑"/>
@@ -9609,7 +9825,7 @@
       </p:sp>
       <p:sp>
         <p:nvSpPr>
-          <p:cNvPr id="12" name="TextBox 11"/>
+          <p:cNvPr id="13" name="TextBox 12"/>
           <p:cNvSpPr txBox="1"/>
           <p:nvPr/>
         </p:nvSpPr>
@@ -9637,7 +9853,7 @@
             <a:r>
               <a:rPr sz="1050" b="0">
                 <a:solidFill>
-                  <a:srgbClr val="3D4C55"/>
+                  <a:srgbClr val="BBD4EC"/>
                 </a:solidFill>
                 <a:latin typeface="微软雅黑"/>
                 <a:ea typeface="微软雅黑"/>
@@ -9650,7 +9866,7 @@
       </p:sp>
       <p:sp>
         <p:nvSpPr>
-          <p:cNvPr id="13" name="Rounded Rectangle 12"/>
+          <p:cNvPr id="14" name="Rounded Rectangle 13"/>
           <p:cNvSpPr/>
           <p:nvPr/>
         </p:nvSpPr>
@@ -9665,11 +9881,11 @@
             </a:avLst>
           </a:prstGeom>
           <a:solidFill>
-            <a:srgbClr val="F2F6F8"/>
+            <a:srgbClr val="061A38"/>
           </a:solidFill>
           <a:ln w="9525">
             <a:solidFill>
-              <a:srgbClr val="F2F6F8"/>
+              <a:srgbClr val="1A4272"/>
             </a:solidFill>
           </a:ln>
           <a:effectLst/>
@@ -9698,7 +9914,7 @@
       </p:sp>
       <p:sp>
         <p:nvSpPr>
-          <p:cNvPr id="14" name="Oval 13"/>
+          <p:cNvPr id="15" name="Oval 14"/>
           <p:cNvSpPr/>
           <p:nvPr/>
         </p:nvSpPr>
@@ -9711,7 +9927,7 @@
             <a:avLst/>
           </a:prstGeom>
           <a:solidFill>
-            <a:srgbClr val="0B1F2A"/>
+            <a:srgbClr val="7FE3FF"/>
           </a:solidFill>
           <a:ln>
             <a:noFill/>
@@ -9740,7 +9956,7 @@
             <a:r>
               <a:rPr sz="1100" b="1">
                 <a:solidFill>
-                  <a:srgbClr val="FFFFFF"/>
+                  <a:srgbClr val="02091A"/>
                 </a:solidFill>
                 <a:latin typeface="微软雅黑"/>
                 <a:ea typeface="微软雅黑"/>
@@ -9753,7 +9969,7 @@
       </p:sp>
       <p:sp>
         <p:nvSpPr>
-          <p:cNvPr id="15" name="TextBox 14"/>
+          <p:cNvPr id="16" name="TextBox 15"/>
           <p:cNvSpPr txBox="1"/>
           <p:nvPr/>
         </p:nvSpPr>
@@ -9777,7 +9993,7 @@
             <a:r>
               <a:rPr sz="1000" b="1">
                 <a:solidFill>
-                  <a:srgbClr val="027C8C"/>
+                  <a:srgbClr val="5CC8FF"/>
                 </a:solidFill>
                 <a:latin typeface="微软雅黑"/>
                 <a:ea typeface="微软雅黑"/>
@@ -9790,7 +10006,7 @@
       </p:sp>
       <p:sp>
         <p:nvSpPr>
-          <p:cNvPr id="16" name="TextBox 15"/>
+          <p:cNvPr id="17" name="TextBox 16"/>
           <p:cNvSpPr txBox="1"/>
           <p:nvPr/>
         </p:nvSpPr>
@@ -9818,7 +10034,7 @@
             <a:r>
               <a:rPr sz="1450" b="1">
                 <a:solidFill>
-                  <a:srgbClr val="0B1F2A"/>
+                  <a:srgbClr val="ECF7FF"/>
                 </a:solidFill>
                 <a:latin typeface="微软雅黑"/>
                 <a:ea typeface="微软雅黑"/>
@@ -9831,7 +10047,7 @@
       </p:sp>
       <p:sp>
         <p:nvSpPr>
-          <p:cNvPr id="17" name="TextBox 16"/>
+          <p:cNvPr id="18" name="TextBox 17"/>
           <p:cNvSpPr txBox="1"/>
           <p:nvPr/>
         </p:nvSpPr>
@@ -9859,7 +10075,7 @@
             <a:r>
               <a:rPr sz="1050" b="0">
                 <a:solidFill>
-                  <a:srgbClr val="3D4C55"/>
+                  <a:srgbClr val="BBD4EC"/>
                 </a:solidFill>
                 <a:latin typeface="微软雅黑"/>
                 <a:ea typeface="微软雅黑"/>
@@ -9872,7 +10088,7 @@
       </p:sp>
       <p:sp>
         <p:nvSpPr>
-          <p:cNvPr id="18" name="Rounded Rectangle 17"/>
+          <p:cNvPr id="19" name="Rounded Rectangle 18"/>
           <p:cNvSpPr/>
           <p:nvPr/>
         </p:nvSpPr>
@@ -9887,11 +10103,11 @@
             </a:avLst>
           </a:prstGeom>
           <a:solidFill>
-            <a:srgbClr val="F2F6F8"/>
+            <a:srgbClr val="061A38"/>
           </a:solidFill>
           <a:ln w="9525">
             <a:solidFill>
-              <a:srgbClr val="F2F6F8"/>
+              <a:srgbClr val="1A4272"/>
             </a:solidFill>
           </a:ln>
           <a:effectLst/>
@@ -9920,7 +10136,7 @@
       </p:sp>
       <p:sp>
         <p:nvSpPr>
-          <p:cNvPr id="19" name="Oval 18"/>
+          <p:cNvPr id="20" name="Oval 19"/>
           <p:cNvSpPr/>
           <p:nvPr/>
         </p:nvSpPr>
@@ -9933,7 +10149,7 @@
             <a:avLst/>
           </a:prstGeom>
           <a:solidFill>
-            <a:srgbClr val="0B1F2A"/>
+            <a:srgbClr val="7FE3FF"/>
           </a:solidFill>
           <a:ln>
             <a:noFill/>
@@ -9962,7 +10178,7 @@
             <a:r>
               <a:rPr sz="1100" b="1">
                 <a:solidFill>
-                  <a:srgbClr val="FFFFFF"/>
+                  <a:srgbClr val="02091A"/>
                 </a:solidFill>
                 <a:latin typeface="微软雅黑"/>
                 <a:ea typeface="微软雅黑"/>
@@ -9975,7 +10191,7 @@
       </p:sp>
       <p:sp>
         <p:nvSpPr>
-          <p:cNvPr id="20" name="TextBox 19"/>
+          <p:cNvPr id="21" name="TextBox 20"/>
           <p:cNvSpPr txBox="1"/>
           <p:nvPr/>
         </p:nvSpPr>
@@ -9999,7 +10215,7 @@
             <a:r>
               <a:rPr sz="1000" b="1">
                 <a:solidFill>
-                  <a:srgbClr val="027C8C"/>
+                  <a:srgbClr val="5CC8FF"/>
                 </a:solidFill>
                 <a:latin typeface="微软雅黑"/>
                 <a:ea typeface="微软雅黑"/>
@@ -10012,7 +10228,7 @@
       </p:sp>
       <p:sp>
         <p:nvSpPr>
-          <p:cNvPr id="21" name="TextBox 20"/>
+          <p:cNvPr id="22" name="TextBox 21"/>
           <p:cNvSpPr txBox="1"/>
           <p:nvPr/>
         </p:nvSpPr>
@@ -10040,7 +10256,7 @@
             <a:r>
               <a:rPr sz="1450" b="1">
                 <a:solidFill>
-                  <a:srgbClr val="0B1F2A"/>
+                  <a:srgbClr val="ECF7FF"/>
                 </a:solidFill>
                 <a:latin typeface="微软雅黑"/>
                 <a:ea typeface="微软雅黑"/>
@@ -10053,7 +10269,7 @@
       </p:sp>
       <p:sp>
         <p:nvSpPr>
-          <p:cNvPr id="22" name="TextBox 21"/>
+          <p:cNvPr id="23" name="TextBox 22"/>
           <p:cNvSpPr txBox="1"/>
           <p:nvPr/>
         </p:nvSpPr>
@@ -10081,7 +10297,7 @@
             <a:r>
               <a:rPr sz="1050" b="0">
                 <a:solidFill>
-                  <a:srgbClr val="3D4C55"/>
+                  <a:srgbClr val="BBD4EC"/>
                 </a:solidFill>
                 <a:latin typeface="微软雅黑"/>
                 <a:ea typeface="微软雅黑"/>
@@ -10094,7 +10310,7 @@
       </p:sp>
       <p:sp>
         <p:nvSpPr>
-          <p:cNvPr id="23" name="Rounded Rectangle 22"/>
+          <p:cNvPr id="24" name="Rounded Rectangle 23"/>
           <p:cNvSpPr/>
           <p:nvPr/>
         </p:nvSpPr>
@@ -10109,11 +10325,11 @@
             </a:avLst>
           </a:prstGeom>
           <a:solidFill>
-            <a:srgbClr val="F2F6F8"/>
+            <a:srgbClr val="061A38"/>
           </a:solidFill>
           <a:ln w="9525">
             <a:solidFill>
-              <a:srgbClr val="F2F6F8"/>
+              <a:srgbClr val="1A4272"/>
             </a:solidFill>
           </a:ln>
           <a:effectLst/>
@@ -10142,7 +10358,7 @@
       </p:sp>
       <p:sp>
         <p:nvSpPr>
-          <p:cNvPr id="24" name="Oval 23"/>
+          <p:cNvPr id="25" name="Oval 24"/>
           <p:cNvSpPr/>
           <p:nvPr/>
         </p:nvSpPr>
@@ -10155,7 +10371,7 @@
             <a:avLst/>
           </a:prstGeom>
           <a:solidFill>
-            <a:srgbClr val="0B1F2A"/>
+            <a:srgbClr val="7FE3FF"/>
           </a:solidFill>
           <a:ln>
             <a:noFill/>
@@ -10184,7 +10400,7 @@
             <a:r>
               <a:rPr sz="1100" b="1">
                 <a:solidFill>
-                  <a:srgbClr val="FFFFFF"/>
+                  <a:srgbClr val="02091A"/>
                 </a:solidFill>
                 <a:latin typeface="微软雅黑"/>
                 <a:ea typeface="微软雅黑"/>
@@ -10197,7 +10413,7 @@
       </p:sp>
       <p:sp>
         <p:nvSpPr>
-          <p:cNvPr id="25" name="TextBox 24"/>
+          <p:cNvPr id="26" name="TextBox 25"/>
           <p:cNvSpPr txBox="1"/>
           <p:nvPr/>
         </p:nvSpPr>
@@ -10221,7 +10437,7 @@
             <a:r>
               <a:rPr sz="1000" b="1">
                 <a:solidFill>
-                  <a:srgbClr val="027C8C"/>
+                  <a:srgbClr val="5CC8FF"/>
                 </a:solidFill>
                 <a:latin typeface="微软雅黑"/>
                 <a:ea typeface="微软雅黑"/>
@@ -10234,7 +10450,7 @@
       </p:sp>
       <p:sp>
         <p:nvSpPr>
-          <p:cNvPr id="26" name="TextBox 25"/>
+          <p:cNvPr id="27" name="TextBox 26"/>
           <p:cNvSpPr txBox="1"/>
           <p:nvPr/>
         </p:nvSpPr>
@@ -10262,7 +10478,7 @@
             <a:r>
               <a:rPr sz="1450" b="1">
                 <a:solidFill>
-                  <a:srgbClr val="0B1F2A"/>
+                  <a:srgbClr val="ECF7FF"/>
                 </a:solidFill>
                 <a:latin typeface="微软雅黑"/>
                 <a:ea typeface="微软雅黑"/>
@@ -10275,7 +10491,7 @@
       </p:sp>
       <p:sp>
         <p:nvSpPr>
-          <p:cNvPr id="27" name="TextBox 26"/>
+          <p:cNvPr id="28" name="TextBox 27"/>
           <p:cNvSpPr txBox="1"/>
           <p:nvPr/>
         </p:nvSpPr>
@@ -10303,7 +10519,7 @@
             <a:r>
               <a:rPr sz="1050" b="0">
                 <a:solidFill>
-                  <a:srgbClr val="3D4C55"/>
+                  <a:srgbClr val="BBD4EC"/>
                 </a:solidFill>
                 <a:latin typeface="微软雅黑"/>
                 <a:ea typeface="微软雅黑"/>
@@ -10316,7 +10532,7 @@
       </p:sp>
       <p:sp>
         <p:nvSpPr>
-          <p:cNvPr id="28" name="Rounded Rectangle 27"/>
+          <p:cNvPr id="29" name="Rounded Rectangle 28"/>
           <p:cNvSpPr/>
           <p:nvPr/>
         </p:nvSpPr>
@@ -10331,11 +10547,11 @@
             </a:avLst>
           </a:prstGeom>
           <a:solidFill>
-            <a:srgbClr val="F2F6F8"/>
+            <a:srgbClr val="061A38"/>
           </a:solidFill>
           <a:ln w="9525">
             <a:solidFill>
-              <a:srgbClr val="F2F6F8"/>
+              <a:srgbClr val="1A4272"/>
             </a:solidFill>
           </a:ln>
           <a:effectLst/>
@@ -10364,7 +10580,7 @@
       </p:sp>
       <p:sp>
         <p:nvSpPr>
-          <p:cNvPr id="29" name="Oval 28"/>
+          <p:cNvPr id="30" name="Oval 29"/>
           <p:cNvSpPr/>
           <p:nvPr/>
         </p:nvSpPr>
@@ -10377,7 +10593,7 @@
             <a:avLst/>
           </a:prstGeom>
           <a:solidFill>
-            <a:srgbClr val="0B1F2A"/>
+            <a:srgbClr val="7FE3FF"/>
           </a:solidFill>
           <a:ln>
             <a:noFill/>
@@ -10406,7 +10622,7 @@
             <a:r>
               <a:rPr sz="1100" b="1">
                 <a:solidFill>
-                  <a:srgbClr val="FFFFFF"/>
+                  <a:srgbClr val="02091A"/>
                 </a:solidFill>
                 <a:latin typeface="微软雅黑"/>
                 <a:ea typeface="微软雅黑"/>
@@ -10419,7 +10635,7 @@
       </p:sp>
       <p:sp>
         <p:nvSpPr>
-          <p:cNvPr id="30" name="TextBox 29"/>
+          <p:cNvPr id="31" name="TextBox 30"/>
           <p:cNvSpPr txBox="1"/>
           <p:nvPr/>
         </p:nvSpPr>
@@ -10443,7 +10659,7 @@
             <a:r>
               <a:rPr sz="1000" b="1">
                 <a:solidFill>
-                  <a:srgbClr val="027C8C"/>
+                  <a:srgbClr val="5CC8FF"/>
                 </a:solidFill>
                 <a:latin typeface="微软雅黑"/>
                 <a:ea typeface="微软雅黑"/>
@@ -10456,7 +10672,7 @@
       </p:sp>
       <p:sp>
         <p:nvSpPr>
-          <p:cNvPr id="31" name="TextBox 30"/>
+          <p:cNvPr id="32" name="TextBox 31"/>
           <p:cNvSpPr txBox="1"/>
           <p:nvPr/>
         </p:nvSpPr>
@@ -10484,7 +10700,7 @@
             <a:r>
               <a:rPr sz="1450" b="1">
                 <a:solidFill>
-                  <a:srgbClr val="0B1F2A"/>
+                  <a:srgbClr val="ECF7FF"/>
                 </a:solidFill>
                 <a:latin typeface="微软雅黑"/>
                 <a:ea typeface="微软雅黑"/>
@@ -10497,7 +10713,7 @@
       </p:sp>
       <p:sp>
         <p:nvSpPr>
-          <p:cNvPr id="32" name="TextBox 31"/>
+          <p:cNvPr id="33" name="TextBox 32"/>
           <p:cNvSpPr txBox="1"/>
           <p:nvPr/>
         </p:nvSpPr>
@@ -10525,7 +10741,7 @@
             <a:r>
               <a:rPr sz="1050" b="0">
                 <a:solidFill>
-                  <a:srgbClr val="3D4C55"/>
+                  <a:srgbClr val="BBD4EC"/>
                 </a:solidFill>
                 <a:latin typeface="微软雅黑"/>
                 <a:ea typeface="微软雅黑"/>
@@ -10538,7 +10754,7 @@
       </p:sp>
       <p:sp>
         <p:nvSpPr>
-          <p:cNvPr id="33" name="TextBox 32"/>
+          <p:cNvPr id="34" name="TextBox 33"/>
           <p:cNvSpPr txBox="1"/>
           <p:nvPr/>
         </p:nvSpPr>
@@ -10566,7 +10782,7 @@
             <a:r>
               <a:rPr sz="1300" b="1">
                 <a:solidFill>
-                  <a:srgbClr val="027C8C"/>
+                  <a:srgbClr val="5CC8FF"/>
                 </a:solidFill>
                 <a:latin typeface="微软雅黑"/>
                 <a:ea typeface="微软雅黑"/>
@@ -10577,7 +10793,7 @@
             <a:r>
               <a:rPr sz="1300" b="0">
                 <a:solidFill>
-                  <a:srgbClr val="3D4C55"/>
+                  <a:srgbClr val="BBD4EC"/>
                 </a:solidFill>
                 <a:latin typeface="微软雅黑"/>
                 <a:ea typeface="微软雅黑"/>
@@ -10588,7 +10804,7 @@
             <a:r>
               <a:rPr sz="1300" b="1">
                 <a:solidFill>
-                  <a:srgbClr val="0B1F2A"/>
+                  <a:srgbClr val="7FFFE0"/>
                 </a:solidFill>
                 <a:latin typeface="微软雅黑"/>
                 <a:ea typeface="微软雅黑"/>
@@ -10599,7 +10815,7 @@
             <a:r>
               <a:rPr sz="1300" b="0">
                 <a:solidFill>
-                  <a:srgbClr val="3D4C55"/>
+                  <a:srgbClr val="BBD4EC"/>
                 </a:solidFill>
                 <a:latin typeface="微软雅黑"/>
                 <a:ea typeface="微软雅黑"/>
@@ -10637,18 +10853,16 @@
         <p:spPr>
           <a:xfrm>
             <a:off x="0" y="0"/>
-            <a:ext cx="146304" cy="6858000"/>
+            <a:ext cx="12191695" cy="6858000"/>
           </a:xfrm>
           <a:prstGeom prst="rect">
             <a:avLst/>
           </a:prstGeom>
           <a:solidFill>
-            <a:srgbClr val="027C8C"/>
+            <a:srgbClr val="04122B"/>
           </a:solidFill>
-          <a:ln w="9525">
-            <a:solidFill>
-              <a:srgbClr val="027C8C"/>
-            </a:solidFill>
+          <a:ln>
+            <a:noFill/>
           </a:ln>
           <a:effectLst/>
         </p:spPr>
@@ -10676,7 +10890,51 @@
       </p:sp>
       <p:sp>
         <p:nvSpPr>
-          <p:cNvPr id="3" name="TextBox 2"/>
+          <p:cNvPr id="3" name="Rectangle 2"/>
+          <p:cNvSpPr/>
+          <p:nvPr/>
+        </p:nvSpPr>
+        <p:spPr>
+          <a:xfrm>
+            <a:off x="0" y="0"/>
+            <a:ext cx="146304" cy="6858000"/>
+          </a:xfrm>
+          <a:prstGeom prst="rect">
+            <a:avLst/>
+          </a:prstGeom>
+          <a:solidFill>
+            <a:srgbClr val="7FE3FF"/>
+          </a:solidFill>
+          <a:ln>
+            <a:noFill/>
+          </a:ln>
+          <a:effectLst/>
+        </p:spPr>
+        <p:style>
+          <a:lnRef idx="1">
+            <a:schemeClr val="accent1"/>
+          </a:lnRef>
+          <a:fillRef idx="3">
+            <a:schemeClr val="accent1"/>
+          </a:fillRef>
+          <a:effectRef idx="2">
+            <a:schemeClr val="accent1"/>
+          </a:effectRef>
+          <a:fontRef idx="minor">
+            <a:schemeClr val="lt1"/>
+          </a:fontRef>
+        </p:style>
+        <p:txBody>
+          <a:bodyPr rtlCol="0" anchor="ctr"/>
+          <a:lstStyle/>
+          <a:p>
+            <a:pPr algn="ctr"/>
+          </a:p>
+        </p:txBody>
+      </p:sp>
+      <p:sp>
+        <p:nvSpPr>
+          <p:cNvPr id="4" name="TextBox 3"/>
           <p:cNvSpPr txBox="1"/>
           <p:nvPr/>
         </p:nvSpPr>
@@ -10700,7 +10958,7 @@
             <a:r>
               <a:rPr sz="1150" b="1">
                 <a:solidFill>
-                  <a:srgbClr val="027C8C"/>
+                  <a:srgbClr val="5CC8FF"/>
                 </a:solidFill>
                 <a:latin typeface="微软雅黑"/>
                 <a:ea typeface="微软雅黑"/>
@@ -10713,7 +10971,7 @@
       </p:sp>
       <p:sp>
         <p:nvSpPr>
-          <p:cNvPr id="4" name="TextBox 3"/>
+          <p:cNvPr id="5" name="TextBox 4"/>
           <p:cNvSpPr txBox="1"/>
           <p:nvPr/>
         </p:nvSpPr>
@@ -10737,7 +10995,7 @@
             <a:r>
               <a:rPr sz="2700" b="1">
                 <a:solidFill>
-                  <a:srgbClr val="0B1F2A"/>
+                  <a:srgbClr val="ECF7FF"/>
                 </a:solidFill>
                 <a:latin typeface="微软雅黑"/>
                 <a:ea typeface="微软雅黑"/>
@@ -10750,7 +11008,7 @@
       </p:sp>
       <p:sp>
         <p:nvSpPr>
-          <p:cNvPr id="5" name="TextBox 4"/>
+          <p:cNvPr id="6" name="TextBox 5"/>
           <p:cNvSpPr txBox="1"/>
           <p:nvPr/>
         </p:nvSpPr>
@@ -10778,7 +11036,7 @@
             <a:r>
               <a:rPr sz="1250" b="0">
                 <a:solidFill>
-                  <a:srgbClr val="3D4C55"/>
+                  <a:srgbClr val="BBD4EC"/>
                 </a:solidFill>
                 <a:latin typeface="微软雅黑"/>
                 <a:ea typeface="微软雅黑"/>
@@ -10791,7 +11049,7 @@
       </p:sp>
       <p:sp>
         <p:nvSpPr>
-          <p:cNvPr id="6" name="TextBox 5"/>
+          <p:cNvPr id="7" name="TextBox 6"/>
           <p:cNvSpPr txBox="1"/>
           <p:nvPr/>
         </p:nvSpPr>
@@ -10815,7 +11073,7 @@
             <a:r>
               <a:rPr sz="950" b="0">
                 <a:solidFill>
-                  <a:srgbClr val="6B7C85"/>
+                  <a:srgbClr val="7E9EC4"/>
                 </a:solidFill>
                 <a:latin typeface="微软雅黑"/>
                 <a:ea typeface="微软雅黑"/>
@@ -10828,7 +11086,7 @@
       </p:sp>
       <p:sp>
         <p:nvSpPr>
-          <p:cNvPr id="7" name="TextBox 6"/>
+          <p:cNvPr id="8" name="TextBox 7"/>
           <p:cNvSpPr txBox="1"/>
           <p:nvPr/>
         </p:nvSpPr>
@@ -10852,7 +11110,7 @@
             <a:r>
               <a:rPr sz="950" b="0">
                 <a:solidFill>
-                  <a:srgbClr val="6B7C85"/>
+                  <a:srgbClr val="7E9EC4"/>
                 </a:solidFill>
                 <a:latin typeface="微软雅黑"/>
                 <a:ea typeface="微软雅黑"/>
@@ -10865,7 +11123,7 @@
       </p:sp>
       <p:sp>
         <p:nvSpPr>
-          <p:cNvPr id="8" name="Rounded Rectangle 7"/>
+          <p:cNvPr id="9" name="Rounded Rectangle 8"/>
           <p:cNvSpPr/>
           <p:nvPr/>
         </p:nvSpPr>
@@ -10880,11 +11138,11 @@
             </a:avLst>
           </a:prstGeom>
           <a:solidFill>
-            <a:srgbClr val="F2F6F8"/>
+            <a:srgbClr val="061A38"/>
           </a:solidFill>
           <a:ln w="9525">
             <a:solidFill>
-              <a:srgbClr val="F2F6F8"/>
+              <a:srgbClr val="1A4272"/>
             </a:solidFill>
           </a:ln>
           <a:effectLst/>
@@ -10913,7 +11171,7 @@
       </p:sp>
       <p:sp>
         <p:nvSpPr>
-          <p:cNvPr id="9" name="Rounded Rectangle 8"/>
+          <p:cNvPr id="10" name="Rounded Rectangle 9"/>
           <p:cNvSpPr/>
           <p:nvPr/>
         </p:nvSpPr>
@@ -10928,12 +11186,10 @@
             </a:avLst>
           </a:prstGeom>
           <a:solidFill>
-            <a:srgbClr val="027C8C"/>
+            <a:srgbClr val="5CC8FF"/>
           </a:solidFill>
-          <a:ln w="9525">
-            <a:solidFill>
-              <a:srgbClr val="027C8C"/>
-            </a:solidFill>
+          <a:ln>
+            <a:noFill/>
           </a:ln>
           <a:effectLst/>
         </p:spPr>
@@ -10961,7 +11217,7 @@
       </p:sp>
       <p:sp>
         <p:nvSpPr>
-          <p:cNvPr id="10" name="TextBox 9"/>
+          <p:cNvPr id="11" name="TextBox 10"/>
           <p:cNvSpPr txBox="1"/>
           <p:nvPr/>
         </p:nvSpPr>
@@ -10985,7 +11241,7 @@
             <a:r>
               <a:rPr sz="1050" b="1">
                 <a:solidFill>
-                  <a:srgbClr val="027C8C"/>
+                  <a:srgbClr val="5CC8FF"/>
                 </a:solidFill>
                 <a:latin typeface="微软雅黑"/>
                 <a:ea typeface="微软雅黑"/>
@@ -10998,7 +11254,7 @@
       </p:sp>
       <p:sp>
         <p:nvSpPr>
-          <p:cNvPr id="11" name="TextBox 10"/>
+          <p:cNvPr id="12" name="TextBox 11"/>
           <p:cNvSpPr txBox="1"/>
           <p:nvPr/>
         </p:nvSpPr>
@@ -11022,7 +11278,7 @@
             <a:r>
               <a:rPr sz="1900" b="1">
                 <a:solidFill>
-                  <a:srgbClr val="0B1F2A"/>
+                  <a:srgbClr val="ECF7FF"/>
                 </a:solidFill>
                 <a:latin typeface="微软雅黑"/>
                 <a:ea typeface="微软雅黑"/>
@@ -11035,7 +11291,7 @@
       </p:sp>
       <p:sp>
         <p:nvSpPr>
-          <p:cNvPr id="12" name="TextBox 11"/>
+          <p:cNvPr id="13" name="TextBox 12"/>
           <p:cNvSpPr txBox="1"/>
           <p:nvPr/>
         </p:nvSpPr>
@@ -11059,7 +11315,7 @@
             <a:r>
               <a:rPr sz="1150" b="0">
                 <a:solidFill>
-                  <a:srgbClr val="6B7C85"/>
+                  <a:srgbClr val="7E9EC4"/>
                 </a:solidFill>
                 <a:latin typeface="微软雅黑"/>
                 <a:ea typeface="微软雅黑"/>
@@ -11072,7 +11328,7 @@
       </p:sp>
       <p:sp>
         <p:nvSpPr>
-          <p:cNvPr id="13" name="TextBox 12"/>
+          <p:cNvPr id="14" name="TextBox 13"/>
           <p:cNvSpPr txBox="1"/>
           <p:nvPr/>
         </p:nvSpPr>
@@ -11103,7 +11359,7 @@
             <a:r>
               <a:rPr sz="1100" b="0">
                 <a:solidFill>
-                  <a:srgbClr val="3D4C55"/>
+                  <a:srgbClr val="BBD4EC"/>
                 </a:solidFill>
                 <a:latin typeface="微软雅黑"/>
                 <a:ea typeface="微软雅黑"/>
@@ -11124,7 +11380,7 @@
             <a:r>
               <a:rPr sz="1100" b="0">
                 <a:solidFill>
-                  <a:srgbClr val="3D4C55"/>
+                  <a:srgbClr val="BBD4EC"/>
                 </a:solidFill>
                 <a:latin typeface="微软雅黑"/>
                 <a:ea typeface="微软雅黑"/>
@@ -11145,7 +11401,7 @@
             <a:r>
               <a:rPr sz="1100" b="0">
                 <a:solidFill>
-                  <a:srgbClr val="3D4C55"/>
+                  <a:srgbClr val="BBD4EC"/>
                 </a:solidFill>
                 <a:latin typeface="微软雅黑"/>
                 <a:ea typeface="微软雅黑"/>
@@ -11158,7 +11414,7 @@
       </p:sp>
       <p:sp>
         <p:nvSpPr>
-          <p:cNvPr id="14" name="Rounded Rectangle 13"/>
+          <p:cNvPr id="15" name="Rounded Rectangle 14"/>
           <p:cNvSpPr/>
           <p:nvPr/>
         </p:nvSpPr>
@@ -11173,11 +11429,11 @@
             </a:avLst>
           </a:prstGeom>
           <a:solidFill>
-            <a:srgbClr val="FFFFFF"/>
+            <a:srgbClr val="04122B"/>
           </a:solidFill>
           <a:ln w="9525">
             <a:solidFill>
-              <a:srgbClr val="FFFFFF"/>
+              <a:srgbClr val="1A4272"/>
             </a:solidFill>
           </a:ln>
           <a:effectLst/>
@@ -11206,7 +11462,7 @@
       </p:sp>
       <p:sp>
         <p:nvSpPr>
-          <p:cNvPr id="15" name="TextBox 14"/>
+          <p:cNvPr id="16" name="TextBox 15"/>
           <p:cNvSpPr txBox="1"/>
           <p:nvPr/>
         </p:nvSpPr>
@@ -11234,7 +11490,7 @@
             <a:r>
               <a:rPr sz="1000" b="0">
                 <a:solidFill>
-                  <a:srgbClr val="027C8C"/>
+                  <a:srgbClr val="5CC8FF"/>
                 </a:solidFill>
                 <a:latin typeface="微软雅黑"/>
                 <a:ea typeface="微软雅黑"/>
@@ -11247,7 +11503,7 @@
       </p:sp>
       <p:sp>
         <p:nvSpPr>
-          <p:cNvPr id="16" name="Rounded Rectangle 15"/>
+          <p:cNvPr id="17" name="Rounded Rectangle 16"/>
           <p:cNvSpPr/>
           <p:nvPr/>
         </p:nvSpPr>
@@ -11262,11 +11518,11 @@
             </a:avLst>
           </a:prstGeom>
           <a:solidFill>
-            <a:srgbClr val="F2F6F8"/>
+            <a:srgbClr val="061A38"/>
           </a:solidFill>
           <a:ln w="9525">
             <a:solidFill>
-              <a:srgbClr val="F2F6F8"/>
+              <a:srgbClr val="1A4272"/>
             </a:solidFill>
           </a:ln>
           <a:effectLst/>
@@ -11295,7 +11551,7 @@
       </p:sp>
       <p:sp>
         <p:nvSpPr>
-          <p:cNvPr id="17" name="Rounded Rectangle 16"/>
+          <p:cNvPr id="18" name="Rounded Rectangle 17"/>
           <p:cNvSpPr/>
           <p:nvPr/>
         </p:nvSpPr>
@@ -11310,12 +11566,10 @@
             </a:avLst>
           </a:prstGeom>
           <a:solidFill>
-            <a:srgbClr val="02B08A"/>
+            <a:srgbClr val="7FE3FF"/>
           </a:solidFill>
-          <a:ln w="9525">
-            <a:solidFill>
-              <a:srgbClr val="02B08A"/>
-            </a:solidFill>
+          <a:ln>
+            <a:noFill/>
           </a:ln>
           <a:effectLst/>
         </p:spPr>
@@ -11343,7 +11597,7 @@
       </p:sp>
       <p:sp>
         <p:nvSpPr>
-          <p:cNvPr id="18" name="TextBox 17"/>
+          <p:cNvPr id="19" name="TextBox 18"/>
           <p:cNvSpPr txBox="1"/>
           <p:nvPr/>
         </p:nvSpPr>
@@ -11367,7 +11621,7 @@
             <a:r>
               <a:rPr sz="1050" b="1">
                 <a:solidFill>
-                  <a:srgbClr val="02B08A"/>
+                  <a:srgbClr val="7FE3FF"/>
                 </a:solidFill>
                 <a:latin typeface="微软雅黑"/>
                 <a:ea typeface="微软雅黑"/>
@@ -11380,7 +11634,7 @@
       </p:sp>
       <p:sp>
         <p:nvSpPr>
-          <p:cNvPr id="19" name="TextBox 18"/>
+          <p:cNvPr id="20" name="TextBox 19"/>
           <p:cNvSpPr txBox="1"/>
           <p:nvPr/>
         </p:nvSpPr>
@@ -11404,7 +11658,7 @@
             <a:r>
               <a:rPr sz="1900" b="1">
                 <a:solidFill>
-                  <a:srgbClr val="0B1F2A"/>
+                  <a:srgbClr val="ECF7FF"/>
                 </a:solidFill>
                 <a:latin typeface="微软雅黑"/>
                 <a:ea typeface="微软雅黑"/>
@@ -11417,7 +11671,7 @@
       </p:sp>
       <p:sp>
         <p:nvSpPr>
-          <p:cNvPr id="20" name="TextBox 19"/>
+          <p:cNvPr id="21" name="TextBox 20"/>
           <p:cNvSpPr txBox="1"/>
           <p:nvPr/>
         </p:nvSpPr>
@@ -11441,7 +11695,7 @@
             <a:r>
               <a:rPr sz="1150" b="0">
                 <a:solidFill>
-                  <a:srgbClr val="6B7C85"/>
+                  <a:srgbClr val="7E9EC4"/>
                 </a:solidFill>
                 <a:latin typeface="微软雅黑"/>
                 <a:ea typeface="微软雅黑"/>
@@ -11454,7 +11708,7 @@
       </p:sp>
       <p:sp>
         <p:nvSpPr>
-          <p:cNvPr id="21" name="TextBox 20"/>
+          <p:cNvPr id="22" name="TextBox 21"/>
           <p:cNvSpPr txBox="1"/>
           <p:nvPr/>
         </p:nvSpPr>
@@ -11485,7 +11739,7 @@
             <a:r>
               <a:rPr sz="1100" b="0">
                 <a:solidFill>
-                  <a:srgbClr val="3D4C55"/>
+                  <a:srgbClr val="BBD4EC"/>
                 </a:solidFill>
                 <a:latin typeface="微软雅黑"/>
                 <a:ea typeface="微软雅黑"/>
@@ -11506,7 +11760,7 @@
             <a:r>
               <a:rPr sz="1100" b="0">
                 <a:solidFill>
-                  <a:srgbClr val="3D4C55"/>
+                  <a:srgbClr val="BBD4EC"/>
                 </a:solidFill>
                 <a:latin typeface="微软雅黑"/>
                 <a:ea typeface="微软雅黑"/>
@@ -11527,7 +11781,7 @@
             <a:r>
               <a:rPr sz="1100" b="0">
                 <a:solidFill>
-                  <a:srgbClr val="3D4C55"/>
+                  <a:srgbClr val="BBD4EC"/>
                 </a:solidFill>
                 <a:latin typeface="微软雅黑"/>
                 <a:ea typeface="微软雅黑"/>
@@ -11540,7 +11794,7 @@
       </p:sp>
       <p:sp>
         <p:nvSpPr>
-          <p:cNvPr id="22" name="Rounded Rectangle 21"/>
+          <p:cNvPr id="23" name="Rounded Rectangle 22"/>
           <p:cNvSpPr/>
           <p:nvPr/>
         </p:nvSpPr>
@@ -11555,11 +11809,11 @@
             </a:avLst>
           </a:prstGeom>
           <a:solidFill>
-            <a:srgbClr val="FFFFFF"/>
+            <a:srgbClr val="04122B"/>
           </a:solidFill>
           <a:ln w="9525">
             <a:solidFill>
-              <a:srgbClr val="FFFFFF"/>
+              <a:srgbClr val="1A4272"/>
             </a:solidFill>
           </a:ln>
           <a:effectLst/>
@@ -11588,7 +11842,7 @@
       </p:sp>
       <p:sp>
         <p:nvSpPr>
-          <p:cNvPr id="23" name="TextBox 22"/>
+          <p:cNvPr id="24" name="TextBox 23"/>
           <p:cNvSpPr txBox="1"/>
           <p:nvPr/>
         </p:nvSpPr>
@@ -11616,7 +11870,7 @@
             <a:r>
               <a:rPr sz="1000" b="0">
                 <a:solidFill>
-                  <a:srgbClr val="027C8C"/>
+                  <a:srgbClr val="5CC8FF"/>
                 </a:solidFill>
                 <a:latin typeface="微软雅黑"/>
                 <a:ea typeface="微软雅黑"/>
@@ -11629,7 +11883,7 @@
       </p:sp>
       <p:sp>
         <p:nvSpPr>
-          <p:cNvPr id="24" name="Rounded Rectangle 23"/>
+          <p:cNvPr id="25" name="Rounded Rectangle 24"/>
           <p:cNvSpPr/>
           <p:nvPr/>
         </p:nvSpPr>
@@ -11644,11 +11898,11 @@
             </a:avLst>
           </a:prstGeom>
           <a:solidFill>
-            <a:srgbClr val="F2F6F8"/>
+            <a:srgbClr val="061A38"/>
           </a:solidFill>
           <a:ln w="9525">
             <a:solidFill>
-              <a:srgbClr val="F2F6F8"/>
+              <a:srgbClr val="1A4272"/>
             </a:solidFill>
           </a:ln>
           <a:effectLst/>
@@ -11677,7 +11931,7 @@
       </p:sp>
       <p:sp>
         <p:nvSpPr>
-          <p:cNvPr id="25" name="Rounded Rectangle 24"/>
+          <p:cNvPr id="26" name="Rounded Rectangle 25"/>
           <p:cNvSpPr/>
           <p:nvPr/>
         </p:nvSpPr>
@@ -11692,12 +11946,10 @@
             </a:avLst>
           </a:prstGeom>
           <a:solidFill>
-            <a:srgbClr val="D98B2B"/>
+            <a:srgbClr val="7FFFE0"/>
           </a:solidFill>
-          <a:ln w="9525">
-            <a:solidFill>
-              <a:srgbClr val="D98B2B"/>
-            </a:solidFill>
+          <a:ln>
+            <a:noFill/>
           </a:ln>
           <a:effectLst/>
         </p:spPr>
@@ -11725,7 +11977,7 @@
       </p:sp>
       <p:sp>
         <p:nvSpPr>
-          <p:cNvPr id="26" name="TextBox 25"/>
+          <p:cNvPr id="27" name="TextBox 26"/>
           <p:cNvSpPr txBox="1"/>
           <p:nvPr/>
         </p:nvSpPr>
@@ -11749,7 +12001,7 @@
             <a:r>
               <a:rPr sz="1050" b="1">
                 <a:solidFill>
-                  <a:srgbClr val="D98B2B"/>
+                  <a:srgbClr val="7FFFE0"/>
                 </a:solidFill>
                 <a:latin typeface="微软雅黑"/>
                 <a:ea typeface="微软雅黑"/>
@@ -11762,7 +12014,7 @@
       </p:sp>
       <p:sp>
         <p:nvSpPr>
-          <p:cNvPr id="27" name="TextBox 26"/>
+          <p:cNvPr id="28" name="TextBox 27"/>
           <p:cNvSpPr txBox="1"/>
           <p:nvPr/>
         </p:nvSpPr>
@@ -11786,7 +12038,7 @@
             <a:r>
               <a:rPr sz="1900" b="1">
                 <a:solidFill>
-                  <a:srgbClr val="0B1F2A"/>
+                  <a:srgbClr val="ECF7FF"/>
                 </a:solidFill>
                 <a:latin typeface="微软雅黑"/>
                 <a:ea typeface="微软雅黑"/>
@@ -11799,7 +12051,7 @@
       </p:sp>
       <p:sp>
         <p:nvSpPr>
-          <p:cNvPr id="28" name="TextBox 27"/>
+          <p:cNvPr id="29" name="TextBox 28"/>
           <p:cNvSpPr txBox="1"/>
           <p:nvPr/>
         </p:nvSpPr>
@@ -11823,7 +12075,7 @@
             <a:r>
               <a:rPr sz="1150" b="0">
                 <a:solidFill>
-                  <a:srgbClr val="6B7C85"/>
+                  <a:srgbClr val="7E9EC4"/>
                 </a:solidFill>
                 <a:latin typeface="微软雅黑"/>
                 <a:ea typeface="微软雅黑"/>
@@ -11836,7 +12088,7 @@
       </p:sp>
       <p:sp>
         <p:nvSpPr>
-          <p:cNvPr id="29" name="TextBox 28"/>
+          <p:cNvPr id="30" name="TextBox 29"/>
           <p:cNvSpPr txBox="1"/>
           <p:nvPr/>
         </p:nvSpPr>
@@ -11867,7 +12119,7 @@
             <a:r>
               <a:rPr sz="1100" b="0">
                 <a:solidFill>
-                  <a:srgbClr val="3D4C55"/>
+                  <a:srgbClr val="BBD4EC"/>
                 </a:solidFill>
                 <a:latin typeface="微软雅黑"/>
                 <a:ea typeface="微软雅黑"/>
@@ -11888,7 +12140,7 @@
             <a:r>
               <a:rPr sz="1100" b="0">
                 <a:solidFill>
-                  <a:srgbClr val="3D4C55"/>
+                  <a:srgbClr val="BBD4EC"/>
                 </a:solidFill>
                 <a:latin typeface="微软雅黑"/>
                 <a:ea typeface="微软雅黑"/>
@@ -11909,7 +12161,7 @@
             <a:r>
               <a:rPr sz="1100" b="0">
                 <a:solidFill>
-                  <a:srgbClr val="3D4C55"/>
+                  <a:srgbClr val="BBD4EC"/>
                 </a:solidFill>
                 <a:latin typeface="微软雅黑"/>
                 <a:ea typeface="微软雅黑"/>
@@ -11922,7 +12174,7 @@
       </p:sp>
       <p:sp>
         <p:nvSpPr>
-          <p:cNvPr id="30" name="Rounded Rectangle 29"/>
+          <p:cNvPr id="31" name="Rounded Rectangle 30"/>
           <p:cNvSpPr/>
           <p:nvPr/>
         </p:nvSpPr>
@@ -11937,11 +12189,11 @@
             </a:avLst>
           </a:prstGeom>
           <a:solidFill>
-            <a:srgbClr val="FFFFFF"/>
+            <a:srgbClr val="04122B"/>
           </a:solidFill>
           <a:ln w="9525">
             <a:solidFill>
-              <a:srgbClr val="FFFFFF"/>
+              <a:srgbClr val="1A4272"/>
             </a:solidFill>
           </a:ln>
           <a:effectLst/>
@@ -11970,7 +12222,7 @@
       </p:sp>
       <p:sp>
         <p:nvSpPr>
-          <p:cNvPr id="31" name="TextBox 30"/>
+          <p:cNvPr id="32" name="TextBox 31"/>
           <p:cNvSpPr txBox="1"/>
           <p:nvPr/>
         </p:nvSpPr>
@@ -11998,7 +12250,7 @@
             <a:r>
               <a:rPr sz="1000" b="0">
                 <a:solidFill>
-                  <a:srgbClr val="027C8C"/>
+                  <a:srgbClr val="5CC8FF"/>
                 </a:solidFill>
                 <a:latin typeface="微软雅黑"/>
                 <a:ea typeface="微软雅黑"/>
@@ -12036,18 +12288,16 @@
         <p:spPr>
           <a:xfrm>
             <a:off x="0" y="0"/>
-            <a:ext cx="146304" cy="6858000"/>
+            <a:ext cx="12191695" cy="6858000"/>
           </a:xfrm>
           <a:prstGeom prst="rect">
             <a:avLst/>
           </a:prstGeom>
           <a:solidFill>
-            <a:srgbClr val="027C8C"/>
+            <a:srgbClr val="04122B"/>
           </a:solidFill>
-          <a:ln w="9525">
-            <a:solidFill>
-              <a:srgbClr val="027C8C"/>
-            </a:solidFill>
+          <a:ln>
+            <a:noFill/>
           </a:ln>
           <a:effectLst/>
         </p:spPr>
@@ -12075,7 +12325,51 @@
       </p:sp>
       <p:sp>
         <p:nvSpPr>
-          <p:cNvPr id="3" name="TextBox 2"/>
+          <p:cNvPr id="3" name="Rectangle 2"/>
+          <p:cNvSpPr/>
+          <p:nvPr/>
+        </p:nvSpPr>
+        <p:spPr>
+          <a:xfrm>
+            <a:off x="0" y="0"/>
+            <a:ext cx="146304" cy="6858000"/>
+          </a:xfrm>
+          <a:prstGeom prst="rect">
+            <a:avLst/>
+          </a:prstGeom>
+          <a:solidFill>
+            <a:srgbClr val="7FE3FF"/>
+          </a:solidFill>
+          <a:ln>
+            <a:noFill/>
+          </a:ln>
+          <a:effectLst/>
+        </p:spPr>
+        <p:style>
+          <a:lnRef idx="1">
+            <a:schemeClr val="accent1"/>
+          </a:lnRef>
+          <a:fillRef idx="3">
+            <a:schemeClr val="accent1"/>
+          </a:fillRef>
+          <a:effectRef idx="2">
+            <a:schemeClr val="accent1"/>
+          </a:effectRef>
+          <a:fontRef idx="minor">
+            <a:schemeClr val="lt1"/>
+          </a:fontRef>
+        </p:style>
+        <p:txBody>
+          <a:bodyPr rtlCol="0" anchor="ctr"/>
+          <a:lstStyle/>
+          <a:p>
+            <a:pPr algn="ctr"/>
+          </a:p>
+        </p:txBody>
+      </p:sp>
+      <p:sp>
+        <p:nvSpPr>
+          <p:cNvPr id="4" name="TextBox 3"/>
           <p:cNvSpPr txBox="1"/>
           <p:nvPr/>
         </p:nvSpPr>
@@ -12099,7 +12393,7 @@
             <a:r>
               <a:rPr sz="1150" b="1">
                 <a:solidFill>
-                  <a:srgbClr val="027C8C"/>
+                  <a:srgbClr val="5CC8FF"/>
                 </a:solidFill>
                 <a:latin typeface="微软雅黑"/>
                 <a:ea typeface="微软雅黑"/>
@@ -12112,7 +12406,7 @@
       </p:sp>
       <p:sp>
         <p:nvSpPr>
-          <p:cNvPr id="4" name="TextBox 3"/>
+          <p:cNvPr id="5" name="TextBox 4"/>
           <p:cNvSpPr txBox="1"/>
           <p:nvPr/>
         </p:nvSpPr>
@@ -12136,7 +12430,7 @@
             <a:r>
               <a:rPr sz="2700" b="1">
                 <a:solidFill>
-                  <a:srgbClr val="0B1F2A"/>
+                  <a:srgbClr val="ECF7FF"/>
                 </a:solidFill>
                 <a:latin typeface="微软雅黑"/>
                 <a:ea typeface="微软雅黑"/>
@@ -12149,7 +12443,7 @@
       </p:sp>
       <p:sp>
         <p:nvSpPr>
-          <p:cNvPr id="5" name="TextBox 4"/>
+          <p:cNvPr id="6" name="TextBox 5"/>
           <p:cNvSpPr txBox="1"/>
           <p:nvPr/>
         </p:nvSpPr>
@@ -12177,7 +12471,7 @@
             <a:r>
               <a:rPr sz="1250" b="0">
                 <a:solidFill>
-                  <a:srgbClr val="3D4C55"/>
+                  <a:srgbClr val="BBD4EC"/>
                 </a:solidFill>
                 <a:latin typeface="微软雅黑"/>
                 <a:ea typeface="微软雅黑"/>
@@ -12190,7 +12484,7 @@
       </p:sp>
       <p:sp>
         <p:nvSpPr>
-          <p:cNvPr id="6" name="TextBox 5"/>
+          <p:cNvPr id="7" name="TextBox 6"/>
           <p:cNvSpPr txBox="1"/>
           <p:nvPr/>
         </p:nvSpPr>
@@ -12214,7 +12508,7 @@
             <a:r>
               <a:rPr sz="950" b="0">
                 <a:solidFill>
-                  <a:srgbClr val="6B7C85"/>
+                  <a:srgbClr val="7E9EC4"/>
                 </a:solidFill>
                 <a:latin typeface="微软雅黑"/>
                 <a:ea typeface="微软雅黑"/>
@@ -12227,7 +12521,7 @@
       </p:sp>
       <p:sp>
         <p:nvSpPr>
-          <p:cNvPr id="7" name="TextBox 6"/>
+          <p:cNvPr id="8" name="TextBox 7"/>
           <p:cNvSpPr txBox="1"/>
           <p:nvPr/>
         </p:nvSpPr>
@@ -12251,7 +12545,7 @@
             <a:r>
               <a:rPr sz="950" b="0">
                 <a:solidFill>
-                  <a:srgbClr val="6B7C85"/>
+                  <a:srgbClr val="7E9EC4"/>
                 </a:solidFill>
                 <a:latin typeface="微软雅黑"/>
                 <a:ea typeface="微软雅黑"/>
@@ -12264,7 +12558,7 @@
       </p:sp>
       <p:sp>
         <p:nvSpPr>
-          <p:cNvPr id="8" name="Rounded Rectangle 7"/>
+          <p:cNvPr id="9" name="Rounded Rectangle 8"/>
           <p:cNvSpPr/>
           <p:nvPr/>
         </p:nvSpPr>
@@ -12279,11 +12573,11 @@
             </a:avLst>
           </a:prstGeom>
           <a:solidFill>
-            <a:srgbClr val="E8F1F3"/>
+            <a:srgbClr val="0C2C54"/>
           </a:solidFill>
           <a:ln w="9525">
             <a:solidFill>
-              <a:srgbClr val="E8F1F3"/>
+              <a:srgbClr val="1A4272"/>
             </a:solidFill>
           </a:ln>
           <a:effectLst/>
@@ -12312,7 +12606,7 @@
       </p:sp>
       <p:sp>
         <p:nvSpPr>
-          <p:cNvPr id="9" name="TextBox 8"/>
+          <p:cNvPr id="10" name="TextBox 9"/>
           <p:cNvSpPr txBox="1"/>
           <p:nvPr/>
         </p:nvSpPr>
@@ -12336,7 +12630,7 @@
             <a:r>
               <a:rPr sz="1250" b="1">
                 <a:solidFill>
-                  <a:srgbClr val="0B1F2A"/>
+                  <a:srgbClr val="ECF7FF"/>
                 </a:solidFill>
                 <a:latin typeface="微软雅黑"/>
                 <a:ea typeface="微软雅黑"/>
@@ -12349,7 +12643,7 @@
       </p:sp>
       <p:sp>
         <p:nvSpPr>
-          <p:cNvPr id="10" name="Rounded Rectangle 9"/>
+          <p:cNvPr id="11" name="Rounded Rectangle 10"/>
           <p:cNvSpPr/>
           <p:nvPr/>
         </p:nvSpPr>
@@ -12364,11 +12658,11 @@
             </a:avLst>
           </a:prstGeom>
           <a:solidFill>
-            <a:srgbClr val="F2F6F8"/>
+            <a:srgbClr val="061A38"/>
           </a:solidFill>
           <a:ln w="9525">
             <a:solidFill>
-              <a:srgbClr val="F2F6F8"/>
+              <a:srgbClr val="1A4272"/>
             </a:solidFill>
           </a:ln>
           <a:effectLst/>
@@ -12397,7 +12691,7 @@
       </p:sp>
       <p:sp>
         <p:nvSpPr>
-          <p:cNvPr id="11" name="Rectangle 10"/>
+          <p:cNvPr id="12" name="Rectangle 11"/>
           <p:cNvSpPr/>
           <p:nvPr/>
         </p:nvSpPr>
@@ -12410,12 +12704,10 @@
             <a:avLst/>
           </a:prstGeom>
           <a:solidFill>
-            <a:srgbClr val="027C8C"/>
+            <a:srgbClr val="5CC8FF"/>
           </a:solidFill>
-          <a:ln w="9525">
-            <a:solidFill>
-              <a:srgbClr val="027C8C"/>
-            </a:solidFill>
+          <a:ln>
+            <a:noFill/>
           </a:ln>
           <a:effectLst/>
         </p:spPr>
@@ -12443,7 +12735,7 @@
       </p:sp>
       <p:sp>
         <p:nvSpPr>
-          <p:cNvPr id="12" name="TextBox 11"/>
+          <p:cNvPr id="13" name="TextBox 12"/>
           <p:cNvSpPr txBox="1"/>
           <p:nvPr/>
         </p:nvSpPr>
@@ -12467,7 +12759,7 @@
             <a:r>
               <a:rPr sz="1250" b="1">
                 <a:solidFill>
-                  <a:srgbClr val="0B1F2A"/>
+                  <a:srgbClr val="ECF7FF"/>
                 </a:solidFill>
                 <a:latin typeface="微软雅黑"/>
                 <a:ea typeface="微软雅黑"/>
@@ -12480,7 +12772,7 @@
       </p:sp>
       <p:sp>
         <p:nvSpPr>
-          <p:cNvPr id="13" name="TextBox 12"/>
+          <p:cNvPr id="14" name="TextBox 13"/>
           <p:cNvSpPr txBox="1"/>
           <p:nvPr/>
         </p:nvSpPr>
@@ -12508,7 +12800,7 @@
             <a:r>
               <a:rPr sz="1000" b="0">
                 <a:solidFill>
-                  <a:srgbClr val="3D4C55"/>
+                  <a:srgbClr val="BBD4EC"/>
                 </a:solidFill>
                 <a:latin typeface="微软雅黑"/>
                 <a:ea typeface="微软雅黑"/>
@@ -12521,7 +12813,7 @@
       </p:sp>
       <p:sp>
         <p:nvSpPr>
-          <p:cNvPr id="14" name="Rounded Rectangle 13"/>
+          <p:cNvPr id="15" name="Rounded Rectangle 14"/>
           <p:cNvSpPr/>
           <p:nvPr/>
         </p:nvSpPr>
@@ -12536,11 +12828,11 @@
             </a:avLst>
           </a:prstGeom>
           <a:solidFill>
-            <a:srgbClr val="F2F6F8"/>
+            <a:srgbClr val="061A38"/>
           </a:solidFill>
           <a:ln w="9525">
             <a:solidFill>
-              <a:srgbClr val="F2F6F8"/>
+              <a:srgbClr val="1A4272"/>
             </a:solidFill>
           </a:ln>
           <a:effectLst/>
@@ -12569,7 +12861,7 @@
       </p:sp>
       <p:sp>
         <p:nvSpPr>
-          <p:cNvPr id="15" name="Rectangle 14"/>
+          <p:cNvPr id="16" name="Rectangle 15"/>
           <p:cNvSpPr/>
           <p:nvPr/>
         </p:nvSpPr>
@@ -12582,12 +12874,10 @@
             <a:avLst/>
           </a:prstGeom>
           <a:solidFill>
-            <a:srgbClr val="027C8C"/>
+            <a:srgbClr val="5CC8FF"/>
           </a:solidFill>
-          <a:ln w="9525">
-            <a:solidFill>
-              <a:srgbClr val="027C8C"/>
-            </a:solidFill>
+          <a:ln>
+            <a:noFill/>
           </a:ln>
           <a:effectLst/>
         </p:spPr>
@@ -12615,7 +12905,7 @@
       </p:sp>
       <p:sp>
         <p:nvSpPr>
-          <p:cNvPr id="16" name="TextBox 15"/>
+          <p:cNvPr id="17" name="TextBox 16"/>
           <p:cNvSpPr txBox="1"/>
           <p:nvPr/>
         </p:nvSpPr>
@@ -12639,7 +12929,7 @@
             <a:r>
               <a:rPr sz="1250" b="1">
                 <a:solidFill>
-                  <a:srgbClr val="0B1F2A"/>
+                  <a:srgbClr val="ECF7FF"/>
                 </a:solidFill>
                 <a:latin typeface="微软雅黑"/>
                 <a:ea typeface="微软雅黑"/>
@@ -12652,7 +12942,7 @@
       </p:sp>
       <p:sp>
         <p:nvSpPr>
-          <p:cNvPr id="17" name="TextBox 16"/>
+          <p:cNvPr id="18" name="TextBox 17"/>
           <p:cNvSpPr txBox="1"/>
           <p:nvPr/>
         </p:nvSpPr>
@@ -12680,7 +12970,7 @@
             <a:r>
               <a:rPr sz="1000" b="0">
                 <a:solidFill>
-                  <a:srgbClr val="3D4C55"/>
+                  <a:srgbClr val="BBD4EC"/>
                 </a:solidFill>
                 <a:latin typeface="微软雅黑"/>
                 <a:ea typeface="微软雅黑"/>
@@ -12693,7 +12983,7 @@
       </p:sp>
       <p:sp>
         <p:nvSpPr>
-          <p:cNvPr id="18" name="Rounded Rectangle 17"/>
+          <p:cNvPr id="19" name="Rounded Rectangle 18"/>
           <p:cNvSpPr/>
           <p:nvPr/>
         </p:nvSpPr>
@@ -12708,11 +12998,11 @@
             </a:avLst>
           </a:prstGeom>
           <a:solidFill>
-            <a:srgbClr val="F2F6F8"/>
+            <a:srgbClr val="061A38"/>
           </a:solidFill>
           <a:ln w="9525">
             <a:solidFill>
-              <a:srgbClr val="F2F6F8"/>
+              <a:srgbClr val="1A4272"/>
             </a:solidFill>
           </a:ln>
           <a:effectLst/>
@@ -12741,7 +13031,7 @@
       </p:sp>
       <p:sp>
         <p:nvSpPr>
-          <p:cNvPr id="19" name="Rectangle 18"/>
+          <p:cNvPr id="20" name="Rectangle 19"/>
           <p:cNvSpPr/>
           <p:nvPr/>
         </p:nvSpPr>
@@ -12754,12 +13044,10 @@
             <a:avLst/>
           </a:prstGeom>
           <a:solidFill>
-            <a:srgbClr val="027C8C"/>
+            <a:srgbClr val="5CC8FF"/>
           </a:solidFill>
-          <a:ln w="9525">
-            <a:solidFill>
-              <a:srgbClr val="027C8C"/>
-            </a:solidFill>
+          <a:ln>
+            <a:noFill/>
           </a:ln>
           <a:effectLst/>
         </p:spPr>
@@ -12787,7 +13075,7 @@
       </p:sp>
       <p:sp>
         <p:nvSpPr>
-          <p:cNvPr id="20" name="TextBox 19"/>
+          <p:cNvPr id="21" name="TextBox 20"/>
           <p:cNvSpPr txBox="1"/>
           <p:nvPr/>
         </p:nvSpPr>
@@ -12811,7 +13099,7 @@
             <a:r>
               <a:rPr sz="1250" b="1">
                 <a:solidFill>
-                  <a:srgbClr val="0B1F2A"/>
+                  <a:srgbClr val="ECF7FF"/>
                 </a:solidFill>
                 <a:latin typeface="微软雅黑"/>
                 <a:ea typeface="微软雅黑"/>
@@ -12824,7 +13112,7 @@
       </p:sp>
       <p:sp>
         <p:nvSpPr>
-          <p:cNvPr id="21" name="TextBox 20"/>
+          <p:cNvPr id="22" name="TextBox 21"/>
           <p:cNvSpPr txBox="1"/>
           <p:nvPr/>
         </p:nvSpPr>
@@ -12852,7 +13140,7 @@
             <a:r>
               <a:rPr sz="1000" b="0">
                 <a:solidFill>
-                  <a:srgbClr val="3D4C55"/>
+                  <a:srgbClr val="BBD4EC"/>
                 </a:solidFill>
                 <a:latin typeface="微软雅黑"/>
                 <a:ea typeface="微软雅黑"/>
@@ -12865,7 +13153,7 @@
       </p:sp>
       <p:sp>
         <p:nvSpPr>
-          <p:cNvPr id="22" name="Rounded Rectangle 21"/>
+          <p:cNvPr id="23" name="Rounded Rectangle 22"/>
           <p:cNvSpPr/>
           <p:nvPr/>
         </p:nvSpPr>
@@ -12880,11 +13168,11 @@
             </a:avLst>
           </a:prstGeom>
           <a:solidFill>
-            <a:srgbClr val="F2F6F8"/>
+            <a:srgbClr val="061A38"/>
           </a:solidFill>
           <a:ln w="9525">
             <a:solidFill>
-              <a:srgbClr val="F2F6F8"/>
+              <a:srgbClr val="1A4272"/>
             </a:solidFill>
           </a:ln>
           <a:effectLst/>
@@ -12913,7 +13201,7 @@
       </p:sp>
       <p:sp>
         <p:nvSpPr>
-          <p:cNvPr id="23" name="Rectangle 22"/>
+          <p:cNvPr id="24" name="Rectangle 23"/>
           <p:cNvSpPr/>
           <p:nvPr/>
         </p:nvSpPr>
@@ -12926,12 +13214,10 @@
             <a:avLst/>
           </a:prstGeom>
           <a:solidFill>
-            <a:srgbClr val="027C8C"/>
+            <a:srgbClr val="5CC8FF"/>
           </a:solidFill>
-          <a:ln w="9525">
-            <a:solidFill>
-              <a:srgbClr val="027C8C"/>
-            </a:solidFill>
+          <a:ln>
+            <a:noFill/>
           </a:ln>
           <a:effectLst/>
         </p:spPr>
@@ -12959,7 +13245,7 @@
       </p:sp>
       <p:sp>
         <p:nvSpPr>
-          <p:cNvPr id="24" name="TextBox 23"/>
+          <p:cNvPr id="25" name="TextBox 24"/>
           <p:cNvSpPr txBox="1"/>
           <p:nvPr/>
         </p:nvSpPr>
@@ -12983,7 +13269,7 @@
             <a:r>
               <a:rPr sz="1250" b="1">
                 <a:solidFill>
-                  <a:srgbClr val="0B1F2A"/>
+                  <a:srgbClr val="ECF7FF"/>
                 </a:solidFill>
                 <a:latin typeface="微软雅黑"/>
                 <a:ea typeface="微软雅黑"/>
@@ -12996,7 +13282,7 @@
       </p:sp>
       <p:sp>
         <p:nvSpPr>
-          <p:cNvPr id="25" name="TextBox 24"/>
+          <p:cNvPr id="26" name="TextBox 25"/>
           <p:cNvSpPr txBox="1"/>
           <p:nvPr/>
         </p:nvSpPr>
@@ -13024,7 +13310,7 @@
             <a:r>
               <a:rPr sz="1000" b="0">
                 <a:solidFill>
-                  <a:srgbClr val="3D4C55"/>
+                  <a:srgbClr val="BBD4EC"/>
                 </a:solidFill>
                 <a:latin typeface="微软雅黑"/>
                 <a:ea typeface="微软雅黑"/>
@@ -13037,7 +13323,7 @@
       </p:sp>
       <p:sp>
         <p:nvSpPr>
-          <p:cNvPr id="26" name="Rounded Rectangle 25"/>
+          <p:cNvPr id="27" name="Rounded Rectangle 26"/>
           <p:cNvSpPr/>
           <p:nvPr/>
         </p:nvSpPr>
@@ -13052,11 +13338,11 @@
             </a:avLst>
           </a:prstGeom>
           <a:solidFill>
-            <a:srgbClr val="E8F1F3"/>
+            <a:srgbClr val="0C2C54"/>
           </a:solidFill>
           <a:ln w="9525">
             <a:solidFill>
-              <a:srgbClr val="E8F1F3"/>
+              <a:srgbClr val="1A4272"/>
             </a:solidFill>
           </a:ln>
           <a:effectLst/>
@@ -13085,7 +13371,7 @@
       </p:sp>
       <p:sp>
         <p:nvSpPr>
-          <p:cNvPr id="27" name="TextBox 26"/>
+          <p:cNvPr id="28" name="TextBox 27"/>
           <p:cNvSpPr txBox="1"/>
           <p:nvPr/>
         </p:nvSpPr>
@@ -13109,7 +13395,7 @@
             <a:r>
               <a:rPr sz="1250" b="1">
                 <a:solidFill>
-                  <a:srgbClr val="0B1F2A"/>
+                  <a:srgbClr val="ECF7FF"/>
                 </a:solidFill>
                 <a:latin typeface="微软雅黑"/>
                 <a:ea typeface="微软雅黑"/>
@@ -13122,7 +13408,7 @@
       </p:sp>
       <p:sp>
         <p:nvSpPr>
-          <p:cNvPr id="28" name="Rounded Rectangle 27"/>
+          <p:cNvPr id="29" name="Rounded Rectangle 28"/>
           <p:cNvSpPr/>
           <p:nvPr/>
         </p:nvSpPr>
@@ -13137,11 +13423,11 @@
             </a:avLst>
           </a:prstGeom>
           <a:solidFill>
-            <a:srgbClr val="F2F6F8"/>
+            <a:srgbClr val="061A38"/>
           </a:solidFill>
           <a:ln w="9525">
             <a:solidFill>
-              <a:srgbClr val="F2F6F8"/>
+              <a:srgbClr val="1A4272"/>
             </a:solidFill>
           </a:ln>
           <a:effectLst/>
@@ -13170,7 +13456,7 @@
       </p:sp>
       <p:sp>
         <p:nvSpPr>
-          <p:cNvPr id="29" name="Rectangle 28"/>
+          <p:cNvPr id="30" name="Rectangle 29"/>
           <p:cNvSpPr/>
           <p:nvPr/>
         </p:nvSpPr>
@@ -13183,12 +13469,10 @@
             <a:avLst/>
           </a:prstGeom>
           <a:solidFill>
-            <a:srgbClr val="02B08A"/>
+            <a:srgbClr val="7FE3FF"/>
           </a:solidFill>
-          <a:ln w="9525">
-            <a:solidFill>
-              <a:srgbClr val="02B08A"/>
-            </a:solidFill>
+          <a:ln>
+            <a:noFill/>
           </a:ln>
           <a:effectLst/>
         </p:spPr>
@@ -13216,7 +13500,7 @@
       </p:sp>
       <p:sp>
         <p:nvSpPr>
-          <p:cNvPr id="30" name="TextBox 29"/>
+          <p:cNvPr id="31" name="TextBox 30"/>
           <p:cNvSpPr txBox="1"/>
           <p:nvPr/>
         </p:nvSpPr>
@@ -13240,7 +13524,7 @@
             <a:r>
               <a:rPr sz="1250" b="1">
                 <a:solidFill>
-                  <a:srgbClr val="0B1F2A"/>
+                  <a:srgbClr val="ECF7FF"/>
                 </a:solidFill>
                 <a:latin typeface="微软雅黑"/>
                 <a:ea typeface="微软雅黑"/>
@@ -13253,7 +13537,7 @@
       </p:sp>
       <p:sp>
         <p:nvSpPr>
-          <p:cNvPr id="31" name="TextBox 30"/>
+          <p:cNvPr id="32" name="TextBox 31"/>
           <p:cNvSpPr txBox="1"/>
           <p:nvPr/>
         </p:nvSpPr>
@@ -13281,7 +13565,7 @@
             <a:r>
               <a:rPr sz="1000" b="0">
                 <a:solidFill>
-                  <a:srgbClr val="3D4C55"/>
+                  <a:srgbClr val="BBD4EC"/>
                 </a:solidFill>
                 <a:latin typeface="微软雅黑"/>
                 <a:ea typeface="微软雅黑"/>
@@ -13294,7 +13578,7 @@
       </p:sp>
       <p:sp>
         <p:nvSpPr>
-          <p:cNvPr id="32" name="Rounded Rectangle 31"/>
+          <p:cNvPr id="33" name="Rounded Rectangle 32"/>
           <p:cNvSpPr/>
           <p:nvPr/>
         </p:nvSpPr>
@@ -13309,11 +13593,11 @@
             </a:avLst>
           </a:prstGeom>
           <a:solidFill>
-            <a:srgbClr val="F2F6F8"/>
+            <a:srgbClr val="061A38"/>
           </a:solidFill>
           <a:ln w="9525">
             <a:solidFill>
-              <a:srgbClr val="F2F6F8"/>
+              <a:srgbClr val="1A4272"/>
             </a:solidFill>
           </a:ln>
           <a:effectLst/>
@@ -13342,7 +13626,7 @@
       </p:sp>
       <p:sp>
         <p:nvSpPr>
-          <p:cNvPr id="33" name="Rectangle 32"/>
+          <p:cNvPr id="34" name="Rectangle 33"/>
           <p:cNvSpPr/>
           <p:nvPr/>
         </p:nvSpPr>
@@ -13355,12 +13639,10 @@
             <a:avLst/>
           </a:prstGeom>
           <a:solidFill>
-            <a:srgbClr val="02B08A"/>
+            <a:srgbClr val="7FE3FF"/>
           </a:solidFill>
-          <a:ln w="9525">
-            <a:solidFill>
-              <a:srgbClr val="02B08A"/>
-            </a:solidFill>
+          <a:ln>
+            <a:noFill/>
           </a:ln>
           <a:effectLst/>
         </p:spPr>
@@ -13388,7 +13670,7 @@
       </p:sp>
       <p:sp>
         <p:nvSpPr>
-          <p:cNvPr id="34" name="TextBox 33"/>
+          <p:cNvPr id="35" name="TextBox 34"/>
           <p:cNvSpPr txBox="1"/>
           <p:nvPr/>
         </p:nvSpPr>
@@ -13412,7 +13694,7 @@
             <a:r>
               <a:rPr sz="1250" b="1">
                 <a:solidFill>
-                  <a:srgbClr val="0B1F2A"/>
+                  <a:srgbClr val="ECF7FF"/>
                 </a:solidFill>
                 <a:latin typeface="微软雅黑"/>
                 <a:ea typeface="微软雅黑"/>
@@ -13425,7 +13707,7 @@
       </p:sp>
       <p:sp>
         <p:nvSpPr>
-          <p:cNvPr id="35" name="TextBox 34"/>
+          <p:cNvPr id="36" name="TextBox 35"/>
           <p:cNvSpPr txBox="1"/>
           <p:nvPr/>
         </p:nvSpPr>
@@ -13453,7 +13735,7 @@
             <a:r>
               <a:rPr sz="1000" b="0">
                 <a:solidFill>
-                  <a:srgbClr val="3D4C55"/>
+                  <a:srgbClr val="BBD4EC"/>
                 </a:solidFill>
                 <a:latin typeface="微软雅黑"/>
                 <a:ea typeface="微软雅黑"/>
@@ -13466,7 +13748,7 @@
       </p:sp>
       <p:sp>
         <p:nvSpPr>
-          <p:cNvPr id="36" name="Rounded Rectangle 35"/>
+          <p:cNvPr id="37" name="Rounded Rectangle 36"/>
           <p:cNvSpPr/>
           <p:nvPr/>
         </p:nvSpPr>
@@ -13481,11 +13763,11 @@
             </a:avLst>
           </a:prstGeom>
           <a:solidFill>
-            <a:srgbClr val="E8F1F3"/>
+            <a:srgbClr val="0C2C54"/>
           </a:solidFill>
           <a:ln w="9525">
             <a:solidFill>
-              <a:srgbClr val="E8F1F3"/>
+              <a:srgbClr val="1A4272"/>
             </a:solidFill>
           </a:ln>
           <a:effectLst/>
@@ -13514,7 +13796,7 @@
       </p:sp>
       <p:sp>
         <p:nvSpPr>
-          <p:cNvPr id="37" name="TextBox 36"/>
+          <p:cNvPr id="38" name="TextBox 37"/>
           <p:cNvSpPr txBox="1"/>
           <p:nvPr/>
         </p:nvSpPr>
@@ -13538,7 +13820,7 @@
             <a:r>
               <a:rPr sz="1250" b="1">
                 <a:solidFill>
-                  <a:srgbClr val="0B1F2A"/>
+                  <a:srgbClr val="ECF7FF"/>
                 </a:solidFill>
                 <a:latin typeface="微软雅黑"/>
                 <a:ea typeface="微软雅黑"/>
@@ -13551,7 +13833,7 @@
       </p:sp>
       <p:sp>
         <p:nvSpPr>
-          <p:cNvPr id="38" name="Rounded Rectangle 37"/>
+          <p:cNvPr id="39" name="Rounded Rectangle 38"/>
           <p:cNvSpPr/>
           <p:nvPr/>
         </p:nvSpPr>
@@ -13566,11 +13848,11 @@
             </a:avLst>
           </a:prstGeom>
           <a:solidFill>
-            <a:srgbClr val="F2F6F8"/>
+            <a:srgbClr val="061A38"/>
           </a:solidFill>
           <a:ln w="9525">
             <a:solidFill>
-              <a:srgbClr val="F2F6F8"/>
+              <a:srgbClr val="1A4272"/>
             </a:solidFill>
           </a:ln>
           <a:effectLst/>
@@ -13599,7 +13881,7 @@
       </p:sp>
       <p:sp>
         <p:nvSpPr>
-          <p:cNvPr id="39" name="Rectangle 38"/>
+          <p:cNvPr id="40" name="Rectangle 39"/>
           <p:cNvSpPr/>
           <p:nvPr/>
         </p:nvSpPr>
@@ -13612,12 +13894,10 @@
             <a:avLst/>
           </a:prstGeom>
           <a:solidFill>
-            <a:srgbClr val="D98B2B"/>
+            <a:srgbClr val="7FFFE0"/>
           </a:solidFill>
-          <a:ln w="9525">
-            <a:solidFill>
-              <a:srgbClr val="D98B2B"/>
-            </a:solidFill>
+          <a:ln>
+            <a:noFill/>
           </a:ln>
           <a:effectLst/>
         </p:spPr>
@@ -13645,7 +13925,7 @@
       </p:sp>
       <p:sp>
         <p:nvSpPr>
-          <p:cNvPr id="40" name="TextBox 39"/>
+          <p:cNvPr id="41" name="TextBox 40"/>
           <p:cNvSpPr txBox="1"/>
           <p:nvPr/>
         </p:nvSpPr>
@@ -13669,7 +13949,7 @@
             <a:r>
               <a:rPr sz="1250" b="1">
                 <a:solidFill>
-                  <a:srgbClr val="0B1F2A"/>
+                  <a:srgbClr val="ECF7FF"/>
                 </a:solidFill>
                 <a:latin typeface="微软雅黑"/>
                 <a:ea typeface="微软雅黑"/>
@@ -13682,7 +13962,7 @@
       </p:sp>
       <p:sp>
         <p:nvSpPr>
-          <p:cNvPr id="41" name="TextBox 40"/>
+          <p:cNvPr id="42" name="TextBox 41"/>
           <p:cNvSpPr txBox="1"/>
           <p:nvPr/>
         </p:nvSpPr>
@@ -13710,7 +13990,7 @@
             <a:r>
               <a:rPr sz="1000" b="0">
                 <a:solidFill>
-                  <a:srgbClr val="3D4C55"/>
+                  <a:srgbClr val="BBD4EC"/>
                 </a:solidFill>
                 <a:latin typeface="微软雅黑"/>
                 <a:ea typeface="微软雅黑"/>
@@ -13723,7 +14003,7 @@
       </p:sp>
       <p:sp>
         <p:nvSpPr>
-          <p:cNvPr id="42" name="Rounded Rectangle 41"/>
+          <p:cNvPr id="43" name="Rounded Rectangle 42"/>
           <p:cNvSpPr/>
           <p:nvPr/>
         </p:nvSpPr>
@@ -13738,11 +14018,11 @@
             </a:avLst>
           </a:prstGeom>
           <a:solidFill>
-            <a:srgbClr val="F2F6F8"/>
+            <a:srgbClr val="061A38"/>
           </a:solidFill>
           <a:ln w="9525">
             <a:solidFill>
-              <a:srgbClr val="F2F6F8"/>
+              <a:srgbClr val="1A4272"/>
             </a:solidFill>
           </a:ln>
           <a:effectLst/>
@@ -13771,7 +14051,7 @@
       </p:sp>
       <p:sp>
         <p:nvSpPr>
-          <p:cNvPr id="43" name="Rectangle 42"/>
+          <p:cNvPr id="44" name="Rectangle 43"/>
           <p:cNvSpPr/>
           <p:nvPr/>
         </p:nvSpPr>
@@ -13784,12 +14064,10 @@
             <a:avLst/>
           </a:prstGeom>
           <a:solidFill>
-            <a:srgbClr val="D98B2B"/>
+            <a:srgbClr val="7FFFE0"/>
           </a:solidFill>
-          <a:ln w="9525">
-            <a:solidFill>
-              <a:srgbClr val="D98B2B"/>
-            </a:solidFill>
+          <a:ln>
+            <a:noFill/>
           </a:ln>
           <a:effectLst/>
         </p:spPr>
@@ -13817,7 +14095,7 @@
       </p:sp>
       <p:sp>
         <p:nvSpPr>
-          <p:cNvPr id="44" name="TextBox 43"/>
+          <p:cNvPr id="45" name="TextBox 44"/>
           <p:cNvSpPr txBox="1"/>
           <p:nvPr/>
         </p:nvSpPr>
@@ -13841,7 +14119,7 @@
             <a:r>
               <a:rPr sz="1250" b="1">
                 <a:solidFill>
-                  <a:srgbClr val="0B1F2A"/>
+                  <a:srgbClr val="ECF7FF"/>
                 </a:solidFill>
                 <a:latin typeface="微软雅黑"/>
                 <a:ea typeface="微软雅黑"/>
@@ -13854,7 +14132,7 @@
       </p:sp>
       <p:sp>
         <p:nvSpPr>
-          <p:cNvPr id="45" name="TextBox 44"/>
+          <p:cNvPr id="46" name="TextBox 45"/>
           <p:cNvSpPr txBox="1"/>
           <p:nvPr/>
         </p:nvSpPr>
@@ -13882,7 +14160,7 @@
             <a:r>
               <a:rPr sz="1000" b="0">
                 <a:solidFill>
-                  <a:srgbClr val="3D4C55"/>
+                  <a:srgbClr val="BBD4EC"/>
                 </a:solidFill>
                 <a:latin typeface="微软雅黑"/>
                 <a:ea typeface="微软雅黑"/>
@@ -13895,7 +14173,7 @@
       </p:sp>
       <p:sp>
         <p:nvSpPr>
-          <p:cNvPr id="46" name="Rounded Rectangle 45"/>
+          <p:cNvPr id="47" name="Rounded Rectangle 46"/>
           <p:cNvSpPr/>
           <p:nvPr/>
         </p:nvSpPr>
@@ -13910,11 +14188,11 @@
             </a:avLst>
           </a:prstGeom>
           <a:solidFill>
-            <a:srgbClr val="F2F6F8"/>
+            <a:srgbClr val="061A38"/>
           </a:solidFill>
           <a:ln w="9525">
             <a:solidFill>
-              <a:srgbClr val="F2F6F8"/>
+              <a:srgbClr val="1A4272"/>
             </a:solidFill>
           </a:ln>
           <a:effectLst/>
@@ -13943,7 +14221,7 @@
       </p:sp>
       <p:sp>
         <p:nvSpPr>
-          <p:cNvPr id="47" name="Rectangle 46"/>
+          <p:cNvPr id="48" name="Rectangle 47"/>
           <p:cNvSpPr/>
           <p:nvPr/>
         </p:nvSpPr>
@@ -13956,12 +14234,10 @@
             <a:avLst/>
           </a:prstGeom>
           <a:solidFill>
-            <a:srgbClr val="D98B2B"/>
+            <a:srgbClr val="7FFFE0"/>
           </a:solidFill>
-          <a:ln w="9525">
-            <a:solidFill>
-              <a:srgbClr val="D98B2B"/>
-            </a:solidFill>
+          <a:ln>
+            <a:noFill/>
           </a:ln>
           <a:effectLst/>
         </p:spPr>
@@ -13989,7 +14265,7 @@
       </p:sp>
       <p:sp>
         <p:nvSpPr>
-          <p:cNvPr id="48" name="TextBox 47"/>
+          <p:cNvPr id="49" name="TextBox 48"/>
           <p:cNvSpPr txBox="1"/>
           <p:nvPr/>
         </p:nvSpPr>
@@ -14013,7 +14289,7 @@
             <a:r>
               <a:rPr sz="1250" b="1">
                 <a:solidFill>
-                  <a:srgbClr val="0B1F2A"/>
+                  <a:srgbClr val="ECF7FF"/>
                 </a:solidFill>
                 <a:latin typeface="微软雅黑"/>
                 <a:ea typeface="微软雅黑"/>
@@ -14026,7 +14302,7 @@
       </p:sp>
       <p:sp>
         <p:nvSpPr>
-          <p:cNvPr id="49" name="TextBox 48"/>
+          <p:cNvPr id="50" name="TextBox 49"/>
           <p:cNvSpPr txBox="1"/>
           <p:nvPr/>
         </p:nvSpPr>
@@ -14054,7 +14330,7 @@
             <a:r>
               <a:rPr sz="1000" b="0">
                 <a:solidFill>
-                  <a:srgbClr val="3D4C55"/>
+                  <a:srgbClr val="BBD4EC"/>
                 </a:solidFill>
                 <a:latin typeface="微软雅黑"/>
                 <a:ea typeface="微软雅黑"/>
@@ -14067,7 +14343,7 @@
       </p:sp>
       <p:sp>
         <p:nvSpPr>
-          <p:cNvPr id="50" name="TextBox 49"/>
+          <p:cNvPr id="51" name="TextBox 50"/>
           <p:cNvSpPr txBox="1"/>
           <p:nvPr/>
         </p:nvSpPr>
@@ -14091,7 +14367,7 @@
             <a:r>
               <a:rPr sz="1150" b="1">
                 <a:solidFill>
-                  <a:srgbClr val="D98B2B"/>
+                  <a:srgbClr val="FFC24D"/>
                 </a:solidFill>
                 <a:latin typeface="微软雅黑"/>
                 <a:ea typeface="微软雅黑"/>
@@ -14102,7 +14378,7 @@
             <a:r>
               <a:rPr sz="1150" b="0">
                 <a:solidFill>
-                  <a:srgbClr val="3D4C55"/>
+                  <a:srgbClr val="BBD4EC"/>
                 </a:solidFill>
                 <a:latin typeface="微软雅黑"/>
                 <a:ea typeface="微软雅黑"/>
@@ -14140,18 +14416,16 @@
         <p:spPr>
           <a:xfrm>
             <a:off x="0" y="0"/>
-            <a:ext cx="146304" cy="6858000"/>
+            <a:ext cx="12191695" cy="6858000"/>
           </a:xfrm>
           <a:prstGeom prst="rect">
             <a:avLst/>
           </a:prstGeom>
           <a:solidFill>
-            <a:srgbClr val="027C8C"/>
+            <a:srgbClr val="04122B"/>
           </a:solidFill>
-          <a:ln w="9525">
-            <a:solidFill>
-              <a:srgbClr val="027C8C"/>
-            </a:solidFill>
+          <a:ln>
+            <a:noFill/>
           </a:ln>
           <a:effectLst/>
         </p:spPr>
@@ -14179,7 +14453,51 @@
       </p:sp>
       <p:sp>
         <p:nvSpPr>
-          <p:cNvPr id="3" name="TextBox 2"/>
+          <p:cNvPr id="3" name="Rectangle 2"/>
+          <p:cNvSpPr/>
+          <p:nvPr/>
+        </p:nvSpPr>
+        <p:spPr>
+          <a:xfrm>
+            <a:off x="0" y="0"/>
+            <a:ext cx="146304" cy="6858000"/>
+          </a:xfrm>
+          <a:prstGeom prst="rect">
+            <a:avLst/>
+          </a:prstGeom>
+          <a:solidFill>
+            <a:srgbClr val="7FE3FF"/>
+          </a:solidFill>
+          <a:ln>
+            <a:noFill/>
+          </a:ln>
+          <a:effectLst/>
+        </p:spPr>
+        <p:style>
+          <a:lnRef idx="1">
+            <a:schemeClr val="accent1"/>
+          </a:lnRef>
+          <a:fillRef idx="3">
+            <a:schemeClr val="accent1"/>
+          </a:fillRef>
+          <a:effectRef idx="2">
+            <a:schemeClr val="accent1"/>
+          </a:effectRef>
+          <a:fontRef idx="minor">
+            <a:schemeClr val="lt1"/>
+          </a:fontRef>
+        </p:style>
+        <p:txBody>
+          <a:bodyPr rtlCol="0" anchor="ctr"/>
+          <a:lstStyle/>
+          <a:p>
+            <a:pPr algn="ctr"/>
+          </a:p>
+        </p:txBody>
+      </p:sp>
+      <p:sp>
+        <p:nvSpPr>
+          <p:cNvPr id="4" name="TextBox 3"/>
           <p:cNvSpPr txBox="1"/>
           <p:nvPr/>
         </p:nvSpPr>
@@ -14203,7 +14521,7 @@
             <a:r>
               <a:rPr sz="1150" b="1">
                 <a:solidFill>
-                  <a:srgbClr val="027C8C"/>
+                  <a:srgbClr val="5CC8FF"/>
                 </a:solidFill>
                 <a:latin typeface="微软雅黑"/>
                 <a:ea typeface="微软雅黑"/>
@@ -14216,7 +14534,7 @@
       </p:sp>
       <p:sp>
         <p:nvSpPr>
-          <p:cNvPr id="4" name="TextBox 3"/>
+          <p:cNvPr id="5" name="TextBox 4"/>
           <p:cNvSpPr txBox="1"/>
           <p:nvPr/>
         </p:nvSpPr>
@@ -14240,7 +14558,7 @@
             <a:r>
               <a:rPr sz="2700" b="1">
                 <a:solidFill>
-                  <a:srgbClr val="0B1F2A"/>
+                  <a:srgbClr val="ECF7FF"/>
                 </a:solidFill>
                 <a:latin typeface="微软雅黑"/>
                 <a:ea typeface="微软雅黑"/>
@@ -14253,7 +14571,7 @@
       </p:sp>
       <p:sp>
         <p:nvSpPr>
-          <p:cNvPr id="5" name="TextBox 4"/>
+          <p:cNvPr id="6" name="TextBox 5"/>
           <p:cNvSpPr txBox="1"/>
           <p:nvPr/>
         </p:nvSpPr>
@@ -14281,7 +14599,7 @@
             <a:r>
               <a:rPr sz="1250" b="0">
                 <a:solidFill>
-                  <a:srgbClr val="3D4C55"/>
+                  <a:srgbClr val="BBD4EC"/>
                 </a:solidFill>
                 <a:latin typeface="微软雅黑"/>
                 <a:ea typeface="微软雅黑"/>
@@ -14294,7 +14612,7 @@
       </p:sp>
       <p:sp>
         <p:nvSpPr>
-          <p:cNvPr id="6" name="TextBox 5"/>
+          <p:cNvPr id="7" name="TextBox 6"/>
           <p:cNvSpPr txBox="1"/>
           <p:nvPr/>
         </p:nvSpPr>
@@ -14318,7 +14636,7 @@
             <a:r>
               <a:rPr sz="950" b="0">
                 <a:solidFill>
-                  <a:srgbClr val="6B7C85"/>
+                  <a:srgbClr val="7E9EC4"/>
                 </a:solidFill>
                 <a:latin typeface="微软雅黑"/>
                 <a:ea typeface="微软雅黑"/>
@@ -14331,7 +14649,7 @@
       </p:sp>
       <p:sp>
         <p:nvSpPr>
-          <p:cNvPr id="7" name="TextBox 6"/>
+          <p:cNvPr id="8" name="TextBox 7"/>
           <p:cNvSpPr txBox="1"/>
           <p:nvPr/>
         </p:nvSpPr>
@@ -14355,7 +14673,7 @@
             <a:r>
               <a:rPr sz="950" b="0">
                 <a:solidFill>
-                  <a:srgbClr val="6B7C85"/>
+                  <a:srgbClr val="7E9EC4"/>
                 </a:solidFill>
                 <a:latin typeface="微软雅黑"/>
                 <a:ea typeface="微软雅黑"/>
@@ -14368,7 +14686,7 @@
       </p:sp>
       <p:sp>
         <p:nvSpPr>
-          <p:cNvPr id="8" name="Rounded Rectangle 7"/>
+          <p:cNvPr id="9" name="Rounded Rectangle 8"/>
           <p:cNvSpPr/>
           <p:nvPr/>
         </p:nvSpPr>
@@ -14383,11 +14701,11 @@
             </a:avLst>
           </a:prstGeom>
           <a:solidFill>
-            <a:srgbClr val="F2F6F8"/>
+            <a:srgbClr val="061A38"/>
           </a:solidFill>
           <a:ln w="9525">
             <a:solidFill>
-              <a:srgbClr val="F2F6F8"/>
+              <a:srgbClr val="1A4272"/>
             </a:solidFill>
           </a:ln>
           <a:effectLst/>
@@ -14416,7 +14734,7 @@
       </p:sp>
       <p:sp>
         <p:nvSpPr>
-          <p:cNvPr id="9" name="Oval 8"/>
+          <p:cNvPr id="10" name="Oval 9"/>
           <p:cNvSpPr/>
           <p:nvPr/>
         </p:nvSpPr>
@@ -14429,7 +14747,7 @@
             <a:avLst/>
           </a:prstGeom>
           <a:solidFill>
-            <a:srgbClr val="E8F1F3"/>
+            <a:srgbClr val="0C2C54"/>
           </a:solidFill>
           <a:ln>
             <a:noFill/>
@@ -14458,7 +14776,7 @@
             <a:r>
               <a:rPr sz="1200" b="1">
                 <a:solidFill>
-                  <a:srgbClr val="0B1F2A"/>
+                  <a:srgbClr val="5CC8FF"/>
                 </a:solidFill>
                 <a:latin typeface="微软雅黑"/>
                 <a:ea typeface="微软雅黑"/>
@@ -14471,7 +14789,7 @@
       </p:sp>
       <p:sp>
         <p:nvSpPr>
-          <p:cNvPr id="10" name="TextBox 9"/>
+          <p:cNvPr id="11" name="TextBox 10"/>
           <p:cNvSpPr txBox="1"/>
           <p:nvPr/>
         </p:nvSpPr>
@@ -14495,7 +14813,7 @@
             <a:r>
               <a:rPr sz="1600" b="1">
                 <a:solidFill>
-                  <a:srgbClr val="0B1F2A"/>
+                  <a:srgbClr val="ECF7FF"/>
                 </a:solidFill>
                 <a:latin typeface="微软雅黑"/>
                 <a:ea typeface="微软雅黑"/>
@@ -14508,7 +14826,7 @@
       </p:sp>
       <p:sp>
         <p:nvSpPr>
-          <p:cNvPr id="11" name="TextBox 10"/>
+          <p:cNvPr id="12" name="TextBox 11"/>
           <p:cNvSpPr txBox="1"/>
           <p:nvPr/>
         </p:nvSpPr>
@@ -14532,7 +14850,7 @@
             <a:r>
               <a:rPr sz="1050" b="1">
                 <a:solidFill>
-                  <a:srgbClr val="027C8C"/>
+                  <a:srgbClr val="5CC8FF"/>
                 </a:solidFill>
                 <a:latin typeface="微软雅黑"/>
                 <a:ea typeface="微软雅黑"/>
@@ -14545,7 +14863,7 @@
       </p:sp>
       <p:sp>
         <p:nvSpPr>
-          <p:cNvPr id="12" name="TextBox 11"/>
+          <p:cNvPr id="13" name="TextBox 12"/>
           <p:cNvSpPr txBox="1"/>
           <p:nvPr/>
         </p:nvSpPr>
@@ -14576,7 +14894,7 @@
             <a:r>
               <a:rPr sz="1050" b="0">
                 <a:solidFill>
-                  <a:srgbClr val="3D4C55"/>
+                  <a:srgbClr val="BBD4EC"/>
                 </a:solidFill>
                 <a:latin typeface="微软雅黑"/>
                 <a:ea typeface="微软雅黑"/>
@@ -14597,7 +14915,7 @@
             <a:r>
               <a:rPr sz="1050" b="0">
                 <a:solidFill>
-                  <a:srgbClr val="3D4C55"/>
+                  <a:srgbClr val="BBD4EC"/>
                 </a:solidFill>
                 <a:latin typeface="微软雅黑"/>
                 <a:ea typeface="微软雅黑"/>
@@ -14618,7 +14936,7 @@
             <a:r>
               <a:rPr sz="1050" b="0">
                 <a:solidFill>
-                  <a:srgbClr val="3D4C55"/>
+                  <a:srgbClr val="BBD4EC"/>
                 </a:solidFill>
                 <a:latin typeface="微软雅黑"/>
                 <a:ea typeface="微软雅黑"/>
@@ -14631,7 +14949,7 @@
       </p:sp>
       <p:sp>
         <p:nvSpPr>
-          <p:cNvPr id="13" name="Rounded Rectangle 12"/>
+          <p:cNvPr id="14" name="Rounded Rectangle 13"/>
           <p:cNvSpPr/>
           <p:nvPr/>
         </p:nvSpPr>
@@ -14646,11 +14964,11 @@
             </a:avLst>
           </a:prstGeom>
           <a:solidFill>
-            <a:srgbClr val="F2F6F8"/>
+            <a:srgbClr val="061A38"/>
           </a:solidFill>
           <a:ln w="9525">
             <a:solidFill>
-              <a:srgbClr val="F2F6F8"/>
+              <a:srgbClr val="1A4272"/>
             </a:solidFill>
           </a:ln>
           <a:effectLst/>
@@ -14679,7 +14997,7 @@
       </p:sp>
       <p:sp>
         <p:nvSpPr>
-          <p:cNvPr id="14" name="Oval 13"/>
+          <p:cNvPr id="15" name="Oval 14"/>
           <p:cNvSpPr/>
           <p:nvPr/>
         </p:nvSpPr>
@@ -14692,7 +15010,7 @@
             <a:avLst/>
           </a:prstGeom>
           <a:solidFill>
-            <a:srgbClr val="E8F1F3"/>
+            <a:srgbClr val="0C2C54"/>
           </a:solidFill>
           <a:ln>
             <a:noFill/>
@@ -14721,7 +15039,7 @@
             <a:r>
               <a:rPr sz="1200" b="1">
                 <a:solidFill>
-                  <a:srgbClr val="0B1F2A"/>
+                  <a:srgbClr val="5CC8FF"/>
                 </a:solidFill>
                 <a:latin typeface="微软雅黑"/>
                 <a:ea typeface="微软雅黑"/>
@@ -14734,7 +15052,7 @@
       </p:sp>
       <p:sp>
         <p:nvSpPr>
-          <p:cNvPr id="15" name="TextBox 14"/>
+          <p:cNvPr id="16" name="TextBox 15"/>
           <p:cNvSpPr txBox="1"/>
           <p:nvPr/>
         </p:nvSpPr>
@@ -14758,7 +15076,7 @@
             <a:r>
               <a:rPr sz="1600" b="1">
                 <a:solidFill>
-                  <a:srgbClr val="0B1F2A"/>
+                  <a:srgbClr val="ECF7FF"/>
                 </a:solidFill>
                 <a:latin typeface="微软雅黑"/>
                 <a:ea typeface="微软雅黑"/>
@@ -14771,7 +15089,7 @@
       </p:sp>
       <p:sp>
         <p:nvSpPr>
-          <p:cNvPr id="16" name="TextBox 15"/>
+          <p:cNvPr id="17" name="TextBox 16"/>
           <p:cNvSpPr txBox="1"/>
           <p:nvPr/>
         </p:nvSpPr>
@@ -14795,7 +15113,7 @@
             <a:r>
               <a:rPr sz="1050" b="1">
                 <a:solidFill>
-                  <a:srgbClr val="027C8C"/>
+                  <a:srgbClr val="5CC8FF"/>
                 </a:solidFill>
                 <a:latin typeface="微软雅黑"/>
                 <a:ea typeface="微软雅黑"/>
@@ -14808,7 +15126,7 @@
       </p:sp>
       <p:sp>
         <p:nvSpPr>
-          <p:cNvPr id="17" name="TextBox 16"/>
+          <p:cNvPr id="18" name="TextBox 17"/>
           <p:cNvSpPr txBox="1"/>
           <p:nvPr/>
         </p:nvSpPr>
@@ -14839,7 +15157,7 @@
             <a:r>
               <a:rPr sz="1050" b="0">
                 <a:solidFill>
-                  <a:srgbClr val="3D4C55"/>
+                  <a:srgbClr val="BBD4EC"/>
                 </a:solidFill>
                 <a:latin typeface="微软雅黑"/>
                 <a:ea typeface="微软雅黑"/>
@@ -14860,7 +15178,7 @@
             <a:r>
               <a:rPr sz="1050" b="0">
                 <a:solidFill>
-                  <a:srgbClr val="3D4C55"/>
+                  <a:srgbClr val="BBD4EC"/>
                 </a:solidFill>
                 <a:latin typeface="微软雅黑"/>
                 <a:ea typeface="微软雅黑"/>
@@ -14881,7 +15199,7 @@
             <a:r>
               <a:rPr sz="1050" b="0">
                 <a:solidFill>
-                  <a:srgbClr val="3D4C55"/>
+                  <a:srgbClr val="BBD4EC"/>
                 </a:solidFill>
                 <a:latin typeface="微软雅黑"/>
                 <a:ea typeface="微软雅黑"/>
@@ -14894,7 +15212,7 @@
       </p:sp>
       <p:sp>
         <p:nvSpPr>
-          <p:cNvPr id="18" name="Rounded Rectangle 17"/>
+          <p:cNvPr id="19" name="Rounded Rectangle 18"/>
           <p:cNvSpPr/>
           <p:nvPr/>
         </p:nvSpPr>
@@ -14909,11 +15227,11 @@
             </a:avLst>
           </a:prstGeom>
           <a:solidFill>
-            <a:srgbClr val="F2F6F8"/>
+            <a:srgbClr val="061A38"/>
           </a:solidFill>
           <a:ln w="9525">
             <a:solidFill>
-              <a:srgbClr val="F2F6F8"/>
+              <a:srgbClr val="1A4272"/>
             </a:solidFill>
           </a:ln>
           <a:effectLst/>
@@ -14942,7 +15260,7 @@
       </p:sp>
       <p:sp>
         <p:nvSpPr>
-          <p:cNvPr id="19" name="Oval 18"/>
+          <p:cNvPr id="20" name="Oval 19"/>
           <p:cNvSpPr/>
           <p:nvPr/>
         </p:nvSpPr>
@@ -14955,7 +15273,7 @@
             <a:avLst/>
           </a:prstGeom>
           <a:solidFill>
-            <a:srgbClr val="E8F1F3"/>
+            <a:srgbClr val="0C2C54"/>
           </a:solidFill>
           <a:ln>
             <a:noFill/>
@@ -14984,7 +15302,7 @@
             <a:r>
               <a:rPr sz="1200" b="1">
                 <a:solidFill>
-                  <a:srgbClr val="0B1F2A"/>
+                  <a:srgbClr val="5CC8FF"/>
                 </a:solidFill>
                 <a:latin typeface="微软雅黑"/>
                 <a:ea typeface="微软雅黑"/>
@@ -14997,7 +15315,7 @@
       </p:sp>
       <p:sp>
         <p:nvSpPr>
-          <p:cNvPr id="20" name="TextBox 19"/>
+          <p:cNvPr id="21" name="TextBox 20"/>
           <p:cNvSpPr txBox="1"/>
           <p:nvPr/>
         </p:nvSpPr>
@@ -15021,7 +15339,7 @@
             <a:r>
               <a:rPr sz="1600" b="1">
                 <a:solidFill>
-                  <a:srgbClr val="0B1F2A"/>
+                  <a:srgbClr val="ECF7FF"/>
                 </a:solidFill>
                 <a:latin typeface="微软雅黑"/>
                 <a:ea typeface="微软雅黑"/>
@@ -15034,7 +15352,7 @@
       </p:sp>
       <p:sp>
         <p:nvSpPr>
-          <p:cNvPr id="21" name="TextBox 20"/>
+          <p:cNvPr id="22" name="TextBox 21"/>
           <p:cNvSpPr txBox="1"/>
           <p:nvPr/>
         </p:nvSpPr>
@@ -15058,7 +15376,7 @@
             <a:r>
               <a:rPr sz="1050" b="1">
                 <a:solidFill>
-                  <a:srgbClr val="027C8C"/>
+                  <a:srgbClr val="5CC8FF"/>
                 </a:solidFill>
                 <a:latin typeface="微软雅黑"/>
                 <a:ea typeface="微软雅黑"/>
@@ -15071,7 +15389,7 @@
       </p:sp>
       <p:sp>
         <p:nvSpPr>
-          <p:cNvPr id="22" name="TextBox 21"/>
+          <p:cNvPr id="23" name="TextBox 22"/>
           <p:cNvSpPr txBox="1"/>
           <p:nvPr/>
         </p:nvSpPr>
@@ -15102,7 +15420,7 @@
             <a:r>
               <a:rPr sz="1050" b="0">
                 <a:solidFill>
-                  <a:srgbClr val="3D4C55"/>
+                  <a:srgbClr val="BBD4EC"/>
                 </a:solidFill>
                 <a:latin typeface="微软雅黑"/>
                 <a:ea typeface="微软雅黑"/>
@@ -15123,7 +15441,7 @@
             <a:r>
               <a:rPr sz="1050" b="0">
                 <a:solidFill>
-                  <a:srgbClr val="3D4C55"/>
+                  <a:srgbClr val="BBD4EC"/>
                 </a:solidFill>
                 <a:latin typeface="微软雅黑"/>
                 <a:ea typeface="微软雅黑"/>
@@ -15144,7 +15462,7 @@
             <a:r>
               <a:rPr sz="1050" b="0">
                 <a:solidFill>
-                  <a:srgbClr val="3D4C55"/>
+                  <a:srgbClr val="BBD4EC"/>
                 </a:solidFill>
                 <a:latin typeface="微软雅黑"/>
                 <a:ea typeface="微软雅黑"/>
@@ -15157,7 +15475,7 @@
       </p:sp>
       <p:sp>
         <p:nvSpPr>
-          <p:cNvPr id="23" name="Rounded Rectangle 22"/>
+          <p:cNvPr id="24" name="Rounded Rectangle 23"/>
           <p:cNvSpPr/>
           <p:nvPr/>
         </p:nvSpPr>
@@ -15172,11 +15490,11 @@
             </a:avLst>
           </a:prstGeom>
           <a:solidFill>
-            <a:srgbClr val="F2F6F8"/>
+            <a:srgbClr val="061A38"/>
           </a:solidFill>
           <a:ln w="9525">
             <a:solidFill>
-              <a:srgbClr val="F2F6F8"/>
+              <a:srgbClr val="1A4272"/>
             </a:solidFill>
           </a:ln>
           <a:effectLst/>
@@ -15205,7 +15523,7 @@
       </p:sp>
       <p:sp>
         <p:nvSpPr>
-          <p:cNvPr id="24" name="Oval 23"/>
+          <p:cNvPr id="25" name="Oval 24"/>
           <p:cNvSpPr/>
           <p:nvPr/>
         </p:nvSpPr>
@@ -15218,7 +15536,7 @@
             <a:avLst/>
           </a:prstGeom>
           <a:solidFill>
-            <a:srgbClr val="E8F1F3"/>
+            <a:srgbClr val="0C2C54"/>
           </a:solidFill>
           <a:ln>
             <a:noFill/>
@@ -15247,7 +15565,7 @@
             <a:r>
               <a:rPr sz="1200" b="1">
                 <a:solidFill>
-                  <a:srgbClr val="0B1F2A"/>
+                  <a:srgbClr val="5CC8FF"/>
                 </a:solidFill>
                 <a:latin typeface="微软雅黑"/>
                 <a:ea typeface="微软雅黑"/>
@@ -15260,7 +15578,7 @@
       </p:sp>
       <p:sp>
         <p:nvSpPr>
-          <p:cNvPr id="25" name="TextBox 24"/>
+          <p:cNvPr id="26" name="TextBox 25"/>
           <p:cNvSpPr txBox="1"/>
           <p:nvPr/>
         </p:nvSpPr>
@@ -15284,7 +15602,7 @@
             <a:r>
               <a:rPr sz="1600" b="1">
                 <a:solidFill>
-                  <a:srgbClr val="0B1F2A"/>
+                  <a:srgbClr val="ECF7FF"/>
                 </a:solidFill>
                 <a:latin typeface="微软雅黑"/>
                 <a:ea typeface="微软雅黑"/>
@@ -15297,7 +15615,7 @@
       </p:sp>
       <p:sp>
         <p:nvSpPr>
-          <p:cNvPr id="26" name="TextBox 25"/>
+          <p:cNvPr id="27" name="TextBox 26"/>
           <p:cNvSpPr txBox="1"/>
           <p:nvPr/>
         </p:nvSpPr>
@@ -15321,7 +15639,7 @@
             <a:r>
               <a:rPr sz="1050" b="1">
                 <a:solidFill>
-                  <a:srgbClr val="027C8C"/>
+                  <a:srgbClr val="5CC8FF"/>
                 </a:solidFill>
                 <a:latin typeface="微软雅黑"/>
                 <a:ea typeface="微软雅黑"/>
@@ -15334,7 +15652,7 @@
       </p:sp>
       <p:sp>
         <p:nvSpPr>
-          <p:cNvPr id="27" name="TextBox 26"/>
+          <p:cNvPr id="28" name="TextBox 27"/>
           <p:cNvSpPr txBox="1"/>
           <p:nvPr/>
         </p:nvSpPr>
@@ -15365,7 +15683,7 @@
             <a:r>
               <a:rPr sz="1050" b="0">
                 <a:solidFill>
-                  <a:srgbClr val="3D4C55"/>
+                  <a:srgbClr val="BBD4EC"/>
                 </a:solidFill>
                 <a:latin typeface="微软雅黑"/>
                 <a:ea typeface="微软雅黑"/>
@@ -15386,7 +15704,7 @@
             <a:r>
               <a:rPr sz="1050" b="0">
                 <a:solidFill>
-                  <a:srgbClr val="3D4C55"/>
+                  <a:srgbClr val="BBD4EC"/>
                 </a:solidFill>
                 <a:latin typeface="微软雅黑"/>
                 <a:ea typeface="微软雅黑"/>
@@ -15407,7 +15725,7 @@
             <a:r>
               <a:rPr sz="1050" b="0">
                 <a:solidFill>
-                  <a:srgbClr val="3D4C55"/>
+                  <a:srgbClr val="BBD4EC"/>
                 </a:solidFill>
                 <a:latin typeface="微软雅黑"/>
                 <a:ea typeface="微软雅黑"/>
@@ -15445,18 +15763,16 @@
         <p:spPr>
           <a:xfrm>
             <a:off x="0" y="0"/>
-            <a:ext cx="146304" cy="6858000"/>
+            <a:ext cx="12191695" cy="6858000"/>
           </a:xfrm>
           <a:prstGeom prst="rect">
             <a:avLst/>
           </a:prstGeom>
           <a:solidFill>
-            <a:srgbClr val="027C8C"/>
+            <a:srgbClr val="04122B"/>
           </a:solidFill>
-          <a:ln w="9525">
-            <a:solidFill>
-              <a:srgbClr val="027C8C"/>
-            </a:solidFill>
+          <a:ln>
+            <a:noFill/>
           </a:ln>
           <a:effectLst/>
         </p:spPr>
@@ -15484,7 +15800,51 @@
       </p:sp>
       <p:sp>
         <p:nvSpPr>
-          <p:cNvPr id="3" name="TextBox 2"/>
+          <p:cNvPr id="3" name="Rectangle 2"/>
+          <p:cNvSpPr/>
+          <p:nvPr/>
+        </p:nvSpPr>
+        <p:spPr>
+          <a:xfrm>
+            <a:off x="0" y="0"/>
+            <a:ext cx="146304" cy="6858000"/>
+          </a:xfrm>
+          <a:prstGeom prst="rect">
+            <a:avLst/>
+          </a:prstGeom>
+          <a:solidFill>
+            <a:srgbClr val="7FE3FF"/>
+          </a:solidFill>
+          <a:ln>
+            <a:noFill/>
+          </a:ln>
+          <a:effectLst/>
+        </p:spPr>
+        <p:style>
+          <a:lnRef idx="1">
+            <a:schemeClr val="accent1"/>
+          </a:lnRef>
+          <a:fillRef idx="3">
+            <a:schemeClr val="accent1"/>
+          </a:fillRef>
+          <a:effectRef idx="2">
+            <a:schemeClr val="accent1"/>
+          </a:effectRef>
+          <a:fontRef idx="minor">
+            <a:schemeClr val="lt1"/>
+          </a:fontRef>
+        </p:style>
+        <p:txBody>
+          <a:bodyPr rtlCol="0" anchor="ctr"/>
+          <a:lstStyle/>
+          <a:p>
+            <a:pPr algn="ctr"/>
+          </a:p>
+        </p:txBody>
+      </p:sp>
+      <p:sp>
+        <p:nvSpPr>
+          <p:cNvPr id="4" name="TextBox 3"/>
           <p:cNvSpPr txBox="1"/>
           <p:nvPr/>
         </p:nvSpPr>
@@ -15508,7 +15868,7 @@
             <a:r>
               <a:rPr sz="1150" b="1">
                 <a:solidFill>
-                  <a:srgbClr val="027C8C"/>
+                  <a:srgbClr val="5CC8FF"/>
                 </a:solidFill>
                 <a:latin typeface="微软雅黑"/>
                 <a:ea typeface="微软雅黑"/>
@@ -15521,7 +15881,7 @@
       </p:sp>
       <p:sp>
         <p:nvSpPr>
-          <p:cNvPr id="4" name="TextBox 3"/>
+          <p:cNvPr id="5" name="TextBox 4"/>
           <p:cNvSpPr txBox="1"/>
           <p:nvPr/>
         </p:nvSpPr>
@@ -15545,7 +15905,7 @@
             <a:r>
               <a:rPr sz="2700" b="1">
                 <a:solidFill>
-                  <a:srgbClr val="0B1F2A"/>
+                  <a:srgbClr val="ECF7FF"/>
                 </a:solidFill>
                 <a:latin typeface="微软雅黑"/>
                 <a:ea typeface="微软雅黑"/>
@@ -15558,7 +15918,7 @@
       </p:sp>
       <p:sp>
         <p:nvSpPr>
-          <p:cNvPr id="5" name="TextBox 4"/>
+          <p:cNvPr id="6" name="TextBox 5"/>
           <p:cNvSpPr txBox="1"/>
           <p:nvPr/>
         </p:nvSpPr>
@@ -15586,7 +15946,7 @@
             <a:r>
               <a:rPr sz="1250" b="0">
                 <a:solidFill>
-                  <a:srgbClr val="3D4C55"/>
+                  <a:srgbClr val="BBD4EC"/>
                 </a:solidFill>
                 <a:latin typeface="微软雅黑"/>
                 <a:ea typeface="微软雅黑"/>
@@ -15599,7 +15959,7 @@
       </p:sp>
       <p:sp>
         <p:nvSpPr>
-          <p:cNvPr id="6" name="TextBox 5"/>
+          <p:cNvPr id="7" name="TextBox 6"/>
           <p:cNvSpPr txBox="1"/>
           <p:nvPr/>
         </p:nvSpPr>
@@ -15623,7 +15983,7 @@
             <a:r>
               <a:rPr sz="950" b="0">
                 <a:solidFill>
-                  <a:srgbClr val="6B7C85"/>
+                  <a:srgbClr val="7E9EC4"/>
                 </a:solidFill>
                 <a:latin typeface="微软雅黑"/>
                 <a:ea typeface="微软雅黑"/>
@@ -15636,7 +15996,7 @@
       </p:sp>
       <p:sp>
         <p:nvSpPr>
-          <p:cNvPr id="7" name="TextBox 6"/>
+          <p:cNvPr id="8" name="TextBox 7"/>
           <p:cNvSpPr txBox="1"/>
           <p:nvPr/>
         </p:nvSpPr>
@@ -15660,7 +16020,7 @@
             <a:r>
               <a:rPr sz="950" b="0">
                 <a:solidFill>
-                  <a:srgbClr val="6B7C85"/>
+                  <a:srgbClr val="7E9EC4"/>
                 </a:solidFill>
                 <a:latin typeface="微软雅黑"/>
                 <a:ea typeface="微软雅黑"/>
@@ -15673,7 +16033,7 @@
       </p:sp>
       <p:graphicFrame>
         <p:nvGraphicFramePr>
-          <p:cNvPr id="8" name="Table 7"/>
+          <p:cNvPr id="9" name="Table 8"/>
           <p:cNvGraphicFramePr>
             <a:graphicFrameLocks noGrp="1"/>
           </p:cNvGraphicFramePr>
@@ -15708,7 +16068,7 @@
                       <a:r>
                         <a:rPr sz="1100" b="1">
                           <a:solidFill>
-                            <a:srgbClr val="FFFFFF"/>
+                            <a:srgbClr val="7FE3FF"/>
                           </a:solidFill>
                           <a:latin typeface="微软雅黑"/>
                           <a:ea typeface="微软雅黑"/>
@@ -15720,7 +16080,7 @@
                   </a:txBody>
                   <a:tcPr marL="109728" marR="109728" marT="45720" marB="45720" anchor="ctr">
                     <a:solidFill>
-                      <a:srgbClr val="027C8C"/>
+                      <a:srgbClr val="0C2C54"/>
                     </a:solidFill>
                   </a:tcPr>
                 </a:tc>
@@ -15737,7 +16097,7 @@
                       <a:r>
                         <a:rPr sz="1100" b="1">
                           <a:solidFill>
-                            <a:srgbClr val="FFFFFF"/>
+                            <a:srgbClr val="7FE3FF"/>
                           </a:solidFill>
                           <a:latin typeface="微软雅黑"/>
                           <a:ea typeface="微软雅黑"/>
@@ -15749,7 +16109,7 @@
                   </a:txBody>
                   <a:tcPr marL="109728" marR="109728" marT="45720" marB="45720" anchor="ctr">
                     <a:solidFill>
-                      <a:srgbClr val="027C8C"/>
+                      <a:srgbClr val="0C2C54"/>
                     </a:solidFill>
                   </a:tcPr>
                 </a:tc>
@@ -15766,7 +16126,7 @@
                       <a:r>
                         <a:rPr sz="1100" b="1">
                           <a:solidFill>
-                            <a:srgbClr val="FFFFFF"/>
+                            <a:srgbClr val="7FE3FF"/>
                           </a:solidFill>
                           <a:latin typeface="微软雅黑"/>
                           <a:ea typeface="微软雅黑"/>
@@ -15778,7 +16138,7 @@
                   </a:txBody>
                   <a:tcPr marL="109728" marR="109728" marT="45720" marB="45720" anchor="ctr">
                     <a:solidFill>
-                      <a:srgbClr val="027C8C"/>
+                      <a:srgbClr val="0C2C54"/>
                     </a:solidFill>
                   </a:tcPr>
                 </a:tc>
@@ -15797,7 +16157,7 @@
                       <a:r>
                         <a:rPr sz="1100" b="0">
                           <a:solidFill>
-                            <a:srgbClr val="3D4C55"/>
+                            <a:srgbClr val="BBD4EC"/>
                           </a:solidFill>
                           <a:latin typeface="微软雅黑"/>
                           <a:ea typeface="微软雅黑"/>
@@ -15809,7 +16169,7 @@
                   </a:txBody>
                   <a:tcPr marL="109728" marR="109728" marT="45720" marB="45720" anchor="ctr">
                     <a:solidFill>
-                      <a:srgbClr val="FFFFFF"/>
+                      <a:srgbClr val="061834"/>
                     </a:solidFill>
                   </a:tcPr>
                 </a:tc>
@@ -15826,7 +16186,7 @@
                       <a:r>
                         <a:rPr sz="1100" b="0">
                           <a:solidFill>
-                            <a:srgbClr val="3D4C55"/>
+                            <a:srgbClr val="BBD4EC"/>
                           </a:solidFill>
                           <a:latin typeface="微软雅黑"/>
                           <a:ea typeface="微软雅黑"/>
@@ -15838,7 +16198,7 @@
                   </a:txBody>
                   <a:tcPr marL="109728" marR="109728" marT="45720" marB="45720" anchor="ctr">
                     <a:solidFill>
-                      <a:srgbClr val="FFFFFF"/>
+                      <a:srgbClr val="061834"/>
                     </a:solidFill>
                   </a:tcPr>
                 </a:tc>
@@ -15855,7 +16215,7 @@
                       <a:r>
                         <a:rPr sz="1100" b="0">
                           <a:solidFill>
-                            <a:srgbClr val="3D4C55"/>
+                            <a:srgbClr val="BBD4EC"/>
                           </a:solidFill>
                           <a:latin typeface="微软雅黑"/>
                           <a:ea typeface="微软雅黑"/>
@@ -15867,7 +16227,7 @@
                   </a:txBody>
                   <a:tcPr marL="109728" marR="109728" marT="45720" marB="45720" anchor="ctr">
                     <a:solidFill>
-                      <a:srgbClr val="FFFFFF"/>
+                      <a:srgbClr val="061834"/>
                     </a:solidFill>
                   </a:tcPr>
                 </a:tc>
@@ -15886,7 +16246,7 @@
                       <a:r>
                         <a:rPr sz="1100" b="0">
                           <a:solidFill>
-                            <a:srgbClr val="3D4C55"/>
+                            <a:srgbClr val="BBD4EC"/>
                           </a:solidFill>
                           <a:latin typeface="微软雅黑"/>
                           <a:ea typeface="微软雅黑"/>
@@ -15898,7 +16258,7 @@
                   </a:txBody>
                   <a:tcPr marL="109728" marR="109728" marT="45720" marB="45720" anchor="ctr">
                     <a:solidFill>
-                      <a:srgbClr val="F2F6F8"/>
+                      <a:srgbClr val="092244"/>
                     </a:solidFill>
                   </a:tcPr>
                 </a:tc>
@@ -15915,7 +16275,7 @@
                       <a:r>
                         <a:rPr sz="1100" b="0">
                           <a:solidFill>
-                            <a:srgbClr val="3D4C55"/>
+                            <a:srgbClr val="BBD4EC"/>
                           </a:solidFill>
                           <a:latin typeface="微软雅黑"/>
                           <a:ea typeface="微软雅黑"/>
@@ -15927,7 +16287,7 @@
                   </a:txBody>
                   <a:tcPr marL="109728" marR="109728" marT="45720" marB="45720" anchor="ctr">
                     <a:solidFill>
-                      <a:srgbClr val="F2F6F8"/>
+                      <a:srgbClr val="092244"/>
                     </a:solidFill>
                   </a:tcPr>
                 </a:tc>
@@ -15944,7 +16304,7 @@
                       <a:r>
                         <a:rPr sz="1100" b="0">
                           <a:solidFill>
-                            <a:srgbClr val="3D4C55"/>
+                            <a:srgbClr val="BBD4EC"/>
                           </a:solidFill>
                           <a:latin typeface="微软雅黑"/>
                           <a:ea typeface="微软雅黑"/>
@@ -15956,7 +16316,7 @@
                   </a:txBody>
                   <a:tcPr marL="109728" marR="109728" marT="45720" marB="45720" anchor="ctr">
                     <a:solidFill>
-                      <a:srgbClr val="F2F6F8"/>
+                      <a:srgbClr val="092244"/>
                     </a:solidFill>
                   </a:tcPr>
                 </a:tc>
@@ -15975,7 +16335,7 @@
                       <a:r>
                         <a:rPr sz="1100" b="0">
                           <a:solidFill>
-                            <a:srgbClr val="3D4C55"/>
+                            <a:srgbClr val="BBD4EC"/>
                           </a:solidFill>
                           <a:latin typeface="微软雅黑"/>
                           <a:ea typeface="微软雅黑"/>
@@ -15987,7 +16347,7 @@
                   </a:txBody>
                   <a:tcPr marL="109728" marR="109728" marT="45720" marB="45720" anchor="ctr">
                     <a:solidFill>
-                      <a:srgbClr val="FFFFFF"/>
+                      <a:srgbClr val="061834"/>
                     </a:solidFill>
                   </a:tcPr>
                 </a:tc>
@@ -16004,7 +16364,7 @@
                       <a:r>
                         <a:rPr sz="1100" b="0">
                           <a:solidFill>
-                            <a:srgbClr val="3D4C55"/>
+                            <a:srgbClr val="BBD4EC"/>
                           </a:solidFill>
                           <a:latin typeface="微软雅黑"/>
                           <a:ea typeface="微软雅黑"/>
@@ -16016,7 +16376,7 @@
                   </a:txBody>
                   <a:tcPr marL="109728" marR="109728" marT="45720" marB="45720" anchor="ctr">
                     <a:solidFill>
-                      <a:srgbClr val="FFFFFF"/>
+                      <a:srgbClr val="061834"/>
                     </a:solidFill>
                   </a:tcPr>
                 </a:tc>
@@ -16033,7 +16393,7 @@
                       <a:r>
                         <a:rPr sz="1100" b="0">
                           <a:solidFill>
-                            <a:srgbClr val="3D4C55"/>
+                            <a:srgbClr val="BBD4EC"/>
                           </a:solidFill>
                           <a:latin typeface="微软雅黑"/>
                           <a:ea typeface="微软雅黑"/>
@@ -16045,7 +16405,7 @@
                   </a:txBody>
                   <a:tcPr marL="109728" marR="109728" marT="45720" marB="45720" anchor="ctr">
                     <a:solidFill>
-                      <a:srgbClr val="FFFFFF"/>
+                      <a:srgbClr val="061834"/>
                     </a:solidFill>
                   </a:tcPr>
                 </a:tc>
@@ -16064,7 +16424,7 @@
                       <a:r>
                         <a:rPr sz="1100" b="0">
                           <a:solidFill>
-                            <a:srgbClr val="3D4C55"/>
+                            <a:srgbClr val="BBD4EC"/>
                           </a:solidFill>
                           <a:latin typeface="微软雅黑"/>
                           <a:ea typeface="微软雅黑"/>
@@ -16076,7 +16436,7 @@
                   </a:txBody>
                   <a:tcPr marL="109728" marR="109728" marT="45720" marB="45720" anchor="ctr">
                     <a:solidFill>
-                      <a:srgbClr val="F2F6F8"/>
+                      <a:srgbClr val="092244"/>
                     </a:solidFill>
                   </a:tcPr>
                 </a:tc>
@@ -16093,7 +16453,7 @@
                       <a:r>
                         <a:rPr sz="1100" b="0">
                           <a:solidFill>
-                            <a:srgbClr val="3D4C55"/>
+                            <a:srgbClr val="BBD4EC"/>
                           </a:solidFill>
                           <a:latin typeface="微软雅黑"/>
                           <a:ea typeface="微软雅黑"/>
@@ -16105,7 +16465,7 @@
                   </a:txBody>
                   <a:tcPr marL="109728" marR="109728" marT="45720" marB="45720" anchor="ctr">
                     <a:solidFill>
-                      <a:srgbClr val="F2F6F8"/>
+                      <a:srgbClr val="092244"/>
                     </a:solidFill>
                   </a:tcPr>
                 </a:tc>
@@ -16122,7 +16482,7 @@
                       <a:r>
                         <a:rPr sz="1100" b="0">
                           <a:solidFill>
-                            <a:srgbClr val="3D4C55"/>
+                            <a:srgbClr val="BBD4EC"/>
                           </a:solidFill>
                           <a:latin typeface="微软雅黑"/>
                           <a:ea typeface="微软雅黑"/>
@@ -16134,7 +16494,7 @@
                   </a:txBody>
                   <a:tcPr marL="109728" marR="109728" marT="45720" marB="45720" anchor="ctr">
                     <a:solidFill>
-                      <a:srgbClr val="F2F6F8"/>
+                      <a:srgbClr val="092244"/>
                     </a:solidFill>
                   </a:tcPr>
                 </a:tc>
@@ -16170,18 +16530,16 @@
         <p:spPr>
           <a:xfrm>
             <a:off x="0" y="0"/>
-            <a:ext cx="146304" cy="6858000"/>
+            <a:ext cx="12191695" cy="6858000"/>
           </a:xfrm>
           <a:prstGeom prst="rect">
             <a:avLst/>
           </a:prstGeom>
           <a:solidFill>
-            <a:srgbClr val="027C8C"/>
+            <a:srgbClr val="04122B"/>
           </a:solidFill>
-          <a:ln w="9525">
-            <a:solidFill>
-              <a:srgbClr val="027C8C"/>
-            </a:solidFill>
+          <a:ln>
+            <a:noFill/>
           </a:ln>
           <a:effectLst/>
         </p:spPr>
@@ -16209,7 +16567,51 @@
       </p:sp>
       <p:sp>
         <p:nvSpPr>
-          <p:cNvPr id="3" name="TextBox 2"/>
+          <p:cNvPr id="3" name="Rectangle 2"/>
+          <p:cNvSpPr/>
+          <p:nvPr/>
+        </p:nvSpPr>
+        <p:spPr>
+          <a:xfrm>
+            <a:off x="0" y="0"/>
+            <a:ext cx="146304" cy="6858000"/>
+          </a:xfrm>
+          <a:prstGeom prst="rect">
+            <a:avLst/>
+          </a:prstGeom>
+          <a:solidFill>
+            <a:srgbClr val="7FE3FF"/>
+          </a:solidFill>
+          <a:ln>
+            <a:noFill/>
+          </a:ln>
+          <a:effectLst/>
+        </p:spPr>
+        <p:style>
+          <a:lnRef idx="1">
+            <a:schemeClr val="accent1"/>
+          </a:lnRef>
+          <a:fillRef idx="3">
+            <a:schemeClr val="accent1"/>
+          </a:fillRef>
+          <a:effectRef idx="2">
+            <a:schemeClr val="accent1"/>
+          </a:effectRef>
+          <a:fontRef idx="minor">
+            <a:schemeClr val="lt1"/>
+          </a:fontRef>
+        </p:style>
+        <p:txBody>
+          <a:bodyPr rtlCol="0" anchor="ctr"/>
+          <a:lstStyle/>
+          <a:p>
+            <a:pPr algn="ctr"/>
+          </a:p>
+        </p:txBody>
+      </p:sp>
+      <p:sp>
+        <p:nvSpPr>
+          <p:cNvPr id="4" name="TextBox 3"/>
           <p:cNvSpPr txBox="1"/>
           <p:nvPr/>
         </p:nvSpPr>
@@ -16233,7 +16635,7 @@
             <a:r>
               <a:rPr sz="1150" b="1">
                 <a:solidFill>
-                  <a:srgbClr val="027C8C"/>
+                  <a:srgbClr val="5CC8FF"/>
                 </a:solidFill>
                 <a:latin typeface="微软雅黑"/>
                 <a:ea typeface="微软雅黑"/>
@@ -16246,7 +16648,7 @@
       </p:sp>
       <p:sp>
         <p:nvSpPr>
-          <p:cNvPr id="4" name="TextBox 3"/>
+          <p:cNvPr id="5" name="TextBox 4"/>
           <p:cNvSpPr txBox="1"/>
           <p:nvPr/>
         </p:nvSpPr>
@@ -16270,7 +16672,7 @@
             <a:r>
               <a:rPr sz="2700" b="1">
                 <a:solidFill>
-                  <a:srgbClr val="0B1F2A"/>
+                  <a:srgbClr val="ECF7FF"/>
                 </a:solidFill>
                 <a:latin typeface="微软雅黑"/>
                 <a:ea typeface="微软雅黑"/>
@@ -16283,7 +16685,7 @@
       </p:sp>
       <p:sp>
         <p:nvSpPr>
-          <p:cNvPr id="5" name="TextBox 4"/>
+          <p:cNvPr id="6" name="TextBox 5"/>
           <p:cNvSpPr txBox="1"/>
           <p:nvPr/>
         </p:nvSpPr>
@@ -16311,7 +16713,7 @@
             <a:r>
               <a:rPr sz="1250" b="0">
                 <a:solidFill>
-                  <a:srgbClr val="3D4C55"/>
+                  <a:srgbClr val="BBD4EC"/>
                 </a:solidFill>
                 <a:latin typeface="微软雅黑"/>
                 <a:ea typeface="微软雅黑"/>
@@ -16324,7 +16726,7 @@
       </p:sp>
       <p:sp>
         <p:nvSpPr>
-          <p:cNvPr id="6" name="TextBox 5"/>
+          <p:cNvPr id="7" name="TextBox 6"/>
           <p:cNvSpPr txBox="1"/>
           <p:nvPr/>
         </p:nvSpPr>
@@ -16348,7 +16750,7 @@
             <a:r>
               <a:rPr sz="950" b="0">
                 <a:solidFill>
-                  <a:srgbClr val="6B7C85"/>
+                  <a:srgbClr val="7E9EC4"/>
                 </a:solidFill>
                 <a:latin typeface="微软雅黑"/>
                 <a:ea typeface="微软雅黑"/>
@@ -16361,7 +16763,7 @@
       </p:sp>
       <p:sp>
         <p:nvSpPr>
-          <p:cNvPr id="7" name="TextBox 6"/>
+          <p:cNvPr id="8" name="TextBox 7"/>
           <p:cNvSpPr txBox="1"/>
           <p:nvPr/>
         </p:nvSpPr>
@@ -16385,7 +16787,7 @@
             <a:r>
               <a:rPr sz="950" b="0">
                 <a:solidFill>
-                  <a:srgbClr val="6B7C85"/>
+                  <a:srgbClr val="7E9EC4"/>
                 </a:solidFill>
                 <a:latin typeface="微软雅黑"/>
                 <a:ea typeface="微软雅黑"/>
@@ -16398,7 +16800,7 @@
       </p:sp>
       <p:graphicFrame>
         <p:nvGraphicFramePr>
-          <p:cNvPr id="8" name="Table 7"/>
+          <p:cNvPr id="9" name="Table 8"/>
           <p:cNvGraphicFramePr>
             <a:graphicFrameLocks noGrp="1"/>
           </p:cNvGraphicFramePr>
@@ -16433,7 +16835,7 @@
                       <a:r>
                         <a:rPr sz="1100" b="1">
                           <a:solidFill>
-                            <a:srgbClr val="FFFFFF"/>
+                            <a:srgbClr val="7FE3FF"/>
                           </a:solidFill>
                           <a:latin typeface="微软雅黑"/>
                           <a:ea typeface="微软雅黑"/>
@@ -16445,7 +16847,7 @@
                   </a:txBody>
                   <a:tcPr marL="109728" marR="109728" marT="45720" marB="45720" anchor="ctr">
                     <a:solidFill>
-                      <a:srgbClr val="027C8C"/>
+                      <a:srgbClr val="0C2C54"/>
                     </a:solidFill>
                   </a:tcPr>
                 </a:tc>
@@ -16462,7 +16864,7 @@
                       <a:r>
                         <a:rPr sz="1100" b="1">
                           <a:solidFill>
-                            <a:srgbClr val="FFFFFF"/>
+                            <a:srgbClr val="7FE3FF"/>
                           </a:solidFill>
                           <a:latin typeface="微软雅黑"/>
                           <a:ea typeface="微软雅黑"/>
@@ -16474,7 +16876,7 @@
                   </a:txBody>
                   <a:tcPr marL="109728" marR="109728" marT="45720" marB="45720" anchor="ctr">
                     <a:solidFill>
-                      <a:srgbClr val="027C8C"/>
+                      <a:srgbClr val="0C2C54"/>
                     </a:solidFill>
                   </a:tcPr>
                 </a:tc>
@@ -16491,7 +16893,7 @@
                       <a:r>
                         <a:rPr sz="1100" b="1">
                           <a:solidFill>
-                            <a:srgbClr val="FFFFFF"/>
+                            <a:srgbClr val="7FE3FF"/>
                           </a:solidFill>
                           <a:latin typeface="微软雅黑"/>
                           <a:ea typeface="微软雅黑"/>
@@ -16503,7 +16905,7 @@
                   </a:txBody>
                   <a:tcPr marL="109728" marR="109728" marT="45720" marB="45720" anchor="ctr">
                     <a:solidFill>
-                      <a:srgbClr val="027C8C"/>
+                      <a:srgbClr val="0C2C54"/>
                     </a:solidFill>
                   </a:tcPr>
                 </a:tc>
@@ -16522,7 +16924,7 @@
                       <a:r>
                         <a:rPr sz="1050" b="0">
                           <a:solidFill>
-                            <a:srgbClr val="3D4C55"/>
+                            <a:srgbClr val="BBD4EC"/>
                           </a:solidFill>
                           <a:latin typeface="微软雅黑"/>
                           <a:ea typeface="微软雅黑"/>
@@ -16534,7 +16936,7 @@
                   </a:txBody>
                   <a:tcPr marL="109728" marR="109728" marT="45720" marB="45720" anchor="ctr">
                     <a:solidFill>
-                      <a:srgbClr val="FFFFFF"/>
+                      <a:srgbClr val="061834"/>
                     </a:solidFill>
                   </a:tcPr>
                 </a:tc>
@@ -16551,7 +16953,7 @@
                       <a:r>
                         <a:rPr sz="1050" b="0">
                           <a:solidFill>
-                            <a:srgbClr val="3D4C55"/>
+                            <a:srgbClr val="BBD4EC"/>
                           </a:solidFill>
                           <a:latin typeface="微软雅黑"/>
                           <a:ea typeface="微软雅黑"/>
@@ -16563,7 +16965,7 @@
                   </a:txBody>
                   <a:tcPr marL="109728" marR="109728" marT="45720" marB="45720" anchor="ctr">
                     <a:solidFill>
-                      <a:srgbClr val="FFFFFF"/>
+                      <a:srgbClr val="061834"/>
                     </a:solidFill>
                   </a:tcPr>
                 </a:tc>
@@ -16580,7 +16982,7 @@
                       <a:r>
                         <a:rPr sz="1050" b="0">
                           <a:solidFill>
-                            <a:srgbClr val="3D4C55"/>
+                            <a:srgbClr val="BBD4EC"/>
                           </a:solidFill>
                           <a:latin typeface="微软雅黑"/>
                           <a:ea typeface="微软雅黑"/>
@@ -16592,7 +16994,7 @@
                   </a:txBody>
                   <a:tcPr marL="109728" marR="109728" marT="45720" marB="45720" anchor="ctr">
                     <a:solidFill>
-                      <a:srgbClr val="FFFFFF"/>
+                      <a:srgbClr val="061834"/>
                     </a:solidFill>
                   </a:tcPr>
                 </a:tc>
@@ -16611,7 +17013,7 @@
                       <a:r>
                         <a:rPr sz="1050" b="0">
                           <a:solidFill>
-                            <a:srgbClr val="3D4C55"/>
+                            <a:srgbClr val="BBD4EC"/>
                           </a:solidFill>
                           <a:latin typeface="微软雅黑"/>
                           <a:ea typeface="微软雅黑"/>
@@ -16623,7 +17025,7 @@
                   </a:txBody>
                   <a:tcPr marL="109728" marR="109728" marT="45720" marB="45720" anchor="ctr">
                     <a:solidFill>
-                      <a:srgbClr val="F2F6F8"/>
+                      <a:srgbClr val="092244"/>
                     </a:solidFill>
                   </a:tcPr>
                 </a:tc>
@@ -16640,7 +17042,7 @@
                       <a:r>
                         <a:rPr sz="1050" b="0">
                           <a:solidFill>
-                            <a:srgbClr val="3D4C55"/>
+                            <a:srgbClr val="BBD4EC"/>
                           </a:solidFill>
                           <a:latin typeface="微软雅黑"/>
                           <a:ea typeface="微软雅黑"/>
@@ -16652,7 +17054,7 @@
                   </a:txBody>
                   <a:tcPr marL="109728" marR="109728" marT="45720" marB="45720" anchor="ctr">
                     <a:solidFill>
-                      <a:srgbClr val="F2F6F8"/>
+                      <a:srgbClr val="092244"/>
                     </a:solidFill>
                   </a:tcPr>
                 </a:tc>
@@ -16669,7 +17071,7 @@
                       <a:r>
                         <a:rPr sz="1050" b="0">
                           <a:solidFill>
-                            <a:srgbClr val="3D4C55"/>
+                            <a:srgbClr val="BBD4EC"/>
                           </a:solidFill>
                           <a:latin typeface="微软雅黑"/>
                           <a:ea typeface="微软雅黑"/>
@@ -16681,7 +17083,7 @@
                   </a:txBody>
                   <a:tcPr marL="109728" marR="109728" marT="45720" marB="45720" anchor="ctr">
                     <a:solidFill>
-                      <a:srgbClr val="F2F6F8"/>
+                      <a:srgbClr val="092244"/>
                     </a:solidFill>
                   </a:tcPr>
                 </a:tc>
@@ -16700,7 +17102,7 @@
                       <a:r>
                         <a:rPr sz="1050" b="0">
                           <a:solidFill>
-                            <a:srgbClr val="3D4C55"/>
+                            <a:srgbClr val="BBD4EC"/>
                           </a:solidFill>
                           <a:latin typeface="微软雅黑"/>
                           <a:ea typeface="微软雅黑"/>
@@ -16712,7 +17114,7 @@
                   </a:txBody>
                   <a:tcPr marL="109728" marR="109728" marT="45720" marB="45720" anchor="ctr">
                     <a:solidFill>
-                      <a:srgbClr val="FFFFFF"/>
+                      <a:srgbClr val="061834"/>
                     </a:solidFill>
                   </a:tcPr>
                 </a:tc>
@@ -16729,7 +17131,7 @@
                       <a:r>
                         <a:rPr sz="1050" b="0">
                           <a:solidFill>
-                            <a:srgbClr val="3D4C55"/>
+                            <a:srgbClr val="BBD4EC"/>
                           </a:solidFill>
                           <a:latin typeface="微软雅黑"/>
                           <a:ea typeface="微软雅黑"/>
@@ -16741,7 +17143,7 @@
                   </a:txBody>
                   <a:tcPr marL="109728" marR="109728" marT="45720" marB="45720" anchor="ctr">
                     <a:solidFill>
-                      <a:srgbClr val="FFFFFF"/>
+                      <a:srgbClr val="061834"/>
                     </a:solidFill>
                   </a:tcPr>
                 </a:tc>
@@ -16758,7 +17160,7 @@
                       <a:r>
                         <a:rPr sz="1050" b="0">
                           <a:solidFill>
-                            <a:srgbClr val="3D4C55"/>
+                            <a:srgbClr val="BBD4EC"/>
                           </a:solidFill>
                           <a:latin typeface="微软雅黑"/>
                           <a:ea typeface="微软雅黑"/>
@@ -16770,7 +17172,7 @@
                   </a:txBody>
                   <a:tcPr marL="109728" marR="109728" marT="45720" marB="45720" anchor="ctr">
                     <a:solidFill>
-                      <a:srgbClr val="FFFFFF"/>
+                      <a:srgbClr val="061834"/>
                     </a:solidFill>
                   </a:tcPr>
                 </a:tc>
@@ -16789,7 +17191,7 @@
                       <a:r>
                         <a:rPr sz="1050" b="0">
                           <a:solidFill>
-                            <a:srgbClr val="3D4C55"/>
+                            <a:srgbClr val="BBD4EC"/>
                           </a:solidFill>
                           <a:latin typeface="微软雅黑"/>
                           <a:ea typeface="微软雅黑"/>
@@ -16801,7 +17203,7 @@
                   </a:txBody>
                   <a:tcPr marL="109728" marR="109728" marT="45720" marB="45720" anchor="ctr">
                     <a:solidFill>
-                      <a:srgbClr val="F2F6F8"/>
+                      <a:srgbClr val="092244"/>
                     </a:solidFill>
                   </a:tcPr>
                 </a:tc>
@@ -16818,7 +17220,7 @@
                       <a:r>
                         <a:rPr sz="1050" b="0">
                           <a:solidFill>
-                            <a:srgbClr val="3D4C55"/>
+                            <a:srgbClr val="BBD4EC"/>
                           </a:solidFill>
                           <a:latin typeface="微软雅黑"/>
                           <a:ea typeface="微软雅黑"/>
@@ -16830,7 +17232,7 @@
                   </a:txBody>
                   <a:tcPr marL="109728" marR="109728" marT="45720" marB="45720" anchor="ctr">
                     <a:solidFill>
-                      <a:srgbClr val="F2F6F8"/>
+                      <a:srgbClr val="092244"/>
                     </a:solidFill>
                   </a:tcPr>
                 </a:tc>
@@ -16847,7 +17249,7 @@
                       <a:r>
                         <a:rPr sz="1050" b="0">
                           <a:solidFill>
-                            <a:srgbClr val="3D4C55"/>
+                            <a:srgbClr val="BBD4EC"/>
                           </a:solidFill>
                           <a:latin typeface="微软雅黑"/>
                           <a:ea typeface="微软雅黑"/>
@@ -16859,7 +17261,7 @@
                   </a:txBody>
                   <a:tcPr marL="109728" marR="109728" marT="45720" marB="45720" anchor="ctr">
                     <a:solidFill>
-                      <a:srgbClr val="F2F6F8"/>
+                      <a:srgbClr val="092244"/>
                     </a:solidFill>
                   </a:tcPr>
                 </a:tc>
@@ -16878,7 +17280,7 @@
                       <a:r>
                         <a:rPr sz="1050" b="0">
                           <a:solidFill>
-                            <a:srgbClr val="3D4C55"/>
+                            <a:srgbClr val="BBD4EC"/>
                           </a:solidFill>
                           <a:latin typeface="微软雅黑"/>
                           <a:ea typeface="微软雅黑"/>
@@ -16890,7 +17292,7 @@
                   </a:txBody>
                   <a:tcPr marL="109728" marR="109728" marT="45720" marB="45720" anchor="ctr">
                     <a:solidFill>
-                      <a:srgbClr val="FFFFFF"/>
+                      <a:srgbClr val="061834"/>
                     </a:solidFill>
                   </a:tcPr>
                 </a:tc>
@@ -16907,7 +17309,7 @@
                       <a:r>
                         <a:rPr sz="1050" b="0">
                           <a:solidFill>
-                            <a:srgbClr val="3D4C55"/>
+                            <a:srgbClr val="BBD4EC"/>
                           </a:solidFill>
                           <a:latin typeface="微软雅黑"/>
                           <a:ea typeface="微软雅黑"/>
@@ -16919,7 +17321,7 @@
                   </a:txBody>
                   <a:tcPr marL="109728" marR="109728" marT="45720" marB="45720" anchor="ctr">
                     <a:solidFill>
-                      <a:srgbClr val="FFFFFF"/>
+                      <a:srgbClr val="061834"/>
                     </a:solidFill>
                   </a:tcPr>
                 </a:tc>
@@ -16936,7 +17338,7 @@
                       <a:r>
                         <a:rPr sz="1050" b="0">
                           <a:solidFill>
-                            <a:srgbClr val="3D4C55"/>
+                            <a:srgbClr val="BBD4EC"/>
                           </a:solidFill>
                           <a:latin typeface="微软雅黑"/>
                           <a:ea typeface="微软雅黑"/>
@@ -16948,7 +17350,7 @@
                   </a:txBody>
                   <a:tcPr marL="109728" marR="109728" marT="45720" marB="45720" anchor="ctr">
                     <a:solidFill>
-                      <a:srgbClr val="FFFFFF"/>
+                      <a:srgbClr val="061834"/>
                     </a:solidFill>
                   </a:tcPr>
                 </a:tc>
@@ -16984,18 +17386,16 @@
         <p:spPr>
           <a:xfrm>
             <a:off x="0" y="0"/>
-            <a:ext cx="146304" cy="6858000"/>
+            <a:ext cx="12191695" cy="6858000"/>
           </a:xfrm>
           <a:prstGeom prst="rect">
             <a:avLst/>
           </a:prstGeom>
           <a:solidFill>
-            <a:srgbClr val="027C8C"/>
+            <a:srgbClr val="04122B"/>
           </a:solidFill>
-          <a:ln w="9525">
-            <a:solidFill>
-              <a:srgbClr val="027C8C"/>
-            </a:solidFill>
+          <a:ln>
+            <a:noFill/>
           </a:ln>
           <a:effectLst/>
         </p:spPr>
@@ -17023,7 +17423,51 @@
       </p:sp>
       <p:sp>
         <p:nvSpPr>
-          <p:cNvPr id="3" name="TextBox 2"/>
+          <p:cNvPr id="3" name="Rectangle 2"/>
+          <p:cNvSpPr/>
+          <p:nvPr/>
+        </p:nvSpPr>
+        <p:spPr>
+          <a:xfrm>
+            <a:off x="0" y="0"/>
+            <a:ext cx="146304" cy="6858000"/>
+          </a:xfrm>
+          <a:prstGeom prst="rect">
+            <a:avLst/>
+          </a:prstGeom>
+          <a:solidFill>
+            <a:srgbClr val="7FE3FF"/>
+          </a:solidFill>
+          <a:ln>
+            <a:noFill/>
+          </a:ln>
+          <a:effectLst/>
+        </p:spPr>
+        <p:style>
+          <a:lnRef idx="1">
+            <a:schemeClr val="accent1"/>
+          </a:lnRef>
+          <a:fillRef idx="3">
+            <a:schemeClr val="accent1"/>
+          </a:fillRef>
+          <a:effectRef idx="2">
+            <a:schemeClr val="accent1"/>
+          </a:effectRef>
+          <a:fontRef idx="minor">
+            <a:schemeClr val="lt1"/>
+          </a:fontRef>
+        </p:style>
+        <p:txBody>
+          <a:bodyPr rtlCol="0" anchor="ctr"/>
+          <a:lstStyle/>
+          <a:p>
+            <a:pPr algn="ctr"/>
+          </a:p>
+        </p:txBody>
+      </p:sp>
+      <p:sp>
+        <p:nvSpPr>
+          <p:cNvPr id="4" name="TextBox 3"/>
           <p:cNvSpPr txBox="1"/>
           <p:nvPr/>
         </p:nvSpPr>
@@ -17047,7 +17491,7 @@
             <a:r>
               <a:rPr sz="1150" b="1">
                 <a:solidFill>
-                  <a:srgbClr val="027C8C"/>
+                  <a:srgbClr val="5CC8FF"/>
                 </a:solidFill>
                 <a:latin typeface="微软雅黑"/>
                 <a:ea typeface="微软雅黑"/>
@@ -17060,7 +17504,7 @@
       </p:sp>
       <p:sp>
         <p:nvSpPr>
-          <p:cNvPr id="4" name="TextBox 3"/>
+          <p:cNvPr id="5" name="TextBox 4"/>
           <p:cNvSpPr txBox="1"/>
           <p:nvPr/>
         </p:nvSpPr>
@@ -17084,7 +17528,7 @@
             <a:r>
               <a:rPr sz="2700" b="1">
                 <a:solidFill>
-                  <a:srgbClr val="0B1F2A"/>
+                  <a:srgbClr val="ECF7FF"/>
                 </a:solidFill>
                 <a:latin typeface="微软雅黑"/>
                 <a:ea typeface="微软雅黑"/>
@@ -17097,7 +17541,7 @@
       </p:sp>
       <p:sp>
         <p:nvSpPr>
-          <p:cNvPr id="5" name="TextBox 4"/>
+          <p:cNvPr id="6" name="TextBox 5"/>
           <p:cNvSpPr txBox="1"/>
           <p:nvPr/>
         </p:nvSpPr>
@@ -17125,7 +17569,7 @@
             <a:r>
               <a:rPr sz="1250" b="0">
                 <a:solidFill>
-                  <a:srgbClr val="3D4C55"/>
+                  <a:srgbClr val="BBD4EC"/>
                 </a:solidFill>
                 <a:latin typeface="微软雅黑"/>
                 <a:ea typeface="微软雅黑"/>
@@ -17138,7 +17582,7 @@
       </p:sp>
       <p:sp>
         <p:nvSpPr>
-          <p:cNvPr id="6" name="TextBox 5"/>
+          <p:cNvPr id="7" name="TextBox 6"/>
           <p:cNvSpPr txBox="1"/>
           <p:nvPr/>
         </p:nvSpPr>
@@ -17162,7 +17606,7 @@
             <a:r>
               <a:rPr sz="950" b="0">
                 <a:solidFill>
-                  <a:srgbClr val="6B7C85"/>
+                  <a:srgbClr val="7E9EC4"/>
                 </a:solidFill>
                 <a:latin typeface="微软雅黑"/>
                 <a:ea typeface="微软雅黑"/>
@@ -17175,7 +17619,7 @@
       </p:sp>
       <p:sp>
         <p:nvSpPr>
-          <p:cNvPr id="7" name="TextBox 6"/>
+          <p:cNvPr id="8" name="TextBox 7"/>
           <p:cNvSpPr txBox="1"/>
           <p:nvPr/>
         </p:nvSpPr>
@@ -17199,7 +17643,7 @@
             <a:r>
               <a:rPr sz="950" b="0">
                 <a:solidFill>
-                  <a:srgbClr val="6B7C85"/>
+                  <a:srgbClr val="7E9EC4"/>
                 </a:solidFill>
                 <a:latin typeface="微软雅黑"/>
                 <a:ea typeface="微软雅黑"/>
@@ -17212,7 +17656,7 @@
       </p:sp>
       <p:sp>
         <p:nvSpPr>
-          <p:cNvPr id="8" name="Rounded Rectangle 7"/>
+          <p:cNvPr id="9" name="Rounded Rectangle 8"/>
           <p:cNvSpPr/>
           <p:nvPr/>
         </p:nvSpPr>
@@ -17227,11 +17671,11 @@
             </a:avLst>
           </a:prstGeom>
           <a:solidFill>
-            <a:srgbClr val="F2F6F8"/>
+            <a:srgbClr val="061A38"/>
           </a:solidFill>
           <a:ln w="9525">
             <a:solidFill>
-              <a:srgbClr val="F2F6F8"/>
+              <a:srgbClr val="1A4272"/>
             </a:solidFill>
           </a:ln>
           <a:effectLst/>
@@ -17260,7 +17704,7 @@
       </p:sp>
       <p:sp>
         <p:nvSpPr>
-          <p:cNvPr id="9" name="Oval 8"/>
+          <p:cNvPr id="10" name="Oval 9"/>
           <p:cNvSpPr/>
           <p:nvPr/>
         </p:nvSpPr>
@@ -17273,7 +17717,7 @@
             <a:avLst/>
           </a:prstGeom>
           <a:solidFill>
-            <a:srgbClr val="0B1F2A"/>
+            <a:srgbClr val="7FE3FF"/>
           </a:solidFill>
           <a:ln>
             <a:noFill/>
@@ -17302,7 +17746,7 @@
             <a:r>
               <a:rPr sz="1200" b="1">
                 <a:solidFill>
-                  <a:srgbClr val="FFFFFF"/>
+                  <a:srgbClr val="02091A"/>
                 </a:solidFill>
                 <a:latin typeface="微软雅黑"/>
                 <a:ea typeface="微软雅黑"/>
@@ -17315,7 +17759,7 @@
       </p:sp>
       <p:sp>
         <p:nvSpPr>
-          <p:cNvPr id="10" name="TextBox 9"/>
+          <p:cNvPr id="11" name="TextBox 10"/>
           <p:cNvSpPr txBox="1"/>
           <p:nvPr/>
         </p:nvSpPr>
@@ -17339,7 +17783,7 @@
             <a:r>
               <a:rPr sz="1500" b="1">
                 <a:solidFill>
-                  <a:srgbClr val="0B1F2A"/>
+                  <a:srgbClr val="ECF7FF"/>
                 </a:solidFill>
                 <a:latin typeface="微软雅黑"/>
                 <a:ea typeface="微软雅黑"/>
@@ -17352,7 +17796,7 @@
       </p:sp>
       <p:sp>
         <p:nvSpPr>
-          <p:cNvPr id="11" name="TextBox 10"/>
+          <p:cNvPr id="12" name="TextBox 11"/>
           <p:cNvSpPr txBox="1"/>
           <p:nvPr/>
         </p:nvSpPr>
@@ -17383,7 +17827,7 @@
             <a:r>
               <a:rPr sz="1050" b="0">
                 <a:solidFill>
-                  <a:srgbClr val="3D4C55"/>
+                  <a:srgbClr val="BBD4EC"/>
                 </a:solidFill>
                 <a:latin typeface="微软雅黑"/>
                 <a:ea typeface="微软雅黑"/>
@@ -17404,7 +17848,7 @@
             <a:r>
               <a:rPr sz="1050" b="0">
                 <a:solidFill>
-                  <a:srgbClr val="3D4C55"/>
+                  <a:srgbClr val="BBD4EC"/>
                 </a:solidFill>
                 <a:latin typeface="微软雅黑"/>
                 <a:ea typeface="微软雅黑"/>
@@ -17425,7 +17869,7 @@
             <a:r>
               <a:rPr sz="1050" b="0">
                 <a:solidFill>
-                  <a:srgbClr val="3D4C55"/>
+                  <a:srgbClr val="BBD4EC"/>
                 </a:solidFill>
                 <a:latin typeface="微软雅黑"/>
                 <a:ea typeface="微软雅黑"/>
@@ -17438,7 +17882,7 @@
       </p:sp>
       <p:sp>
         <p:nvSpPr>
-          <p:cNvPr id="12" name="Rounded Rectangle 11"/>
+          <p:cNvPr id="13" name="Rounded Rectangle 12"/>
           <p:cNvSpPr/>
           <p:nvPr/>
         </p:nvSpPr>
@@ -17453,11 +17897,11 @@
             </a:avLst>
           </a:prstGeom>
           <a:solidFill>
-            <a:srgbClr val="E8F1F3"/>
+            <a:srgbClr val="0C2C54"/>
           </a:solidFill>
           <a:ln w="9525">
             <a:solidFill>
-              <a:srgbClr val="E8F1F3"/>
+              <a:srgbClr val="1A4272"/>
             </a:solidFill>
           </a:ln>
           <a:effectLst/>
@@ -17486,7 +17930,7 @@
       </p:sp>
       <p:sp>
         <p:nvSpPr>
-          <p:cNvPr id="13" name="TextBox 12"/>
+          <p:cNvPr id="14" name="TextBox 13"/>
           <p:cNvSpPr txBox="1"/>
           <p:nvPr/>
         </p:nvSpPr>
@@ -17510,7 +17954,7 @@
             <a:r>
               <a:rPr sz="1000" b="1">
                 <a:solidFill>
-                  <a:srgbClr val="027C8C"/>
+                  <a:srgbClr val="7FFFE0"/>
                 </a:solidFill>
                 <a:latin typeface="微软雅黑"/>
                 <a:ea typeface="微软雅黑"/>
@@ -17523,7 +17967,7 @@
       </p:sp>
       <p:sp>
         <p:nvSpPr>
-          <p:cNvPr id="14" name="TextBox 13"/>
+          <p:cNvPr id="15" name="TextBox 14"/>
           <p:cNvSpPr txBox="1"/>
           <p:nvPr/>
         </p:nvSpPr>
@@ -17547,7 +17991,7 @@
             <a:r>
               <a:rPr sz="2000" b="1">
                 <a:solidFill>
-                  <a:srgbClr val="D8E2E7"/>
+                  <a:srgbClr val="2A5A8E"/>
                 </a:solidFill>
                 <a:latin typeface="微软雅黑"/>
                 <a:ea typeface="微软雅黑"/>
@@ -17560,7 +18004,7 @@
       </p:sp>
       <p:sp>
         <p:nvSpPr>
-          <p:cNvPr id="15" name="Rounded Rectangle 14"/>
+          <p:cNvPr id="16" name="Rounded Rectangle 15"/>
           <p:cNvSpPr/>
           <p:nvPr/>
         </p:nvSpPr>
@@ -17575,11 +18019,11 @@
             </a:avLst>
           </a:prstGeom>
           <a:solidFill>
-            <a:srgbClr val="F2F6F8"/>
+            <a:srgbClr val="061A38"/>
           </a:solidFill>
           <a:ln w="9525">
             <a:solidFill>
-              <a:srgbClr val="F2F6F8"/>
+              <a:srgbClr val="1A4272"/>
             </a:solidFill>
           </a:ln>
           <a:effectLst/>
@@ -17608,7 +18052,7 @@
       </p:sp>
       <p:sp>
         <p:nvSpPr>
-          <p:cNvPr id="16" name="Oval 15"/>
+          <p:cNvPr id="17" name="Oval 16"/>
           <p:cNvSpPr/>
           <p:nvPr/>
         </p:nvSpPr>
@@ -17621,7 +18065,7 @@
             <a:avLst/>
           </a:prstGeom>
           <a:solidFill>
-            <a:srgbClr val="0B1F2A"/>
+            <a:srgbClr val="7FE3FF"/>
           </a:solidFill>
           <a:ln>
             <a:noFill/>
@@ -17650,7 +18094,7 @@
             <a:r>
               <a:rPr sz="1200" b="1">
                 <a:solidFill>
-                  <a:srgbClr val="FFFFFF"/>
+                  <a:srgbClr val="02091A"/>
                 </a:solidFill>
                 <a:latin typeface="微软雅黑"/>
                 <a:ea typeface="微软雅黑"/>
@@ -17663,7 +18107,7 @@
       </p:sp>
       <p:sp>
         <p:nvSpPr>
-          <p:cNvPr id="17" name="TextBox 16"/>
+          <p:cNvPr id="18" name="TextBox 17"/>
           <p:cNvSpPr txBox="1"/>
           <p:nvPr/>
         </p:nvSpPr>
@@ -17687,7 +18131,7 @@
             <a:r>
               <a:rPr sz="1500" b="1">
                 <a:solidFill>
-                  <a:srgbClr val="0B1F2A"/>
+                  <a:srgbClr val="ECF7FF"/>
                 </a:solidFill>
                 <a:latin typeface="微软雅黑"/>
                 <a:ea typeface="微软雅黑"/>
@@ -17700,7 +18144,7 @@
       </p:sp>
       <p:sp>
         <p:nvSpPr>
-          <p:cNvPr id="18" name="TextBox 17"/>
+          <p:cNvPr id="19" name="TextBox 18"/>
           <p:cNvSpPr txBox="1"/>
           <p:nvPr/>
         </p:nvSpPr>
@@ -17731,7 +18175,7 @@
             <a:r>
               <a:rPr sz="1050" b="0">
                 <a:solidFill>
-                  <a:srgbClr val="3D4C55"/>
+                  <a:srgbClr val="BBD4EC"/>
                 </a:solidFill>
                 <a:latin typeface="微软雅黑"/>
                 <a:ea typeface="微软雅黑"/>
@@ -17752,7 +18196,7 @@
             <a:r>
               <a:rPr sz="1050" b="0">
                 <a:solidFill>
-                  <a:srgbClr val="3D4C55"/>
+                  <a:srgbClr val="BBD4EC"/>
                 </a:solidFill>
                 <a:latin typeface="微软雅黑"/>
                 <a:ea typeface="微软雅黑"/>
@@ -17773,7 +18217,7 @@
             <a:r>
               <a:rPr sz="1050" b="0">
                 <a:solidFill>
-                  <a:srgbClr val="3D4C55"/>
+                  <a:srgbClr val="BBD4EC"/>
                 </a:solidFill>
                 <a:latin typeface="微软雅黑"/>
                 <a:ea typeface="微软雅黑"/>
@@ -17786,7 +18230,7 @@
       </p:sp>
       <p:sp>
         <p:nvSpPr>
-          <p:cNvPr id="19" name="Rounded Rectangle 18"/>
+          <p:cNvPr id="20" name="Rounded Rectangle 19"/>
           <p:cNvSpPr/>
           <p:nvPr/>
         </p:nvSpPr>
@@ -17801,11 +18245,11 @@
             </a:avLst>
           </a:prstGeom>
           <a:solidFill>
-            <a:srgbClr val="E8F1F3"/>
+            <a:srgbClr val="0C2C54"/>
           </a:solidFill>
           <a:ln w="9525">
             <a:solidFill>
-              <a:srgbClr val="E8F1F3"/>
+              <a:srgbClr val="1A4272"/>
             </a:solidFill>
           </a:ln>
           <a:effectLst/>
@@ -17834,7 +18278,7 @@
       </p:sp>
       <p:sp>
         <p:nvSpPr>
-          <p:cNvPr id="20" name="TextBox 19"/>
+          <p:cNvPr id="21" name="TextBox 20"/>
           <p:cNvSpPr txBox="1"/>
           <p:nvPr/>
         </p:nvSpPr>
@@ -17858,7 +18302,7 @@
             <a:r>
               <a:rPr sz="1000" b="1">
                 <a:solidFill>
-                  <a:srgbClr val="027C8C"/>
+                  <a:srgbClr val="7FFFE0"/>
                 </a:solidFill>
                 <a:latin typeface="微软雅黑"/>
                 <a:ea typeface="微软雅黑"/>
@@ -17871,7 +18315,7 @@
       </p:sp>
       <p:sp>
         <p:nvSpPr>
-          <p:cNvPr id="21" name="TextBox 20"/>
+          <p:cNvPr id="22" name="TextBox 21"/>
           <p:cNvSpPr txBox="1"/>
           <p:nvPr/>
         </p:nvSpPr>
@@ -17895,7 +18339,7 @@
             <a:r>
               <a:rPr sz="2000" b="1">
                 <a:solidFill>
-                  <a:srgbClr val="D8E2E7"/>
+                  <a:srgbClr val="2A5A8E"/>
                 </a:solidFill>
                 <a:latin typeface="微软雅黑"/>
                 <a:ea typeface="微软雅黑"/>
@@ -17908,7 +18352,7 @@
       </p:sp>
       <p:sp>
         <p:nvSpPr>
-          <p:cNvPr id="22" name="Rounded Rectangle 21"/>
+          <p:cNvPr id="23" name="Rounded Rectangle 22"/>
           <p:cNvSpPr/>
           <p:nvPr/>
         </p:nvSpPr>
@@ -17923,11 +18367,11 @@
             </a:avLst>
           </a:prstGeom>
           <a:solidFill>
-            <a:srgbClr val="F2F6F8"/>
+            <a:srgbClr val="061A38"/>
           </a:solidFill>
           <a:ln w="9525">
             <a:solidFill>
-              <a:srgbClr val="F2F6F8"/>
+              <a:srgbClr val="1A4272"/>
             </a:solidFill>
           </a:ln>
           <a:effectLst/>
@@ -17956,7 +18400,7 @@
       </p:sp>
       <p:sp>
         <p:nvSpPr>
-          <p:cNvPr id="23" name="Oval 22"/>
+          <p:cNvPr id="24" name="Oval 23"/>
           <p:cNvSpPr/>
           <p:nvPr/>
         </p:nvSpPr>
@@ -17969,7 +18413,7 @@
             <a:avLst/>
           </a:prstGeom>
           <a:solidFill>
-            <a:srgbClr val="0B1F2A"/>
+            <a:srgbClr val="7FE3FF"/>
           </a:solidFill>
           <a:ln>
             <a:noFill/>
@@ -17998,7 +18442,7 @@
             <a:r>
               <a:rPr sz="1200" b="1">
                 <a:solidFill>
-                  <a:srgbClr val="FFFFFF"/>
+                  <a:srgbClr val="02091A"/>
                 </a:solidFill>
                 <a:latin typeface="微软雅黑"/>
                 <a:ea typeface="微软雅黑"/>
@@ -18011,7 +18455,7 @@
       </p:sp>
       <p:sp>
         <p:nvSpPr>
-          <p:cNvPr id="24" name="TextBox 23"/>
+          <p:cNvPr id="25" name="TextBox 24"/>
           <p:cNvSpPr txBox="1"/>
           <p:nvPr/>
         </p:nvSpPr>
@@ -18035,7 +18479,7 @@
             <a:r>
               <a:rPr sz="1500" b="1">
                 <a:solidFill>
-                  <a:srgbClr val="0B1F2A"/>
+                  <a:srgbClr val="ECF7FF"/>
                 </a:solidFill>
                 <a:latin typeface="微软雅黑"/>
                 <a:ea typeface="微软雅黑"/>
@@ -18048,7 +18492,7 @@
       </p:sp>
       <p:sp>
         <p:nvSpPr>
-          <p:cNvPr id="25" name="TextBox 24"/>
+          <p:cNvPr id="26" name="TextBox 25"/>
           <p:cNvSpPr txBox="1"/>
           <p:nvPr/>
         </p:nvSpPr>
@@ -18079,7 +18523,7 @@
             <a:r>
               <a:rPr sz="1050" b="0">
                 <a:solidFill>
-                  <a:srgbClr val="3D4C55"/>
+                  <a:srgbClr val="BBD4EC"/>
                 </a:solidFill>
                 <a:latin typeface="微软雅黑"/>
                 <a:ea typeface="微软雅黑"/>
@@ -18100,7 +18544,7 @@
             <a:r>
               <a:rPr sz="1050" b="0">
                 <a:solidFill>
-                  <a:srgbClr val="3D4C55"/>
+                  <a:srgbClr val="BBD4EC"/>
                 </a:solidFill>
                 <a:latin typeface="微软雅黑"/>
                 <a:ea typeface="微软雅黑"/>
@@ -18121,7 +18565,7 @@
             <a:r>
               <a:rPr sz="1050" b="0">
                 <a:solidFill>
-                  <a:srgbClr val="3D4C55"/>
+                  <a:srgbClr val="BBD4EC"/>
                 </a:solidFill>
                 <a:latin typeface="微软雅黑"/>
                 <a:ea typeface="微软雅黑"/>
@@ -18134,7 +18578,7 @@
       </p:sp>
       <p:sp>
         <p:nvSpPr>
-          <p:cNvPr id="26" name="Rounded Rectangle 25"/>
+          <p:cNvPr id="27" name="Rounded Rectangle 26"/>
           <p:cNvSpPr/>
           <p:nvPr/>
         </p:nvSpPr>
@@ -18149,11 +18593,11 @@
             </a:avLst>
           </a:prstGeom>
           <a:solidFill>
-            <a:srgbClr val="E8F1F3"/>
+            <a:srgbClr val="0C2C54"/>
           </a:solidFill>
           <a:ln w="9525">
             <a:solidFill>
-              <a:srgbClr val="E8F1F3"/>
+              <a:srgbClr val="1A4272"/>
             </a:solidFill>
           </a:ln>
           <a:effectLst/>
@@ -18182,7 +18626,7 @@
       </p:sp>
       <p:sp>
         <p:nvSpPr>
-          <p:cNvPr id="27" name="TextBox 26"/>
+          <p:cNvPr id="28" name="TextBox 27"/>
           <p:cNvSpPr txBox="1"/>
           <p:nvPr/>
         </p:nvSpPr>
@@ -18206,7 +18650,7 @@
             <a:r>
               <a:rPr sz="1000" b="1">
                 <a:solidFill>
-                  <a:srgbClr val="027C8C"/>
+                  <a:srgbClr val="7FFFE0"/>
                 </a:solidFill>
                 <a:latin typeface="微软雅黑"/>
                 <a:ea typeface="微软雅黑"/>
@@ -18219,7 +18663,7 @@
       </p:sp>
       <p:sp>
         <p:nvSpPr>
-          <p:cNvPr id="28" name="TextBox 27"/>
+          <p:cNvPr id="29" name="TextBox 28"/>
           <p:cNvSpPr txBox="1"/>
           <p:nvPr/>
         </p:nvSpPr>
@@ -18243,7 +18687,7 @@
             <a:r>
               <a:rPr sz="2000" b="1">
                 <a:solidFill>
-                  <a:srgbClr val="D8E2E7"/>
+                  <a:srgbClr val="2A5A8E"/>
                 </a:solidFill>
                 <a:latin typeface="微软雅黑"/>
                 <a:ea typeface="微软雅黑"/>
@@ -18256,7 +18700,7 @@
       </p:sp>
       <p:sp>
         <p:nvSpPr>
-          <p:cNvPr id="29" name="Rounded Rectangle 28"/>
+          <p:cNvPr id="30" name="Rounded Rectangle 29"/>
           <p:cNvSpPr/>
           <p:nvPr/>
         </p:nvSpPr>
@@ -18271,11 +18715,11 @@
             </a:avLst>
           </a:prstGeom>
           <a:solidFill>
-            <a:srgbClr val="F2F6F8"/>
+            <a:srgbClr val="061A38"/>
           </a:solidFill>
           <a:ln w="9525">
             <a:solidFill>
-              <a:srgbClr val="F2F6F8"/>
+              <a:srgbClr val="1A4272"/>
             </a:solidFill>
           </a:ln>
           <a:effectLst/>
@@ -18304,7 +18748,7 @@
       </p:sp>
       <p:sp>
         <p:nvSpPr>
-          <p:cNvPr id="30" name="Oval 29"/>
+          <p:cNvPr id="31" name="Oval 30"/>
           <p:cNvSpPr/>
           <p:nvPr/>
         </p:nvSpPr>
@@ -18317,7 +18761,7 @@
             <a:avLst/>
           </a:prstGeom>
           <a:solidFill>
-            <a:srgbClr val="0B1F2A"/>
+            <a:srgbClr val="7FE3FF"/>
           </a:solidFill>
           <a:ln>
             <a:noFill/>
@@ -18346,7 +18790,7 @@
             <a:r>
               <a:rPr sz="1200" b="1">
                 <a:solidFill>
-                  <a:srgbClr val="FFFFFF"/>
+                  <a:srgbClr val="02091A"/>
                 </a:solidFill>
                 <a:latin typeface="微软雅黑"/>
                 <a:ea typeface="微软雅黑"/>
@@ -18359,7 +18803,7 @@
       </p:sp>
       <p:sp>
         <p:nvSpPr>
-          <p:cNvPr id="31" name="TextBox 30"/>
+          <p:cNvPr id="32" name="TextBox 31"/>
           <p:cNvSpPr txBox="1"/>
           <p:nvPr/>
         </p:nvSpPr>
@@ -18383,7 +18827,7 @@
             <a:r>
               <a:rPr sz="1500" b="1">
                 <a:solidFill>
-                  <a:srgbClr val="0B1F2A"/>
+                  <a:srgbClr val="ECF7FF"/>
                 </a:solidFill>
                 <a:latin typeface="微软雅黑"/>
                 <a:ea typeface="微软雅黑"/>
@@ -18396,7 +18840,7 @@
       </p:sp>
       <p:sp>
         <p:nvSpPr>
-          <p:cNvPr id="32" name="TextBox 31"/>
+          <p:cNvPr id="33" name="TextBox 32"/>
           <p:cNvSpPr txBox="1"/>
           <p:nvPr/>
         </p:nvSpPr>
@@ -18427,7 +18871,7 @@
             <a:r>
               <a:rPr sz="1050" b="0">
                 <a:solidFill>
-                  <a:srgbClr val="3D4C55"/>
+                  <a:srgbClr val="BBD4EC"/>
                 </a:solidFill>
                 <a:latin typeface="微软雅黑"/>
                 <a:ea typeface="微软雅黑"/>
@@ -18448,7 +18892,7 @@
             <a:r>
               <a:rPr sz="1050" b="0">
                 <a:solidFill>
-                  <a:srgbClr val="3D4C55"/>
+                  <a:srgbClr val="BBD4EC"/>
                 </a:solidFill>
                 <a:latin typeface="微软雅黑"/>
                 <a:ea typeface="微软雅黑"/>
@@ -18469,7 +18913,7 @@
             <a:r>
               <a:rPr sz="1050" b="0">
                 <a:solidFill>
-                  <a:srgbClr val="3D4C55"/>
+                  <a:srgbClr val="BBD4EC"/>
                 </a:solidFill>
                 <a:latin typeface="微软雅黑"/>
                 <a:ea typeface="微软雅黑"/>
@@ -18482,7 +18926,7 @@
       </p:sp>
       <p:sp>
         <p:nvSpPr>
-          <p:cNvPr id="33" name="Rounded Rectangle 32"/>
+          <p:cNvPr id="34" name="Rounded Rectangle 33"/>
           <p:cNvSpPr/>
           <p:nvPr/>
         </p:nvSpPr>
@@ -18497,11 +18941,11 @@
             </a:avLst>
           </a:prstGeom>
           <a:solidFill>
-            <a:srgbClr val="E8F1F3"/>
+            <a:srgbClr val="0C2C54"/>
           </a:solidFill>
           <a:ln w="9525">
             <a:solidFill>
-              <a:srgbClr val="E8F1F3"/>
+              <a:srgbClr val="1A4272"/>
             </a:solidFill>
           </a:ln>
           <a:effectLst/>
@@ -18530,7 +18974,7 @@
       </p:sp>
       <p:sp>
         <p:nvSpPr>
-          <p:cNvPr id="34" name="TextBox 33"/>
+          <p:cNvPr id="35" name="TextBox 34"/>
           <p:cNvSpPr txBox="1"/>
           <p:nvPr/>
         </p:nvSpPr>
@@ -18554,7 +18998,7 @@
             <a:r>
               <a:rPr sz="1000" b="1">
                 <a:solidFill>
-                  <a:srgbClr val="027C8C"/>
+                  <a:srgbClr val="7FFFE0"/>
                 </a:solidFill>
                 <a:latin typeface="微软雅黑"/>
                 <a:ea typeface="微软雅黑"/>
@@ -18567,7 +19011,7 @@
       </p:sp>
       <p:sp>
         <p:nvSpPr>
-          <p:cNvPr id="35" name="Rounded Rectangle 34"/>
+          <p:cNvPr id="36" name="Rounded Rectangle 35"/>
           <p:cNvSpPr/>
           <p:nvPr/>
         </p:nvSpPr>
@@ -18578,15 +19022,15 @@
           </a:xfrm>
           <a:prstGeom prst="roundRect">
             <a:avLst>
-              <a:gd name="adj" fmla="val 12000"/>
+              <a:gd name="adj" fmla="val 10000"/>
             </a:avLst>
           </a:prstGeom>
           <a:solidFill>
-            <a:srgbClr val="E8F1F3"/>
+            <a:srgbClr val="061A38"/>
           </a:solidFill>
           <a:ln w="9525">
             <a:solidFill>
-              <a:srgbClr val="E8F1F3"/>
+              <a:srgbClr val="1A4272"/>
             </a:solidFill>
           </a:ln>
           <a:effectLst/>
@@ -18615,14 +19059,14 @@
       </p:sp>
       <p:sp>
         <p:nvSpPr>
-          <p:cNvPr id="36" name="TextBox 35"/>
+          <p:cNvPr id="37" name="TextBox 36"/>
           <p:cNvSpPr txBox="1"/>
           <p:nvPr/>
         </p:nvSpPr>
         <p:spPr>
           <a:xfrm>
-            <a:off x="859536" y="5230368"/>
-            <a:ext cx="10472623" cy="384048"/>
+            <a:off x="859536" y="5266944"/>
+            <a:ext cx="10472623" cy="347471"/>
           </a:xfrm>
           <a:prstGeom prst="rect">
             <a:avLst/>
@@ -18635,11 +19079,15 @@
           </a:bodyPr>
           <a:lstStyle/>
           <a:p>
-            <a:pPr algn="l"/>
+            <a:pPr algn="l">
+              <a:lnSpc>
+                <a:spcPct val="130000"/>
+              </a:lnSpc>
+            </a:pPr>
             <a:r>
               <a:rPr sz="1250" b="1">
                 <a:solidFill>
-                  <a:srgbClr val="027C8C"/>
+                  <a:srgbClr val="5CC8FF"/>
                 </a:solidFill>
                 <a:latin typeface="微软雅黑"/>
                 <a:ea typeface="微软雅黑"/>
@@ -18650,7 +19098,7 @@
             <a:r>
               <a:rPr sz="1250" b="0">
                 <a:solidFill>
-                  <a:srgbClr val="3D4C55"/>
+                  <a:srgbClr val="BBD4EC"/>
                 </a:solidFill>
                 <a:latin typeface="微软雅黑"/>
                 <a:ea typeface="微软雅黑"/>
@@ -18661,7 +19109,7 @@
             <a:r>
               <a:rPr sz="1250" b="1">
                 <a:solidFill>
-                  <a:srgbClr val="0B1F2A"/>
+                  <a:srgbClr val="7FFFE0"/>
                 </a:solidFill>
                 <a:latin typeface="微软雅黑"/>
                 <a:ea typeface="微软雅黑"/>
@@ -18672,7 +19120,7 @@
             <a:r>
               <a:rPr sz="1250" b="0">
                 <a:solidFill>
-                  <a:srgbClr val="3D4C55"/>
+                  <a:srgbClr val="BBD4EC"/>
                 </a:solidFill>
                 <a:latin typeface="微软雅黑"/>
                 <a:ea typeface="微软雅黑"/>
@@ -18710,18 +19158,16 @@
         <p:spPr>
           <a:xfrm>
             <a:off x="0" y="0"/>
-            <a:ext cx="146304" cy="6858000"/>
+            <a:ext cx="12191695" cy="6858000"/>
           </a:xfrm>
           <a:prstGeom prst="rect">
             <a:avLst/>
           </a:prstGeom>
           <a:solidFill>
-            <a:srgbClr val="027C8C"/>
+            <a:srgbClr val="04122B"/>
           </a:solidFill>
-          <a:ln w="9525">
-            <a:solidFill>
-              <a:srgbClr val="027C8C"/>
-            </a:solidFill>
+          <a:ln>
+            <a:noFill/>
           </a:ln>
           <a:effectLst/>
         </p:spPr>
@@ -18749,7 +19195,51 @@
       </p:sp>
       <p:sp>
         <p:nvSpPr>
-          <p:cNvPr id="3" name="TextBox 2"/>
+          <p:cNvPr id="3" name="Rectangle 2"/>
+          <p:cNvSpPr/>
+          <p:nvPr/>
+        </p:nvSpPr>
+        <p:spPr>
+          <a:xfrm>
+            <a:off x="0" y="0"/>
+            <a:ext cx="146304" cy="6858000"/>
+          </a:xfrm>
+          <a:prstGeom prst="rect">
+            <a:avLst/>
+          </a:prstGeom>
+          <a:solidFill>
+            <a:srgbClr val="7FE3FF"/>
+          </a:solidFill>
+          <a:ln>
+            <a:noFill/>
+          </a:ln>
+          <a:effectLst/>
+        </p:spPr>
+        <p:style>
+          <a:lnRef idx="1">
+            <a:schemeClr val="accent1"/>
+          </a:lnRef>
+          <a:fillRef idx="3">
+            <a:schemeClr val="accent1"/>
+          </a:fillRef>
+          <a:effectRef idx="2">
+            <a:schemeClr val="accent1"/>
+          </a:effectRef>
+          <a:fontRef idx="minor">
+            <a:schemeClr val="lt1"/>
+          </a:fontRef>
+        </p:style>
+        <p:txBody>
+          <a:bodyPr rtlCol="0" anchor="ctr"/>
+          <a:lstStyle/>
+          <a:p>
+            <a:pPr algn="ctr"/>
+          </a:p>
+        </p:txBody>
+      </p:sp>
+      <p:sp>
+        <p:nvSpPr>
+          <p:cNvPr id="4" name="TextBox 3"/>
           <p:cNvSpPr txBox="1"/>
           <p:nvPr/>
         </p:nvSpPr>
@@ -18773,7 +19263,7 @@
             <a:r>
               <a:rPr sz="1150" b="1">
                 <a:solidFill>
-                  <a:srgbClr val="027C8C"/>
+                  <a:srgbClr val="5CC8FF"/>
                 </a:solidFill>
                 <a:latin typeface="微软雅黑"/>
                 <a:ea typeface="微软雅黑"/>
@@ -18786,7 +19276,7 @@
       </p:sp>
       <p:sp>
         <p:nvSpPr>
-          <p:cNvPr id="4" name="TextBox 3"/>
+          <p:cNvPr id="5" name="TextBox 4"/>
           <p:cNvSpPr txBox="1"/>
           <p:nvPr/>
         </p:nvSpPr>
@@ -18810,7 +19300,7 @@
             <a:r>
               <a:rPr sz="2700" b="1">
                 <a:solidFill>
-                  <a:srgbClr val="0B1F2A"/>
+                  <a:srgbClr val="ECF7FF"/>
                 </a:solidFill>
                 <a:latin typeface="微软雅黑"/>
                 <a:ea typeface="微软雅黑"/>
@@ -18823,7 +19313,7 @@
       </p:sp>
       <p:sp>
         <p:nvSpPr>
-          <p:cNvPr id="5" name="TextBox 4"/>
+          <p:cNvPr id="6" name="TextBox 5"/>
           <p:cNvSpPr txBox="1"/>
           <p:nvPr/>
         </p:nvSpPr>
@@ -18851,7 +19341,7 @@
             <a:r>
               <a:rPr sz="1250" b="0">
                 <a:solidFill>
-                  <a:srgbClr val="3D4C55"/>
+                  <a:srgbClr val="BBD4EC"/>
                 </a:solidFill>
                 <a:latin typeface="微软雅黑"/>
                 <a:ea typeface="微软雅黑"/>
@@ -18864,7 +19354,7 @@
       </p:sp>
       <p:sp>
         <p:nvSpPr>
-          <p:cNvPr id="6" name="TextBox 5"/>
+          <p:cNvPr id="7" name="TextBox 6"/>
           <p:cNvSpPr txBox="1"/>
           <p:nvPr/>
         </p:nvSpPr>
@@ -18888,7 +19378,7 @@
             <a:r>
               <a:rPr sz="950" b="0">
                 <a:solidFill>
-                  <a:srgbClr val="6B7C85"/>
+                  <a:srgbClr val="7E9EC4"/>
                 </a:solidFill>
                 <a:latin typeface="微软雅黑"/>
                 <a:ea typeface="微软雅黑"/>
@@ -18901,7 +19391,7 @@
       </p:sp>
       <p:sp>
         <p:nvSpPr>
-          <p:cNvPr id="7" name="TextBox 6"/>
+          <p:cNvPr id="8" name="TextBox 7"/>
           <p:cNvSpPr txBox="1"/>
           <p:nvPr/>
         </p:nvSpPr>
@@ -18925,7 +19415,7 @@
             <a:r>
               <a:rPr sz="950" b="0">
                 <a:solidFill>
-                  <a:srgbClr val="6B7C85"/>
+                  <a:srgbClr val="7E9EC4"/>
                 </a:solidFill>
                 <a:latin typeface="微软雅黑"/>
                 <a:ea typeface="微软雅黑"/>
@@ -18938,7 +19428,7 @@
       </p:sp>
       <p:sp>
         <p:nvSpPr>
-          <p:cNvPr id="8" name="Rounded Rectangle 7"/>
+          <p:cNvPr id="9" name="Rounded Rectangle 8"/>
           <p:cNvSpPr/>
           <p:nvPr/>
         </p:nvSpPr>
@@ -18953,11 +19443,11 @@
             </a:avLst>
           </a:prstGeom>
           <a:solidFill>
-            <a:srgbClr val="F2F6F8"/>
+            <a:srgbClr val="061A38"/>
           </a:solidFill>
           <a:ln w="9525">
             <a:solidFill>
-              <a:srgbClr val="F2F6F8"/>
+              <a:srgbClr val="1A4272"/>
             </a:solidFill>
           </a:ln>
           <a:effectLst/>
@@ -18986,7 +19476,7 @@
       </p:sp>
       <p:sp>
         <p:nvSpPr>
-          <p:cNvPr id="9" name="Rounded Rectangle 8"/>
+          <p:cNvPr id="10" name="Rounded Rectangle 9"/>
           <p:cNvSpPr/>
           <p:nvPr/>
         </p:nvSpPr>
@@ -19001,12 +19491,10 @@
             </a:avLst>
           </a:prstGeom>
           <a:solidFill>
-            <a:srgbClr val="02B08A"/>
+            <a:srgbClr val="7FE3FF"/>
           </a:solidFill>
-          <a:ln w="9525">
-            <a:solidFill>
-              <a:srgbClr val="02B08A"/>
-            </a:solidFill>
+          <a:ln>
+            <a:noFill/>
           </a:ln>
           <a:effectLst/>
         </p:spPr>
@@ -19034,7 +19522,7 @@
       </p:sp>
       <p:sp>
         <p:nvSpPr>
-          <p:cNvPr id="10" name="TextBox 9"/>
+          <p:cNvPr id="11" name="TextBox 10"/>
           <p:cNvSpPr txBox="1"/>
           <p:nvPr/>
         </p:nvSpPr>
@@ -19058,7 +19546,7 @@
             <a:r>
               <a:rPr sz="1500" b="1">
                 <a:solidFill>
-                  <a:srgbClr val="0B1F2A"/>
+                  <a:srgbClr val="ECF7FF"/>
                 </a:solidFill>
                 <a:latin typeface="微软雅黑"/>
                 <a:ea typeface="微软雅黑"/>
@@ -19071,7 +19559,7 @@
       </p:sp>
       <p:sp>
         <p:nvSpPr>
-          <p:cNvPr id="11" name="TextBox 10"/>
+          <p:cNvPr id="12" name="TextBox 11"/>
           <p:cNvSpPr txBox="1"/>
           <p:nvPr/>
         </p:nvSpPr>
@@ -19102,7 +19590,7 @@
             <a:r>
               <a:rPr sz="1050" b="0">
                 <a:solidFill>
-                  <a:srgbClr val="3D4C55"/>
+                  <a:srgbClr val="BBD4EC"/>
                 </a:solidFill>
                 <a:latin typeface="微软雅黑"/>
                 <a:ea typeface="微软雅黑"/>
@@ -19123,7 +19611,7 @@
             <a:r>
               <a:rPr sz="1050" b="0">
                 <a:solidFill>
-                  <a:srgbClr val="3D4C55"/>
+                  <a:srgbClr val="BBD4EC"/>
                 </a:solidFill>
                 <a:latin typeface="微软雅黑"/>
                 <a:ea typeface="微软雅黑"/>
@@ -19144,7 +19632,7 @@
             <a:r>
               <a:rPr sz="1050" b="0">
                 <a:solidFill>
-                  <a:srgbClr val="3D4C55"/>
+                  <a:srgbClr val="BBD4EC"/>
                 </a:solidFill>
                 <a:latin typeface="微软雅黑"/>
                 <a:ea typeface="微软雅黑"/>
@@ -19157,7 +19645,7 @@
       </p:sp>
       <p:sp>
         <p:nvSpPr>
-          <p:cNvPr id="12" name="Rounded Rectangle 11"/>
+          <p:cNvPr id="13" name="Rounded Rectangle 12"/>
           <p:cNvSpPr/>
           <p:nvPr/>
         </p:nvSpPr>
@@ -19172,11 +19660,11 @@
             </a:avLst>
           </a:prstGeom>
           <a:solidFill>
-            <a:srgbClr val="F2F6F8"/>
+            <a:srgbClr val="061A38"/>
           </a:solidFill>
           <a:ln w="9525">
             <a:solidFill>
-              <a:srgbClr val="F2F6F8"/>
+              <a:srgbClr val="1A4272"/>
             </a:solidFill>
           </a:ln>
           <a:effectLst/>
@@ -19205,7 +19693,7 @@
       </p:sp>
       <p:sp>
         <p:nvSpPr>
-          <p:cNvPr id="13" name="Rounded Rectangle 12"/>
+          <p:cNvPr id="14" name="Rounded Rectangle 13"/>
           <p:cNvSpPr/>
           <p:nvPr/>
         </p:nvSpPr>
@@ -19220,12 +19708,10 @@
             </a:avLst>
           </a:prstGeom>
           <a:solidFill>
-            <a:srgbClr val="027C8C"/>
+            <a:srgbClr val="5CC8FF"/>
           </a:solidFill>
-          <a:ln w="9525">
-            <a:solidFill>
-              <a:srgbClr val="027C8C"/>
-            </a:solidFill>
+          <a:ln>
+            <a:noFill/>
           </a:ln>
           <a:effectLst/>
         </p:spPr>
@@ -19253,7 +19739,7 @@
       </p:sp>
       <p:sp>
         <p:nvSpPr>
-          <p:cNvPr id="14" name="TextBox 13"/>
+          <p:cNvPr id="15" name="TextBox 14"/>
           <p:cNvSpPr txBox="1"/>
           <p:nvPr/>
         </p:nvSpPr>
@@ -19277,7 +19763,7 @@
             <a:r>
               <a:rPr sz="1500" b="1">
                 <a:solidFill>
-                  <a:srgbClr val="0B1F2A"/>
+                  <a:srgbClr val="ECF7FF"/>
                 </a:solidFill>
                 <a:latin typeface="微软雅黑"/>
                 <a:ea typeface="微软雅黑"/>
@@ -19290,7 +19776,7 @@
       </p:sp>
       <p:sp>
         <p:nvSpPr>
-          <p:cNvPr id="15" name="TextBox 14"/>
+          <p:cNvPr id="16" name="TextBox 15"/>
           <p:cNvSpPr txBox="1"/>
           <p:nvPr/>
         </p:nvSpPr>
@@ -19321,7 +19807,7 @@
             <a:r>
               <a:rPr sz="1050" b="0">
                 <a:solidFill>
-                  <a:srgbClr val="3D4C55"/>
+                  <a:srgbClr val="BBD4EC"/>
                 </a:solidFill>
                 <a:latin typeface="微软雅黑"/>
                 <a:ea typeface="微软雅黑"/>
@@ -19342,7 +19828,7 @@
             <a:r>
               <a:rPr sz="1050" b="0">
                 <a:solidFill>
-                  <a:srgbClr val="3D4C55"/>
+                  <a:srgbClr val="BBD4EC"/>
                 </a:solidFill>
                 <a:latin typeface="微软雅黑"/>
                 <a:ea typeface="微软雅黑"/>
@@ -19363,7 +19849,7 @@
             <a:r>
               <a:rPr sz="1050" b="0">
                 <a:solidFill>
-                  <a:srgbClr val="3D4C55"/>
+                  <a:srgbClr val="BBD4EC"/>
                 </a:solidFill>
                 <a:latin typeface="微软雅黑"/>
                 <a:ea typeface="微软雅黑"/>
@@ -19376,7 +19862,7 @@
       </p:sp>
       <p:sp>
         <p:nvSpPr>
-          <p:cNvPr id="16" name="Rounded Rectangle 15"/>
+          <p:cNvPr id="17" name="Rounded Rectangle 16"/>
           <p:cNvSpPr/>
           <p:nvPr/>
         </p:nvSpPr>
@@ -19391,11 +19877,11 @@
             </a:avLst>
           </a:prstGeom>
           <a:solidFill>
-            <a:srgbClr val="F2F6F8"/>
+            <a:srgbClr val="061A38"/>
           </a:solidFill>
           <a:ln w="9525">
             <a:solidFill>
-              <a:srgbClr val="F2F6F8"/>
+              <a:srgbClr val="1A4272"/>
             </a:solidFill>
           </a:ln>
           <a:effectLst/>
@@ -19424,7 +19910,7 @@
       </p:sp>
       <p:sp>
         <p:nvSpPr>
-          <p:cNvPr id="17" name="Rounded Rectangle 16"/>
+          <p:cNvPr id="18" name="Rounded Rectangle 17"/>
           <p:cNvSpPr/>
           <p:nvPr/>
         </p:nvSpPr>
@@ -19439,12 +19925,10 @@
             </a:avLst>
           </a:prstGeom>
           <a:solidFill>
-            <a:srgbClr val="02B08A"/>
+            <a:srgbClr val="7FE3FF"/>
           </a:solidFill>
-          <a:ln w="9525">
-            <a:solidFill>
-              <a:srgbClr val="02B08A"/>
-            </a:solidFill>
+          <a:ln>
+            <a:noFill/>
           </a:ln>
           <a:effectLst/>
         </p:spPr>
@@ -19472,7 +19956,7 @@
       </p:sp>
       <p:sp>
         <p:nvSpPr>
-          <p:cNvPr id="18" name="TextBox 17"/>
+          <p:cNvPr id="19" name="TextBox 18"/>
           <p:cNvSpPr txBox="1"/>
           <p:nvPr/>
         </p:nvSpPr>
@@ -19496,7 +19980,7 @@
             <a:r>
               <a:rPr sz="1500" b="1">
                 <a:solidFill>
-                  <a:srgbClr val="0B1F2A"/>
+                  <a:srgbClr val="ECF7FF"/>
                 </a:solidFill>
                 <a:latin typeface="微软雅黑"/>
                 <a:ea typeface="微软雅黑"/>
@@ -19509,7 +19993,7 @@
       </p:sp>
       <p:sp>
         <p:nvSpPr>
-          <p:cNvPr id="19" name="TextBox 18"/>
+          <p:cNvPr id="20" name="TextBox 19"/>
           <p:cNvSpPr txBox="1"/>
           <p:nvPr/>
         </p:nvSpPr>
@@ -19540,7 +20024,7 @@
             <a:r>
               <a:rPr sz="1050" b="0">
                 <a:solidFill>
-                  <a:srgbClr val="3D4C55"/>
+                  <a:srgbClr val="BBD4EC"/>
                 </a:solidFill>
                 <a:latin typeface="微软雅黑"/>
                 <a:ea typeface="微软雅黑"/>
@@ -19561,7 +20045,7 @@
             <a:r>
               <a:rPr sz="1050" b="0">
                 <a:solidFill>
-                  <a:srgbClr val="3D4C55"/>
+                  <a:srgbClr val="BBD4EC"/>
                 </a:solidFill>
                 <a:latin typeface="微软雅黑"/>
                 <a:ea typeface="微软雅黑"/>
@@ -19582,7 +20066,7 @@
             <a:r>
               <a:rPr sz="1050" b="0">
                 <a:solidFill>
-                  <a:srgbClr val="3D4C55"/>
+                  <a:srgbClr val="BBD4EC"/>
                 </a:solidFill>
                 <a:latin typeface="微软雅黑"/>
                 <a:ea typeface="微软雅黑"/>
@@ -19595,7 +20079,7 @@
       </p:sp>
       <p:sp>
         <p:nvSpPr>
-          <p:cNvPr id="20" name="Rounded Rectangle 19"/>
+          <p:cNvPr id="21" name="Rounded Rectangle 20"/>
           <p:cNvSpPr/>
           <p:nvPr/>
         </p:nvSpPr>
@@ -19610,11 +20094,11 @@
             </a:avLst>
           </a:prstGeom>
           <a:solidFill>
-            <a:srgbClr val="F2F6F8"/>
+            <a:srgbClr val="061A38"/>
           </a:solidFill>
           <a:ln w="9525">
             <a:solidFill>
-              <a:srgbClr val="F2F6F8"/>
+              <a:srgbClr val="1A4272"/>
             </a:solidFill>
           </a:ln>
           <a:effectLst/>
@@ -19643,7 +20127,7 @@
       </p:sp>
       <p:sp>
         <p:nvSpPr>
-          <p:cNvPr id="21" name="Rounded Rectangle 20"/>
+          <p:cNvPr id="22" name="Rounded Rectangle 21"/>
           <p:cNvSpPr/>
           <p:nvPr/>
         </p:nvSpPr>
@@ -19658,12 +20142,10 @@
             </a:avLst>
           </a:prstGeom>
           <a:solidFill>
-            <a:srgbClr val="027C8C"/>
+            <a:srgbClr val="5CC8FF"/>
           </a:solidFill>
-          <a:ln w="9525">
-            <a:solidFill>
-              <a:srgbClr val="027C8C"/>
-            </a:solidFill>
+          <a:ln>
+            <a:noFill/>
           </a:ln>
           <a:effectLst/>
         </p:spPr>
@@ -19691,7 +20173,7 @@
       </p:sp>
       <p:sp>
         <p:nvSpPr>
-          <p:cNvPr id="22" name="TextBox 21"/>
+          <p:cNvPr id="23" name="TextBox 22"/>
           <p:cNvSpPr txBox="1"/>
           <p:nvPr/>
         </p:nvSpPr>
@@ -19715,7 +20197,7 @@
             <a:r>
               <a:rPr sz="1500" b="1">
                 <a:solidFill>
-                  <a:srgbClr val="0B1F2A"/>
+                  <a:srgbClr val="ECF7FF"/>
                 </a:solidFill>
                 <a:latin typeface="微软雅黑"/>
                 <a:ea typeface="微软雅黑"/>
@@ -19728,7 +20210,7 @@
       </p:sp>
       <p:sp>
         <p:nvSpPr>
-          <p:cNvPr id="23" name="TextBox 22"/>
+          <p:cNvPr id="24" name="TextBox 23"/>
           <p:cNvSpPr txBox="1"/>
           <p:nvPr/>
         </p:nvSpPr>
@@ -19759,7 +20241,7 @@
             <a:r>
               <a:rPr sz="1050" b="0">
                 <a:solidFill>
-                  <a:srgbClr val="3D4C55"/>
+                  <a:srgbClr val="BBD4EC"/>
                 </a:solidFill>
                 <a:latin typeface="微软雅黑"/>
                 <a:ea typeface="微软雅黑"/>
@@ -19780,7 +20262,7 @@
             <a:r>
               <a:rPr sz="1050" b="0">
                 <a:solidFill>
-                  <a:srgbClr val="3D4C55"/>
+                  <a:srgbClr val="BBD4EC"/>
                 </a:solidFill>
                 <a:latin typeface="微软雅黑"/>
                 <a:ea typeface="微软雅黑"/>
@@ -19801,7 +20283,7 @@
             <a:r>
               <a:rPr sz="1050" b="0">
                 <a:solidFill>
-                  <a:srgbClr val="3D4C55"/>
+                  <a:srgbClr val="BBD4EC"/>
                 </a:solidFill>
                 <a:latin typeface="微软雅黑"/>
                 <a:ea typeface="微软雅黑"/>
@@ -19814,7 +20296,7 @@
       </p:sp>
       <p:sp>
         <p:nvSpPr>
-          <p:cNvPr id="24" name="Rounded Rectangle 23"/>
+          <p:cNvPr id="25" name="Rounded Rectangle 24"/>
           <p:cNvSpPr/>
           <p:nvPr/>
         </p:nvSpPr>
@@ -19829,11 +20311,11 @@
             </a:avLst>
           </a:prstGeom>
           <a:solidFill>
-            <a:srgbClr val="F2F6F8"/>
+            <a:srgbClr val="061A38"/>
           </a:solidFill>
           <a:ln w="9525">
             <a:solidFill>
-              <a:srgbClr val="F2F6F8"/>
+              <a:srgbClr val="1A4272"/>
             </a:solidFill>
           </a:ln>
           <a:effectLst/>
@@ -19862,7 +20344,7 @@
       </p:sp>
       <p:sp>
         <p:nvSpPr>
-          <p:cNvPr id="25" name="TextBox 24"/>
+          <p:cNvPr id="26" name="TextBox 25"/>
           <p:cNvSpPr txBox="1"/>
           <p:nvPr/>
         </p:nvSpPr>
@@ -19893,7 +20375,7 @@
             <a:r>
               <a:rPr sz="1200" b="1">
                 <a:solidFill>
-                  <a:srgbClr val="027C8C"/>
+                  <a:srgbClr val="5CC8FF"/>
                 </a:solidFill>
                 <a:latin typeface="微软雅黑"/>
                 <a:ea typeface="微软雅黑"/>
@@ -19904,7 +20386,7 @@
             <a:r>
               <a:rPr sz="1200" b="0">
                 <a:solidFill>
-                  <a:srgbClr val="3D4C55"/>
+                  <a:srgbClr val="BBD4EC"/>
                 </a:solidFill>
                 <a:latin typeface="微软雅黑"/>
                 <a:ea typeface="微软雅黑"/>
@@ -19915,7 +20397,7 @@
             <a:r>
               <a:rPr sz="1200" b="1">
                 <a:solidFill>
-                  <a:srgbClr val="0B1F2A"/>
+                  <a:srgbClr val="7FFFE0"/>
                 </a:solidFill>
                 <a:latin typeface="微软雅黑"/>
                 <a:ea typeface="微软雅黑"/>
@@ -19926,7 +20408,7 @@
             <a:r>
               <a:rPr sz="1200" b="0">
                 <a:solidFill>
-                  <a:srgbClr val="3D4C55"/>
+                  <a:srgbClr val="BBD4EC"/>
                 </a:solidFill>
                 <a:latin typeface="微软雅黑"/>
                 <a:ea typeface="微软雅黑"/>
@@ -19944,7 +20426,7 @@
             <a:r>
               <a:rPr sz="1200" b="1">
                 <a:solidFill>
-                  <a:srgbClr val="027C8C"/>
+                  <a:srgbClr val="5CC8FF"/>
                 </a:solidFill>
                 <a:latin typeface="微软雅黑"/>
                 <a:ea typeface="微软雅黑"/>
@@ -19955,7 +20437,7 @@
             <a:r>
               <a:rPr sz="1200" b="0">
                 <a:solidFill>
-                  <a:srgbClr val="3D4C55"/>
+                  <a:srgbClr val="BBD4EC"/>
                 </a:solidFill>
                 <a:latin typeface="微软雅黑"/>
                 <a:ea typeface="微软雅黑"/>

--- a/docs/ppt/医院数据管理平台-项目汇报.pptx
+++ b/docs/ppt/医院数据管理平台-项目汇报.pptx
@@ -6137,7 +6137,7 @@
         </p:nvGraphicFramePr>
         <p:xfrm>
           <a:off x="566928" y="1627632"/>
-          <a:ext cx="11057839" cy="4151376"/>
+          <a:ext cx="11057839" cy="3785616"/>
         </p:xfrm>
         <a:graphic>
           <a:graphicData uri="http://schemas.openxmlformats.org/drawingml/2006/table">
@@ -6239,7 +6239,7 @@
                   </a:tcPr>
                 </a:tc>
               </a:tr>
-              <a:tr h="749808">
+              <a:tr h="676656">
                 <a:tc>
                   <a:txBody>
                     <a:bodyPr/>
@@ -6328,7 +6328,7 @@
                   </a:tcPr>
                 </a:tc>
               </a:tr>
-              <a:tr h="749808">
+              <a:tr h="676656">
                 <a:tc>
                   <a:txBody>
                     <a:bodyPr/>
@@ -6417,7 +6417,7 @@
                   </a:tcPr>
                 </a:tc>
               </a:tr>
-              <a:tr h="749808">
+              <a:tr h="676656">
                 <a:tc>
                   <a:txBody>
                     <a:bodyPr/>
@@ -6506,7 +6506,7 @@
                   </a:tcPr>
                 </a:tc>
               </a:tr>
-              <a:tr h="749808">
+              <a:tr h="676656">
                 <a:tc>
                   <a:txBody>
                     <a:bodyPr/>
@@ -6595,7 +6595,7 @@
                   </a:tcPr>
                 </a:tc>
               </a:tr>
-              <a:tr h="749808">
+              <a:tr h="676656">
                 <a:tc>
                   <a:txBody>
                     <a:bodyPr/>
@@ -6696,7 +6696,7 @@
         </p:nvSpPr>
         <p:spPr>
           <a:xfrm>
-            <a:off x="566928" y="5614416"/>
+            <a:off x="566928" y="5559552"/>
             <a:ext cx="11057839" cy="310896"/>
           </a:xfrm>
           <a:prstGeom prst="rect">
